--- a/decks/dignity-and-belonging-lesson-v2.pptx
+++ b/decks/dignity-and-belonging-lesson-v2.pptx
@@ -16,6 +16,7 @@
     <p:sldId id="264" r:id="rId16"/>
     <p:sldId id="265" r:id="rId17"/>
     <p:sldId id="266" r:id="rId18"/>
+    <p:sldId id="267" r:id="rId19"/>
   </p:sldIdLst>
   <p:sldSz cx="12192000" cy="6858000" type="screen4x3"/>
   <p:notesSz cx="6858000" cy="9144000"/>
@@ -512,7 +513,7 @@
           <a:lstStyle/>
           <a:p>
             <a:r>
-              <a:t>This page and the next three are hidden. They stay in the deck for you and are skipped when you present.</a:t>
+              <a:t>This page is hidden and skipped when you present. The full plan, care notes and research are on the hidden pages at the end of the deck, if you want them.</a:t>
             </a:r>
           </a:p>
         </p:txBody>
@@ -1003,6 +1004,76 @@
           <a:p>
             <a:r>
               <a:t>3 MINUTES. Ideas: learn someone's name and say it right, save a seat, add someone to a plan, check in after someone gets laughed at. Share the student page link. Mention that if they don't feel they belong anywhere, or someone is targeting them for who they are, a counselor is a good person to talk to.</a:t>
+            </a:r>
+          </a:p>
+        </p:txBody>
+      </p:sp>
+      <p:sp>
+        <p:nvSpPr>
+          <p:cNvPr id="4" name="Slide Number Placeholder 3"/>
+          <p:cNvSpPr>
+            <a:spLocks noGrp="1"/>
+          </p:cNvSpPr>
+          <p:nvPr>
+            <p:ph type="sldNum" idx="5" sz="quarter"/>
+          </p:nvPr>
+        </p:nvSpPr>
+        <p:spPr/>
+      </p:sp>
+    </p:spTree>
+  </p:cSld>
+  <p:clrMapOvr>
+    <a:masterClrMapping/>
+  </p:clrMapOvr>
+</p:notes>
+</file>
+
+<file path=ppt/notesSlides/notesSlide9.xml><?xml version="1.0" encoding="utf-8"?>
+<p:notes xmlns:a="http://schemas.openxmlformats.org/drawingml/2006/main" xmlns:p="http://schemas.openxmlformats.org/presentationml/2006/main" xmlns:r="http://schemas.openxmlformats.org/officeDocument/2006/relationships">
+  <p:cSld>
+    <p:spTree>
+      <p:nvGrpSpPr>
+        <p:cNvPr id="1" name=""/>
+        <p:cNvGrpSpPr/>
+        <p:nvPr/>
+      </p:nvGrpSpPr>
+      <p:grpSpPr>
+        <a:xfrm>
+          <a:off x="0" y="0"/>
+          <a:ext cx="0" cy="0"/>
+          <a:chOff x="0" y="0"/>
+          <a:chExt cx="0" cy="0"/>
+        </a:xfrm>
+      </p:grpSpPr>
+      <p:sp>
+        <p:nvSpPr>
+          <p:cNvPr id="2" name="Slide Image Placeholder 1"/>
+          <p:cNvSpPr>
+            <a:spLocks noGrp="1"/>
+          </p:cNvSpPr>
+          <p:nvPr>
+            <p:ph type="sldImg" idx="2"/>
+          </p:nvPr>
+        </p:nvSpPr>
+        <p:spPr/>
+      </p:sp>
+      <p:sp>
+        <p:nvSpPr>
+          <p:cNvPr id="3" name="Notes Placeholder 2"/>
+          <p:cNvSpPr>
+            <a:spLocks noGrp="1"/>
+          </p:cNvSpPr>
+          <p:nvPr>
+            <p:ph type="body" idx="3" sz="quarter"/>
+          </p:nvPr>
+        </p:nvSpPr>
+        <p:spPr/>
+        <p:txBody>
+          <a:bodyPr/>
+          <a:lstStyle/>
+          <a:p>
+            <a:r>
+              <a:t>If you want more: this page and the next three are hidden and skipped when you present.</a:t>
             </a:r>
           </a:p>
         </p:txBody>
@@ -4094,7 +4165,7 @@
                 </a:solidFill>
                 <a:latin typeface="Inter Tight"/>
               </a:rPr>
-              <a:t>TEACHER PAGE  ·  skipped when you present  ·  Lesson plan</a:t>
+              <a:t>TEACHER PAGE  ·  skipped when you present  ·  Before you start</a:t>
             </a:r>
           </a:p>
         </p:txBody>
@@ -4185,8 +4256,8 @@
         </p:nvSpPr>
         <p:spPr>
           <a:xfrm>
-            <a:off x="548640" y="1828800"/>
-            <a:ext cx="5120640" cy="4389120"/>
+            <a:off x="548640" y="2011680"/>
+            <a:ext cx="11064240" cy="4206240"/>
           </a:xfrm>
           <a:prstGeom prst="rect">
             <a:avLst/>
@@ -4201,43 +4272,43 @@
           <a:p>
             <a:pPr algn="l">
               <a:spcAft>
-                <a:spcPts val="675"/>
-              </a:spcAft>
-            </a:pPr>
-            <a:r>
-              <a:rPr sz="1100" b="1" i="0">
+                <a:spcPts val="900"/>
+              </a:spcAft>
+            </a:pPr>
+            <a:r>
+              <a:rPr sz="1200" b="1" i="0">
                 <a:solidFill>
                   <a:srgbClr val="0B2D5B"/>
                 </a:solidFill>
                 <a:latin typeface="Inter Tight"/>
               </a:rPr>
-              <a:t>GOAL</a:t>
-            </a:r>
-          </a:p>
-          <a:p>
-            <a:pPr algn="l">
-              <a:spcAft>
-                <a:spcPts val="675"/>
-              </a:spcAft>
-            </a:pPr>
-            <a:r>
-              <a:rPr sz="1500" b="0" i="0">
+              <a:t>BEFORE YOU START</a:t>
+            </a:r>
+          </a:p>
+          <a:p>
+            <a:pPr algn="l">
+              <a:spcAft>
+                <a:spcPts val="900"/>
+              </a:spcAft>
+            </a:pPr>
+            <a:r>
+              <a:rPr sz="2000" b="0" i="0">
                 <a:solidFill>
                   <a:srgbClr val="1C1B19"/>
                 </a:solidFill>
                 <a:latin typeface="Source Serif 4"/>
               </a:rPr>
-              <a:t>Students can tell the difference between dignity (worth everyone has) and respect (earned), and between belonging and fitting in; recognize small moments that build or break belonging; and choose one way to widen the circle this week. Nobody is asked to share a time they were left out or excluded someone.</a:t>
-            </a:r>
-          </a:p>
-          <a:p>
-            <a:pPr algn="l">
-              <a:spcAft>
-                <a:spcPts val="675"/>
-              </a:spcAft>
-            </a:pPr>
-            <a:r>
-              <a:rPr sz="1500" b="0" i="0">
+              <a:t>Students learn the difference between dignity (everyone has it) and respect (earned), and between belonging and fitting in, then pick one way to widen the circle. Bring index cards, keep examples invented, and quietly check in afterward if a "breaks it" example seems to land on someone in the room.</a:t>
+            </a:r>
+          </a:p>
+          <a:p>
+            <a:pPr algn="l">
+              <a:spcAft>
+                <a:spcPts val="900"/>
+              </a:spcAft>
+            </a:pPr>
+            <a:r>
+              <a:rPr sz="2000" b="0" i="0">
                 <a:solidFill>
                   <a:srgbClr val="1C1B19"/>
                 </a:solidFill>
@@ -4249,277 +4320,33 @@
           <a:p>
             <a:pPr algn="l">
               <a:spcAft>
-                <a:spcPts val="675"/>
-              </a:spcAft>
-            </a:pPr>
-            <a:r>
-              <a:rPr sz="1100" b="1" i="0">
+                <a:spcPts val="900"/>
+              </a:spcAft>
+            </a:pPr>
+            <a:r>
+              <a:rPr sz="1200" b="1" i="0">
                 <a:solidFill>
                   <a:srgbClr val="0B2D5B"/>
                 </a:solidFill>
                 <a:latin typeface="Inter Tight"/>
               </a:rPr>
-              <a:t>MATERIALS</a:t>
-            </a:r>
-          </a:p>
-          <a:p>
-            <a:pPr algn="l">
-              <a:spcAft>
-                <a:spcPts val="675"/>
-              </a:spcAft>
-            </a:pPr>
-            <a:r>
-              <a:rPr sz="1500" b="0" i="0">
+              <a:t>EVERY STUDENT IN THE ROOM</a:t>
+            </a:r>
+          </a:p>
+          <a:p>
+            <a:pPr algn="l">
+              <a:spcAft>
+                <a:spcPts val="900"/>
+              </a:spcAft>
+            </a:pPr>
+            <a:r>
+              <a:rPr sz="2000" b="0" i="0">
                 <a:solidFill>
                   <a:srgbClr val="1C1B19"/>
                 </a:solidFill>
                 <a:latin typeface="Source Serif 4"/>
               </a:rPr>
-              <a:t>Index cards, one per student</a:t>
-            </a:r>
-          </a:p>
-          <a:p>
-            <a:pPr algn="l">
-              <a:spcAft>
-                <a:spcPts val="675"/>
-              </a:spcAft>
-            </a:pPr>
-            <a:r>
-              <a:rPr sz="1500" b="0" i="0">
-                <a:solidFill>
-                  <a:srgbClr val="1C1B19"/>
-                </a:solidFill>
-                <a:latin typeface="Source Serif 4"/>
-              </a:rPr>
-              <a:t>A board or chart paper with two columns: Builds belonging and Breaks it</a:t>
-            </a:r>
-          </a:p>
-          <a:p>
-            <a:pPr algn="l">
-              <a:spcAft>
-                <a:spcPts val="675"/>
-              </a:spcAft>
-            </a:pPr>
-            <a:r>
-              <a:rPr sz="1500" b="0" i="0">
-                <a:solidFill>
-                  <a:srgbClr val="1C1B19"/>
-                </a:solidFill>
-                <a:latin typeface="Source Serif 4"/>
-              </a:rPr>
-              <a:t>The student page link (last slide) to share after advisory</a:t>
-            </a:r>
-          </a:p>
-        </p:txBody>
-      </p:sp>
-      <p:sp>
-        <p:nvSpPr>
-          <p:cNvPr id="7" name="TextBox 6"/>
-          <p:cNvSpPr txBox="1"/>
-          <p:nvPr/>
-        </p:nvSpPr>
-        <p:spPr>
-          <a:xfrm>
-            <a:off x="6126480" y="1828800"/>
-            <a:ext cx="5486400" cy="4389120"/>
-          </a:xfrm>
-          <a:prstGeom prst="rect">
-            <a:avLst/>
-          </a:prstGeom>
-          <a:noFill/>
-        </p:spPr>
-        <p:txBody>
-          <a:bodyPr wrap="square" anchor="t" lIns="0" rIns="0" tIns="0" bIns="0">
-            <a:spAutoFit/>
-          </a:bodyPr>
-          <a:lstStyle/>
-          <a:p>
-            <a:pPr algn="l">
-              <a:spcAft>
-                <a:spcPts val="630"/>
-              </a:spcAft>
-            </a:pPr>
-            <a:r>
-              <a:rPr sz="1100" b="1" i="0">
-                <a:solidFill>
-                  <a:srgbClr val="0B2D5B"/>
-                </a:solidFill>
-                <a:latin typeface="Inter Tight"/>
-              </a:rPr>
-              <a:t>FLOW</a:t>
-            </a:r>
-          </a:p>
-          <a:p>
-            <a:pPr algn="l">
-              <a:spcAft>
-                <a:spcPts val="630"/>
-              </a:spcAft>
-            </a:pPr>
-            <a:r>
-              <a:rPr sz="1300" b="1" i="0">
-                <a:solidFill>
-                  <a:srgbClr val="F47B20"/>
-                </a:solidFill>
-                <a:latin typeface="Inter Tight"/>
-              </a:rPr>
-              <a:t>3 min   </a:t>
-            </a:r>
-            <a:r>
-              <a:rPr sz="1400" b="0" i="0">
-                <a:solidFill>
-                  <a:srgbClr val="1C1B19"/>
-                </a:solidFill>
-                <a:latin typeface="Source Serif 4"/>
-              </a:rPr>
-              <a:t>A place you belong: what makes it that way?</a:t>
-            </a:r>
-          </a:p>
-          <a:p>
-            <a:pPr algn="l">
-              <a:spcAft>
-                <a:spcPts val="630"/>
-              </a:spcAft>
-            </a:pPr>
-            <a:r>
-              <a:rPr sz="1300" b="1" i="0">
-                <a:solidFill>
-                  <a:srgbClr val="F47B20"/>
-                </a:solidFill>
-                <a:latin typeface="Inter Tight"/>
-              </a:rPr>
-              <a:t>4 min   </a:t>
-            </a:r>
-            <a:r>
-              <a:rPr sz="1400" b="0" i="0">
-                <a:solidFill>
-                  <a:srgbClr val="1C1B19"/>
-                </a:solidFill>
-                <a:latin typeface="Source Serif 4"/>
-              </a:rPr>
-              <a:t>Dignity and respect: what's the difference?</a:t>
-            </a:r>
-          </a:p>
-          <a:p>
-            <a:pPr algn="l">
-              <a:spcAft>
-                <a:spcPts val="630"/>
-              </a:spcAft>
-            </a:pPr>
-            <a:r>
-              <a:rPr sz="1300" b="1" i="0">
-                <a:solidFill>
-                  <a:srgbClr val="F47B20"/>
-                </a:solidFill>
-                <a:latin typeface="Inter Tight"/>
-              </a:rPr>
-              <a:t>4 min   </a:t>
-            </a:r>
-            <a:r>
-              <a:rPr sz="1400" b="0" i="0">
-                <a:solidFill>
-                  <a:srgbClr val="1C1B19"/>
-                </a:solidFill>
-                <a:latin typeface="Source Serif 4"/>
-              </a:rPr>
-              <a:t>Belonging versus fitting in</a:t>
-            </a:r>
-          </a:p>
-          <a:p>
-            <a:pPr algn="l">
-              <a:spcAft>
-                <a:spcPts val="630"/>
-              </a:spcAft>
-            </a:pPr>
-            <a:r>
-              <a:rPr sz="1300" b="1" i="0">
-                <a:solidFill>
-                  <a:srgbClr val="F47B20"/>
-                </a:solidFill>
-                <a:latin typeface="Inter Tight"/>
-              </a:rPr>
-              <a:t>6 min   </a:t>
-            </a:r>
-            <a:r>
-              <a:rPr sz="1400" b="0" i="0">
-                <a:solidFill>
-                  <a:srgbClr val="1C1B19"/>
-                </a:solidFill>
-                <a:latin typeface="Source Serif 4"/>
-              </a:rPr>
-              <a:t>Small moments: builds it or breaks it? (sort)</a:t>
-            </a:r>
-          </a:p>
-          <a:p>
-            <a:pPr algn="l">
-              <a:spcAft>
-                <a:spcPts val="630"/>
-              </a:spcAft>
-            </a:pPr>
-            <a:r>
-              <a:rPr sz="1300" b="1" i="0">
-                <a:solidFill>
-                  <a:srgbClr val="F47B20"/>
-                </a:solidFill>
-                <a:latin typeface="Inter Tight"/>
-              </a:rPr>
-              <a:t>3 min   </a:t>
-            </a:r>
-            <a:r>
-              <a:rPr sz="1400" b="0" i="0">
-                <a:solidFill>
-                  <a:srgbClr val="1C1B19"/>
-                </a:solidFill>
-                <a:latin typeface="Source Serif 4"/>
-              </a:rPr>
-              <a:t>One way to widen the circle, privately, and the student page link</a:t>
-            </a:r>
-          </a:p>
-          <a:p>
-            <a:pPr algn="l">
-              <a:spcAft>
-                <a:spcPts val="630"/>
-              </a:spcAft>
-            </a:pPr>
-            <a:r>
-              <a:rPr sz="1400" b="0" i="0">
-                <a:solidFill>
-                  <a:srgbClr val="1C1B19"/>
-                </a:solidFill>
-                <a:latin typeface="Source Serif 4"/>
-              </a:rPr>
-              <a:t/>
-            </a:r>
-          </a:p>
-          <a:p>
-            <a:pPr algn="l">
-              <a:spcAft>
-                <a:spcPts val="630"/>
-              </a:spcAft>
-            </a:pPr>
-            <a:r>
-              <a:rPr sz="1100" b="1" i="0">
-                <a:solidFill>
-                  <a:srgbClr val="0B2D5B"/>
-                </a:solidFill>
-                <a:latin typeface="Inter Tight"/>
-              </a:rPr>
-              <a:t>SHORT ON TIME (10-MINUTE CHECK-IN)</a:t>
-            </a:r>
-          </a:p>
-          <a:p>
-            <a:pPr algn="l">
-              <a:spcAft>
-                <a:spcPts val="630"/>
-              </a:spcAft>
-            </a:pPr>
-            <a:r>
-              <a:rPr sz="1400" b="0" i="0">
-                <a:solidFill>
-                  <a:srgbClr val="1C1B19"/>
-                </a:solidFill>
-                <a:latin typeface="Source Serif 4"/>
-              </a:rPr>
-              <a:t>Dignity versus respect (3), belonging versus fitting in (3), pick one way to widen the circle this week (3), share the link (1).</a:t>
+              <a:t>Students in the majority may not notice belonging because they've always had it; get every name right, and remember that money often decides who gets included.</a:t>
             </a:r>
           </a:p>
         </p:txBody>
@@ -4533,6 +4360,1628 @@
 </file>
 
 <file path=ppt/slides/slide10.xml><?xml version="1.0" encoding="utf-8"?>
+<p:sld xmlns:a="http://schemas.openxmlformats.org/drawingml/2006/main" xmlns:p="http://schemas.openxmlformats.org/presentationml/2006/main" xmlns:r="http://schemas.openxmlformats.org/officeDocument/2006/relationships" show="0">
+  <p:cSld>
+    <p:bg>
+      <p:bgPr>
+        <a:solidFill>
+          <a:srgbClr val="EEEBE4"/>
+        </a:solidFill>
+        <a:effectLst/>
+      </p:bgPr>
+    </p:bg>
+    <p:spTree>
+      <p:nvGrpSpPr>
+        <p:cNvPr id="1" name=""/>
+        <p:cNvGrpSpPr/>
+        <p:nvPr/>
+      </p:nvGrpSpPr>
+      <p:grpSpPr/>
+      <p:sp>
+        <p:nvSpPr>
+          <p:cNvPr id="2" name="Rectangle 1"/>
+          <p:cNvSpPr/>
+          <p:nvPr/>
+        </p:nvSpPr>
+        <p:spPr>
+          <a:xfrm>
+            <a:off x="0" y="0"/>
+            <a:ext cx="12191695" cy="384048"/>
+          </a:xfrm>
+          <a:prstGeom prst="rect">
+            <a:avLst/>
+          </a:prstGeom>
+          <a:solidFill>
+            <a:srgbClr val="0B2D5B"/>
+          </a:solidFill>
+          <a:ln>
+            <a:noFill/>
+          </a:ln>
+          <a:effectLst/>
+        </p:spPr>
+        <p:style>
+          <a:lnRef idx="1">
+            <a:schemeClr val="accent1"/>
+          </a:lnRef>
+          <a:fillRef idx="3">
+            <a:schemeClr val="accent1"/>
+          </a:fillRef>
+          <a:effectRef idx="2">
+            <a:schemeClr val="accent1"/>
+          </a:effectRef>
+          <a:fontRef idx="minor">
+            <a:schemeClr val="lt1"/>
+          </a:fontRef>
+        </p:style>
+        <p:txBody>
+          <a:bodyPr rtlCol="0" anchor="ctr"/>
+          <a:lstStyle/>
+          <a:p>
+            <a:pPr algn="ctr"/>
+          </a:p>
+        </p:txBody>
+      </p:sp>
+      <p:sp>
+        <p:nvSpPr>
+          <p:cNvPr id="3" name="TextBox 2"/>
+          <p:cNvSpPr txBox="1"/>
+          <p:nvPr/>
+        </p:nvSpPr>
+        <p:spPr>
+          <a:xfrm>
+            <a:off x="548640" y="100584"/>
+            <a:ext cx="10972800" cy="274320"/>
+          </a:xfrm>
+          <a:prstGeom prst="rect">
+            <a:avLst/>
+          </a:prstGeom>
+          <a:noFill/>
+        </p:spPr>
+        <p:txBody>
+          <a:bodyPr wrap="square" anchor="t" lIns="0" rIns="0" tIns="0" bIns="0">
+            <a:spAutoFit/>
+          </a:bodyPr>
+          <a:lstStyle/>
+          <a:p>
+            <a:pPr algn="l">
+              <a:spcAft>
+                <a:spcPts val="495"/>
+              </a:spcAft>
+            </a:pPr>
+            <a:r>
+              <a:rPr sz="1100" b="1" i="0">
+                <a:solidFill>
+                  <a:srgbClr val="FFFFFF"/>
+                </a:solidFill>
+                <a:latin typeface="Inter Tight"/>
+              </a:rPr>
+              <a:t>TEACHER PAGE  ·  skipped when you present  ·  Before you teach</a:t>
+            </a:r>
+          </a:p>
+        </p:txBody>
+      </p:sp>
+      <p:sp>
+        <p:nvSpPr>
+          <p:cNvPr id="4" name="TextBox 3"/>
+          <p:cNvSpPr txBox="1"/>
+          <p:nvPr/>
+        </p:nvSpPr>
+        <p:spPr>
+          <a:xfrm>
+            <a:off x="548640" y="685800"/>
+            <a:ext cx="10972800" cy="640080"/>
+          </a:xfrm>
+          <a:prstGeom prst="rect">
+            <a:avLst/>
+          </a:prstGeom>
+          <a:noFill/>
+        </p:spPr>
+        <p:txBody>
+          <a:bodyPr wrap="square" anchor="t" lIns="0" rIns="0" tIns="0" bIns="0">
+            <a:spAutoFit/>
+          </a:bodyPr>
+          <a:lstStyle/>
+          <a:p>
+            <a:pPr algn="l">
+              <a:spcAft>
+                <a:spcPts val="1350"/>
+              </a:spcAft>
+            </a:pPr>
+            <a:r>
+              <a:rPr sz="3000" b="1" i="0">
+                <a:solidFill>
+                  <a:srgbClr val="1C1B19"/>
+                </a:solidFill>
+                <a:latin typeface="Source Serif 4"/>
+              </a:rPr>
+              <a:t>Before you teach</a:t>
+            </a:r>
+          </a:p>
+        </p:txBody>
+      </p:sp>
+      <p:sp>
+        <p:nvSpPr>
+          <p:cNvPr id="5" name="TextBox 4"/>
+          <p:cNvSpPr txBox="1"/>
+          <p:nvPr/>
+        </p:nvSpPr>
+        <p:spPr>
+          <a:xfrm>
+            <a:off x="548640" y="1463040"/>
+            <a:ext cx="5394960" cy="4937760"/>
+          </a:xfrm>
+          <a:prstGeom prst="rect">
+            <a:avLst/>
+          </a:prstGeom>
+          <a:noFill/>
+        </p:spPr>
+        <p:txBody>
+          <a:bodyPr wrap="square" anchor="t" lIns="0" rIns="0" tIns="0" bIns="0">
+            <a:spAutoFit/>
+          </a:bodyPr>
+          <a:lstStyle/>
+          <a:p>
+            <a:pPr algn="l">
+              <a:spcAft>
+                <a:spcPts val="585"/>
+              </a:spcAft>
+            </a:pPr>
+            <a:r>
+              <a:rPr sz="1500" b="1" i="0">
+                <a:solidFill>
+                  <a:srgbClr val="1C1B19"/>
+                </a:solidFill>
+                <a:latin typeface="Source Serif 4"/>
+              </a:rPr>
+              <a:t>This is about everyone in the room, including you.</a:t>
+            </a:r>
+          </a:p>
+          <a:p>
+            <a:pPr algn="l">
+              <a:spcAft>
+                <a:spcPts val="585"/>
+              </a:spcAft>
+            </a:pPr>
+            <a:r>
+              <a:rPr sz="1300" b="0" i="0">
+                <a:solidFill>
+                  <a:srgbClr val="1C1B19"/>
+                </a:solidFill>
+                <a:latin typeface="Source Serif 4"/>
+              </a:rPr>
+              <a:t>Dignity applies to the students who are hard to like, too. Model it in how you run the conversation: names said right, every answer taken seriously, no sarcasm.</a:t>
+            </a:r>
+          </a:p>
+          <a:p>
+            <a:pPr algn="l">
+              <a:spcAft>
+                <a:spcPts val="585"/>
+              </a:spcAft>
+            </a:pPr>
+            <a:r>
+              <a:rPr sz="1300" b="0" i="0">
+                <a:solidFill>
+                  <a:srgbClr val="1C1B19"/>
+                </a:solidFill>
+                <a:latin typeface="Source Serif 4"/>
+              </a:rPr>
+              <a:t/>
+            </a:r>
+          </a:p>
+          <a:p>
+            <a:pPr algn="l">
+              <a:spcAft>
+                <a:spcPts val="585"/>
+              </a:spcAft>
+            </a:pPr>
+            <a:r>
+              <a:rPr sz="1500" b="1" i="0">
+                <a:solidFill>
+                  <a:srgbClr val="1C1B19"/>
+                </a:solidFill>
+                <a:latin typeface="Source Serif 4"/>
+              </a:rPr>
+              <a:t>Don't ask for stories of exclusion.</a:t>
+            </a:r>
+          </a:p>
+          <a:p>
+            <a:pPr algn="l">
+              <a:spcAft>
+                <a:spcPts val="585"/>
+              </a:spcAft>
+            </a:pPr>
+            <a:r>
+              <a:rPr sz="1300" b="0" i="0">
+                <a:solidFill>
+                  <a:srgbClr val="1C1B19"/>
+                </a:solidFill>
+                <a:latin typeface="Source Serif 4"/>
+              </a:rPr>
+              <a:t>Being left out is painful, and retelling it in front of the people who did it can make it worse. Keep examples invented. Students can think of their own privately.</a:t>
+            </a:r>
+          </a:p>
+          <a:p>
+            <a:pPr algn="l">
+              <a:spcAft>
+                <a:spcPts val="585"/>
+              </a:spcAft>
+            </a:pPr>
+            <a:r>
+              <a:rPr sz="1300" b="0" i="0">
+                <a:solidFill>
+                  <a:srgbClr val="1C1B19"/>
+                </a:solidFill>
+                <a:latin typeface="Source Serif 4"/>
+              </a:rPr>
+              <a:t/>
+            </a:r>
+          </a:p>
+          <a:p>
+            <a:pPr algn="l">
+              <a:spcAft>
+                <a:spcPts val="585"/>
+              </a:spcAft>
+            </a:pPr>
+            <a:r>
+              <a:rPr sz="1500" b="1" i="0">
+                <a:solidFill>
+                  <a:srgbClr val="1C1B19"/>
+                </a:solidFill>
+                <a:latin typeface="Source Serif 4"/>
+              </a:rPr>
+              <a:t>Dignity isn't agreement.</a:t>
+            </a:r>
+          </a:p>
+          <a:p>
+            <a:pPr algn="l">
+              <a:spcAft>
+                <a:spcPts val="585"/>
+              </a:spcAft>
+            </a:pPr>
+            <a:r>
+              <a:rPr sz="1300" b="0" i="0">
+                <a:solidFill>
+                  <a:srgbClr val="1C1B19"/>
+                </a:solidFill>
+                <a:latin typeface="Source Serif 4"/>
+              </a:rPr>
+              <a:t>Some students will push back: "So I have to respect everyone?" Good question. The answer is the heart of the lesson: you don't have to respect what someone does, and you still treat them as a person with worth.</a:t>
+            </a:r>
+          </a:p>
+          <a:p>
+            <a:pPr algn="l">
+              <a:spcAft>
+                <a:spcPts val="585"/>
+              </a:spcAft>
+            </a:pPr>
+            <a:r>
+              <a:rPr sz="1300" b="0" i="0">
+                <a:solidFill>
+                  <a:srgbClr val="1C1B19"/>
+                </a:solidFill>
+                <a:latin typeface="Source Serif 4"/>
+              </a:rPr>
+              <a:t/>
+            </a:r>
+          </a:p>
+        </p:txBody>
+      </p:sp>
+      <p:sp>
+        <p:nvSpPr>
+          <p:cNvPr id="6" name="TextBox 5"/>
+          <p:cNvSpPr txBox="1"/>
+          <p:nvPr/>
+        </p:nvSpPr>
+        <p:spPr>
+          <a:xfrm>
+            <a:off x="6217920" y="1463040"/>
+            <a:ext cx="5394960" cy="4937760"/>
+          </a:xfrm>
+          <a:prstGeom prst="rect">
+            <a:avLst/>
+          </a:prstGeom>
+          <a:noFill/>
+        </p:spPr>
+        <p:txBody>
+          <a:bodyPr wrap="square" anchor="t" lIns="0" rIns="0" tIns="0" bIns="0">
+            <a:spAutoFit/>
+          </a:bodyPr>
+          <a:lstStyle/>
+          <a:p>
+            <a:pPr algn="l">
+              <a:spcAft>
+                <a:spcPts val="585"/>
+              </a:spcAft>
+            </a:pPr>
+            <a:r>
+              <a:rPr sz="1500" b="1" i="0">
+                <a:solidFill>
+                  <a:srgbClr val="1C1B19"/>
+                </a:solidFill>
+                <a:latin typeface="Source Serif 4"/>
+              </a:rPr>
+              <a:t>Watch for targeting in the room.</a:t>
+            </a:r>
+          </a:p>
+          <a:p>
+            <a:pPr algn="l">
+              <a:spcAft>
+                <a:spcPts val="585"/>
+              </a:spcAft>
+            </a:pPr>
+            <a:r>
+              <a:rPr sz="1300" b="0" i="0">
+                <a:solidFill>
+                  <a:srgbClr val="1C1B19"/>
+                </a:solidFill>
+                <a:latin typeface="Source Serif 4"/>
+              </a:rPr>
+              <a:t>If a student laughs or looks at a classmate during the "breaks it" examples, the lesson may be landing on something real. Move on calmly, then check in privately and let a counselor know that day.</a:t>
+            </a:r>
+          </a:p>
+          <a:p>
+            <a:pPr algn="l">
+              <a:spcAft>
+                <a:spcPts val="585"/>
+              </a:spcAft>
+            </a:pPr>
+            <a:r>
+              <a:rPr sz="1300" b="0" i="0">
+                <a:solidFill>
+                  <a:srgbClr val="1C1B19"/>
+                </a:solidFill>
+                <a:latin typeface="Source Serif 4"/>
+              </a:rPr>
+              <a:t/>
+            </a:r>
+          </a:p>
+          <a:p>
+            <a:pPr algn="l">
+              <a:spcAft>
+                <a:spcPts val="585"/>
+              </a:spcAft>
+            </a:pPr>
+            <a:r>
+              <a:rPr sz="1500" b="1" i="0">
+                <a:solidFill>
+                  <a:srgbClr val="1C1B19"/>
+                </a:solidFill>
+                <a:latin typeface="Source Serif 4"/>
+              </a:rPr>
+              <a:t>Name the adults' part too.</a:t>
+            </a:r>
+          </a:p>
+          <a:p>
+            <a:pPr algn="l">
+              <a:spcAft>
+                <a:spcPts val="585"/>
+              </a:spcAft>
+            </a:pPr>
+            <a:r>
+              <a:rPr sz="1300" b="0" i="0">
+                <a:solidFill>
+                  <a:srgbClr val="1C1B19"/>
+                </a:solidFill>
+                <a:latin typeface="Source Serif 4"/>
+              </a:rPr>
+              <a:t>Belonging at school isn't only students' job. Adults set much of the culture. It's fine to say, "We're working on this too."</a:t>
+            </a:r>
+          </a:p>
+          <a:p>
+            <a:pPr algn="l">
+              <a:spcAft>
+                <a:spcPts val="585"/>
+              </a:spcAft>
+            </a:pPr>
+            <a:r>
+              <a:rPr sz="1300" b="0" i="0">
+                <a:solidFill>
+                  <a:srgbClr val="1C1B19"/>
+                </a:solidFill>
+                <a:latin typeface="Source Serif 4"/>
+              </a:rPr>
+              <a:t/>
+            </a:r>
+          </a:p>
+          <a:p>
+            <a:pPr algn="l">
+              <a:spcAft>
+                <a:spcPts val="585"/>
+              </a:spcAft>
+            </a:pPr>
+            <a:r>
+              <a:rPr sz="1500" b="1" i="0">
+                <a:solidFill>
+                  <a:srgbClr val="1C1B19"/>
+                </a:solidFill>
+                <a:latin typeface="Source Serif 4"/>
+              </a:rPr>
+              <a:t>Where this comes from.</a:t>
+            </a:r>
+          </a:p>
+          <a:p>
+            <a:pPr algn="l">
+              <a:spcAft>
+                <a:spcPts val="585"/>
+              </a:spcAft>
+            </a:pPr>
+            <a:r>
+              <a:rPr sz="1300" b="0" i="0">
+                <a:solidFill>
+                  <a:srgbClr val="1C1B19"/>
+                </a:solidFill>
+                <a:latin typeface="Source Serif 4"/>
+              </a:rPr>
+              <a:t>Floyd Cobb and John Krownapple's Belonging Through a Culture of Dignity argues that equity work rests on recognizing everyone's inherent worth. Donna Hicks's elements of dignity give the everyday moves on the student page.</a:t>
+            </a:r>
+          </a:p>
+          <a:p>
+            <a:pPr algn="l">
+              <a:spcAft>
+                <a:spcPts val="585"/>
+              </a:spcAft>
+            </a:pPr>
+            <a:r>
+              <a:rPr sz="1300" b="0" i="0">
+                <a:solidFill>
+                  <a:srgbClr val="1C1B19"/>
+                </a:solidFill>
+                <a:latin typeface="Source Serif 4"/>
+              </a:rPr>
+              <a:t/>
+            </a:r>
+          </a:p>
+        </p:txBody>
+      </p:sp>
+    </p:spTree>
+  </p:cSld>
+  <p:clrMapOvr>
+    <a:masterClrMapping/>
+  </p:clrMapOvr>
+</p:sld>
+</file>
+
+<file path=ppt/slides/slide11.xml><?xml version="1.0" encoding="utf-8"?>
+<p:sld xmlns:a="http://schemas.openxmlformats.org/drawingml/2006/main" xmlns:p="http://schemas.openxmlformats.org/presentationml/2006/main" xmlns:r="http://schemas.openxmlformats.org/officeDocument/2006/relationships" show="0">
+  <p:cSld>
+    <p:bg>
+      <p:bgPr>
+        <a:solidFill>
+          <a:srgbClr val="EEEBE4"/>
+        </a:solidFill>
+        <a:effectLst/>
+      </p:bgPr>
+    </p:bg>
+    <p:spTree>
+      <p:nvGrpSpPr>
+        <p:cNvPr id="1" name=""/>
+        <p:cNvGrpSpPr/>
+        <p:nvPr/>
+      </p:nvGrpSpPr>
+      <p:grpSpPr/>
+      <p:sp>
+        <p:nvSpPr>
+          <p:cNvPr id="2" name="Rectangle 1"/>
+          <p:cNvSpPr/>
+          <p:nvPr/>
+        </p:nvSpPr>
+        <p:spPr>
+          <a:xfrm>
+            <a:off x="0" y="0"/>
+            <a:ext cx="12191695" cy="384048"/>
+          </a:xfrm>
+          <a:prstGeom prst="rect">
+            <a:avLst/>
+          </a:prstGeom>
+          <a:solidFill>
+            <a:srgbClr val="0B2D5B"/>
+          </a:solidFill>
+          <a:ln>
+            <a:noFill/>
+          </a:ln>
+          <a:effectLst/>
+        </p:spPr>
+        <p:style>
+          <a:lnRef idx="1">
+            <a:schemeClr val="accent1"/>
+          </a:lnRef>
+          <a:fillRef idx="3">
+            <a:schemeClr val="accent1"/>
+          </a:fillRef>
+          <a:effectRef idx="2">
+            <a:schemeClr val="accent1"/>
+          </a:effectRef>
+          <a:fontRef idx="minor">
+            <a:schemeClr val="lt1"/>
+          </a:fontRef>
+        </p:style>
+        <p:txBody>
+          <a:bodyPr rtlCol="0" anchor="ctr"/>
+          <a:lstStyle/>
+          <a:p>
+            <a:pPr algn="ctr"/>
+          </a:p>
+        </p:txBody>
+      </p:sp>
+      <p:sp>
+        <p:nvSpPr>
+          <p:cNvPr id="3" name="TextBox 2"/>
+          <p:cNvSpPr txBox="1"/>
+          <p:nvPr/>
+        </p:nvSpPr>
+        <p:spPr>
+          <a:xfrm>
+            <a:off x="548640" y="100584"/>
+            <a:ext cx="10972800" cy="274320"/>
+          </a:xfrm>
+          <a:prstGeom prst="rect">
+            <a:avLst/>
+          </a:prstGeom>
+          <a:noFill/>
+        </p:spPr>
+        <p:txBody>
+          <a:bodyPr wrap="square" anchor="t" lIns="0" rIns="0" tIns="0" bIns="0">
+            <a:spAutoFit/>
+          </a:bodyPr>
+          <a:lstStyle/>
+          <a:p>
+            <a:pPr algn="l">
+              <a:spcAft>
+                <a:spcPts val="495"/>
+              </a:spcAft>
+            </a:pPr>
+            <a:r>
+              <a:rPr sz="1100" b="1" i="0">
+                <a:solidFill>
+                  <a:srgbClr val="FFFFFF"/>
+                </a:solidFill>
+                <a:latin typeface="Inter Tight"/>
+              </a:rPr>
+              <a:t>TEACHER PAGE  ·  skipped when you present  ·  Every student in the room</a:t>
+            </a:r>
+          </a:p>
+        </p:txBody>
+      </p:sp>
+      <p:sp>
+        <p:nvSpPr>
+          <p:cNvPr id="4" name="TextBox 3"/>
+          <p:cNvSpPr txBox="1"/>
+          <p:nvPr/>
+        </p:nvSpPr>
+        <p:spPr>
+          <a:xfrm>
+            <a:off x="548640" y="685800"/>
+            <a:ext cx="10972800" cy="640080"/>
+          </a:xfrm>
+          <a:prstGeom prst="rect">
+            <a:avLst/>
+          </a:prstGeom>
+          <a:noFill/>
+        </p:spPr>
+        <p:txBody>
+          <a:bodyPr wrap="square" anchor="t" lIns="0" rIns="0" tIns="0" bIns="0">
+            <a:spAutoFit/>
+          </a:bodyPr>
+          <a:lstStyle/>
+          <a:p>
+            <a:pPr algn="l">
+              <a:spcAft>
+                <a:spcPts val="1350"/>
+              </a:spcAft>
+            </a:pPr>
+            <a:r>
+              <a:rPr sz="3000" b="1" i="0">
+                <a:solidFill>
+                  <a:srgbClr val="1C1B19"/>
+                </a:solidFill>
+                <a:latin typeface="Source Serif 4"/>
+              </a:rPr>
+              <a:t>Every student in the room</a:t>
+            </a:r>
+          </a:p>
+        </p:txBody>
+      </p:sp>
+      <p:sp>
+        <p:nvSpPr>
+          <p:cNvPr id="5" name="TextBox 4"/>
+          <p:cNvSpPr txBox="1"/>
+          <p:nvPr/>
+        </p:nvSpPr>
+        <p:spPr>
+          <a:xfrm>
+            <a:off x="548640" y="1325880"/>
+            <a:ext cx="10972800" cy="365760"/>
+          </a:xfrm>
+          <a:prstGeom prst="rect">
+            <a:avLst/>
+          </a:prstGeom>
+          <a:noFill/>
+        </p:spPr>
+        <p:txBody>
+          <a:bodyPr wrap="square" anchor="t" lIns="0" rIns="0" tIns="0" bIns="0">
+            <a:spAutoFit/>
+          </a:bodyPr>
+          <a:lstStyle/>
+          <a:p>
+            <a:pPr algn="l">
+              <a:spcAft>
+                <a:spcPts val="630"/>
+              </a:spcAft>
+            </a:pPr>
+            <a:r>
+              <a:rPr sz="1400" b="0" i="0">
+                <a:solidFill>
+                  <a:srgbClr val="5D5A54"/>
+                </a:solidFill>
+                <a:latin typeface="Inter Tight"/>
+              </a:rPr>
+              <a:t>Culture, family, identity, ability and money: what to keep in mind for this topic.</a:t>
+            </a:r>
+          </a:p>
+        </p:txBody>
+      </p:sp>
+      <p:sp>
+        <p:nvSpPr>
+          <p:cNvPr id="6" name="TextBox 5"/>
+          <p:cNvSpPr txBox="1"/>
+          <p:nvPr/>
+        </p:nvSpPr>
+        <p:spPr>
+          <a:xfrm>
+            <a:off x="548640" y="1828800"/>
+            <a:ext cx="5394960" cy="4572000"/>
+          </a:xfrm>
+          <a:prstGeom prst="rect">
+            <a:avLst/>
+          </a:prstGeom>
+          <a:noFill/>
+        </p:spPr>
+        <p:txBody>
+          <a:bodyPr wrap="square" anchor="t" lIns="0" rIns="0" tIns="0" bIns="0">
+            <a:spAutoFit/>
+          </a:bodyPr>
+          <a:lstStyle/>
+          <a:p>
+            <a:pPr algn="l">
+              <a:spcAft>
+                <a:spcPts val="585"/>
+              </a:spcAft>
+            </a:pPr>
+            <a:r>
+              <a:rPr sz="1500" b="1" i="0">
+                <a:solidFill>
+                  <a:srgbClr val="1C1B19"/>
+                </a:solidFill>
+                <a:latin typeface="Source Serif 4"/>
+              </a:rPr>
+              <a:t>Who already belongs?</a:t>
+            </a:r>
+          </a:p>
+          <a:p>
+            <a:pPr algn="l">
+              <a:spcAft>
+                <a:spcPts val="585"/>
+              </a:spcAft>
+            </a:pPr>
+            <a:r>
+              <a:rPr sz="1300" b="0" i="0">
+                <a:solidFill>
+                  <a:srgbClr val="1C1B19"/>
+                </a:solidFill>
+                <a:latin typeface="Source Serif 4"/>
+              </a:rPr>
+              <a:t>Students who match the school's majority culture may not notice belonging, because they've always had it. Students of color, students new to the school, LGBTQ+ students, students with disabilities and students on financial aid often notice it every day.</a:t>
+            </a:r>
+          </a:p>
+          <a:p>
+            <a:pPr algn="l">
+              <a:spcAft>
+                <a:spcPts val="585"/>
+              </a:spcAft>
+            </a:pPr>
+            <a:r>
+              <a:rPr sz="1300" b="0" i="0">
+                <a:solidFill>
+                  <a:srgbClr val="1C1B19"/>
+                </a:solidFill>
+                <a:latin typeface="Source Serif 4"/>
+              </a:rPr>
+              <a:t/>
+            </a:r>
+          </a:p>
+          <a:p>
+            <a:pPr algn="l">
+              <a:spcAft>
+                <a:spcPts val="585"/>
+              </a:spcAft>
+            </a:pPr>
+            <a:r>
+              <a:rPr sz="1500" b="1" i="0">
+                <a:solidFill>
+                  <a:srgbClr val="1C1B19"/>
+                </a:solidFill>
+                <a:latin typeface="Source Serif 4"/>
+              </a:rPr>
+              <a:t>Names.</a:t>
+            </a:r>
+          </a:p>
+          <a:p>
+            <a:pPr algn="l">
+              <a:spcAft>
+                <a:spcPts val="585"/>
+              </a:spcAft>
+            </a:pPr>
+            <a:r>
+              <a:rPr sz="1300" b="0" i="0">
+                <a:solidFill>
+                  <a:srgbClr val="1C1B19"/>
+                </a:solidFill>
+                <a:latin typeface="Source Serif 4"/>
+              </a:rPr>
+              <a:t>Mispronouncing or shortening a name, especially a non-Anglo one, is one of the most common dignity hits in schools. Ask, practice, and get it right.</a:t>
+            </a:r>
+          </a:p>
+          <a:p>
+            <a:pPr algn="l">
+              <a:spcAft>
+                <a:spcPts val="585"/>
+              </a:spcAft>
+            </a:pPr>
+            <a:r>
+              <a:rPr sz="1300" b="0" i="0">
+                <a:solidFill>
+                  <a:srgbClr val="1C1B19"/>
+                </a:solidFill>
+                <a:latin typeface="Source Serif 4"/>
+              </a:rPr>
+              <a:t/>
+            </a:r>
+          </a:p>
+          <a:p>
+            <a:pPr algn="l">
+              <a:spcAft>
+                <a:spcPts val="585"/>
+              </a:spcAft>
+            </a:pPr>
+            <a:r>
+              <a:rPr sz="1500" b="1" i="0">
+                <a:solidFill>
+                  <a:srgbClr val="1C1B19"/>
+                </a:solidFill>
+                <a:latin typeface="Source Serif 4"/>
+              </a:rPr>
+              <a:t>Money.</a:t>
+            </a:r>
+          </a:p>
+          <a:p>
+            <a:pPr algn="l">
+              <a:spcAft>
+                <a:spcPts val="585"/>
+              </a:spcAft>
+            </a:pPr>
+            <a:r>
+              <a:rPr sz="1300" b="0" i="0">
+                <a:solidFill>
+                  <a:srgbClr val="1C1B19"/>
+                </a:solidFill>
+                <a:latin typeface="Source Serif 4"/>
+              </a:rPr>
+              <a:t>Inclusion often costs money at school: trips, gear, eating out, the right clothes. Students may be left out for reasons they can't fix. Keep examples free.</a:t>
+            </a:r>
+          </a:p>
+          <a:p>
+            <a:pPr algn="l">
+              <a:spcAft>
+                <a:spcPts val="585"/>
+              </a:spcAft>
+            </a:pPr>
+            <a:r>
+              <a:rPr sz="1300" b="0" i="0">
+                <a:solidFill>
+                  <a:srgbClr val="1C1B19"/>
+                </a:solidFill>
+                <a:latin typeface="Source Serif 4"/>
+              </a:rPr>
+              <a:t/>
+            </a:r>
+          </a:p>
+        </p:txBody>
+      </p:sp>
+      <p:sp>
+        <p:nvSpPr>
+          <p:cNvPr id="7" name="TextBox 6"/>
+          <p:cNvSpPr txBox="1"/>
+          <p:nvPr/>
+        </p:nvSpPr>
+        <p:spPr>
+          <a:xfrm>
+            <a:off x="6217920" y="1828800"/>
+            <a:ext cx="5394960" cy="4572000"/>
+          </a:xfrm>
+          <a:prstGeom prst="rect">
+            <a:avLst/>
+          </a:prstGeom>
+          <a:noFill/>
+        </p:spPr>
+        <p:txBody>
+          <a:bodyPr wrap="square" anchor="t" lIns="0" rIns="0" tIns="0" bIns="0">
+            <a:spAutoFit/>
+          </a:bodyPr>
+          <a:lstStyle/>
+          <a:p>
+            <a:pPr algn="l">
+              <a:spcAft>
+                <a:spcPts val="585"/>
+              </a:spcAft>
+            </a:pPr>
+            <a:r>
+              <a:rPr sz="1500" b="1" i="0">
+                <a:solidFill>
+                  <a:srgbClr val="1C1B19"/>
+                </a:solidFill>
+                <a:latin typeface="Source Serif 4"/>
+              </a:rPr>
+              <a:t>Faith and values.</a:t>
+            </a:r>
+          </a:p>
+          <a:p>
+            <a:pPr algn="l">
+              <a:spcAft>
+                <a:spcPts val="585"/>
+              </a:spcAft>
+            </a:pPr>
+            <a:r>
+              <a:rPr sz="1300" b="0" i="0">
+                <a:solidFill>
+                  <a:srgbClr val="1C1B19"/>
+                </a:solidFill>
+                <a:latin typeface="Source Serif 4"/>
+              </a:rPr>
+              <a:t>Some students hold beliefs others disagree with, strongly. Dignity applies across those lines too. You can disagree with a belief and still treat a person with dignity.</a:t>
+            </a:r>
+          </a:p>
+          <a:p>
+            <a:pPr algn="l">
+              <a:spcAft>
+                <a:spcPts val="585"/>
+              </a:spcAft>
+            </a:pPr>
+            <a:r>
+              <a:rPr sz="1300" b="0" i="0">
+                <a:solidFill>
+                  <a:srgbClr val="1C1B19"/>
+                </a:solidFill>
+                <a:latin typeface="Source Serif 4"/>
+              </a:rPr>
+              <a:t/>
+            </a:r>
+          </a:p>
+          <a:p>
+            <a:pPr algn="l">
+              <a:spcAft>
+                <a:spcPts val="585"/>
+              </a:spcAft>
+            </a:pPr>
+            <a:r>
+              <a:rPr sz="1500" b="1" i="0">
+                <a:solidFill>
+                  <a:srgbClr val="1C1B19"/>
+                </a:solidFill>
+                <a:latin typeface="Source Serif 4"/>
+              </a:rPr>
+              <a:t>Disability and neurodivergence.</a:t>
+            </a:r>
+          </a:p>
+          <a:p>
+            <a:pPr algn="l">
+              <a:spcAft>
+                <a:spcPts val="585"/>
+              </a:spcAft>
+            </a:pPr>
+            <a:r>
+              <a:rPr sz="1300" b="0" i="0">
+                <a:solidFill>
+                  <a:srgbClr val="1C1B19"/>
+                </a:solidFill>
+                <a:latin typeface="Source Serif 4"/>
+              </a:rPr>
+              <a:t>Students who process social cues differently may be left out without anyone meaning harm. "Widen the circle" includes them.</a:t>
+            </a:r>
+          </a:p>
+          <a:p>
+            <a:pPr algn="l">
+              <a:spcAft>
+                <a:spcPts val="585"/>
+              </a:spcAft>
+            </a:pPr>
+            <a:r>
+              <a:rPr sz="1300" b="0" i="0">
+                <a:solidFill>
+                  <a:srgbClr val="1C1B19"/>
+                </a:solidFill>
+                <a:latin typeface="Source Serif 4"/>
+              </a:rPr>
+              <a:t/>
+            </a:r>
+          </a:p>
+          <a:p>
+            <a:pPr algn="l">
+              <a:spcAft>
+                <a:spcPts val="585"/>
+              </a:spcAft>
+            </a:pPr>
+            <a:r>
+              <a:rPr sz="1500" b="1" i="0">
+                <a:solidFill>
+                  <a:srgbClr val="1C1B19"/>
+                </a:solidFill>
+                <a:latin typeface="Source Serif 4"/>
+              </a:rPr>
+              <a:t>Culture shapes how belonging looks.</a:t>
+            </a:r>
+          </a:p>
+          <a:p>
+            <a:pPr algn="l">
+              <a:spcAft>
+                <a:spcPts val="585"/>
+              </a:spcAft>
+            </a:pPr>
+            <a:r>
+              <a:rPr sz="1300" b="0" i="0">
+                <a:solidFill>
+                  <a:srgbClr val="1C1B19"/>
+                </a:solidFill>
+                <a:latin typeface="Source Serif 4"/>
+              </a:rPr>
+              <a:t>In some families, belonging is about family and community first, and school belonging matters less. Respect that; the lesson is about how we treat people, not ranking where students belong.</a:t>
+            </a:r>
+          </a:p>
+          <a:p>
+            <a:pPr algn="l">
+              <a:spcAft>
+                <a:spcPts val="585"/>
+              </a:spcAft>
+            </a:pPr>
+            <a:r>
+              <a:rPr sz="1300" b="0" i="0">
+                <a:solidFill>
+                  <a:srgbClr val="1C1B19"/>
+                </a:solidFill>
+                <a:latin typeface="Source Serif 4"/>
+              </a:rPr>
+              <a:t/>
+            </a:r>
+          </a:p>
+        </p:txBody>
+      </p:sp>
+    </p:spTree>
+  </p:cSld>
+  <p:clrMapOvr>
+    <a:masterClrMapping/>
+  </p:clrMapOvr>
+</p:sld>
+</file>
+
+<file path=ppt/slides/slide12.xml><?xml version="1.0" encoding="utf-8"?>
+<p:sld xmlns:a="http://schemas.openxmlformats.org/drawingml/2006/main" xmlns:p="http://schemas.openxmlformats.org/presentationml/2006/main" xmlns:r="http://schemas.openxmlformats.org/officeDocument/2006/relationships" show="0">
+  <p:cSld>
+    <p:bg>
+      <p:bgPr>
+        <a:solidFill>
+          <a:srgbClr val="EEEBE4"/>
+        </a:solidFill>
+        <a:effectLst/>
+      </p:bgPr>
+    </p:bg>
+    <p:spTree>
+      <p:nvGrpSpPr>
+        <p:cNvPr id="1" name=""/>
+        <p:cNvGrpSpPr/>
+        <p:nvPr/>
+      </p:nvGrpSpPr>
+      <p:grpSpPr/>
+      <p:sp>
+        <p:nvSpPr>
+          <p:cNvPr id="2" name="Rectangle 1"/>
+          <p:cNvSpPr/>
+          <p:nvPr/>
+        </p:nvSpPr>
+        <p:spPr>
+          <a:xfrm>
+            <a:off x="0" y="0"/>
+            <a:ext cx="12191695" cy="384048"/>
+          </a:xfrm>
+          <a:prstGeom prst="rect">
+            <a:avLst/>
+          </a:prstGeom>
+          <a:solidFill>
+            <a:srgbClr val="0B2D5B"/>
+          </a:solidFill>
+          <a:ln>
+            <a:noFill/>
+          </a:ln>
+          <a:effectLst/>
+        </p:spPr>
+        <p:style>
+          <a:lnRef idx="1">
+            <a:schemeClr val="accent1"/>
+          </a:lnRef>
+          <a:fillRef idx="3">
+            <a:schemeClr val="accent1"/>
+          </a:fillRef>
+          <a:effectRef idx="2">
+            <a:schemeClr val="accent1"/>
+          </a:effectRef>
+          <a:fontRef idx="minor">
+            <a:schemeClr val="lt1"/>
+          </a:fontRef>
+        </p:style>
+        <p:txBody>
+          <a:bodyPr rtlCol="0" anchor="ctr"/>
+          <a:lstStyle/>
+          <a:p>
+            <a:pPr algn="ctr"/>
+          </a:p>
+        </p:txBody>
+      </p:sp>
+      <p:sp>
+        <p:nvSpPr>
+          <p:cNvPr id="3" name="TextBox 2"/>
+          <p:cNvSpPr txBox="1"/>
+          <p:nvPr/>
+        </p:nvSpPr>
+        <p:spPr>
+          <a:xfrm>
+            <a:off x="548640" y="100584"/>
+            <a:ext cx="10972800" cy="274320"/>
+          </a:xfrm>
+          <a:prstGeom prst="rect">
+            <a:avLst/>
+          </a:prstGeom>
+          <a:noFill/>
+        </p:spPr>
+        <p:txBody>
+          <a:bodyPr wrap="square" anchor="t" lIns="0" rIns="0" tIns="0" bIns="0">
+            <a:spAutoFit/>
+          </a:bodyPr>
+          <a:lstStyle/>
+          <a:p>
+            <a:pPr algn="l">
+              <a:spcAft>
+                <a:spcPts val="495"/>
+              </a:spcAft>
+            </a:pPr>
+            <a:r>
+              <a:rPr sz="1100" b="1" i="0">
+                <a:solidFill>
+                  <a:srgbClr val="FFFFFF"/>
+                </a:solidFill>
+                <a:latin typeface="Inter Tight"/>
+              </a:rPr>
+              <a:t>TEACHER PAGE  ·  skipped when you present  ·  Background</a:t>
+            </a:r>
+          </a:p>
+        </p:txBody>
+      </p:sp>
+      <p:sp>
+        <p:nvSpPr>
+          <p:cNvPr id="4" name="TextBox 3"/>
+          <p:cNvSpPr txBox="1"/>
+          <p:nvPr/>
+        </p:nvSpPr>
+        <p:spPr>
+          <a:xfrm>
+            <a:off x="548640" y="685800"/>
+            <a:ext cx="10972800" cy="640080"/>
+          </a:xfrm>
+          <a:prstGeom prst="rect">
+            <a:avLst/>
+          </a:prstGeom>
+          <a:noFill/>
+        </p:spPr>
+        <p:txBody>
+          <a:bodyPr wrap="square" anchor="t" lIns="0" rIns="0" tIns="0" bIns="0">
+            <a:spAutoFit/>
+          </a:bodyPr>
+          <a:lstStyle/>
+          <a:p>
+            <a:pPr algn="l">
+              <a:spcAft>
+                <a:spcPts val="1350"/>
+              </a:spcAft>
+            </a:pPr>
+            <a:r>
+              <a:rPr sz="3000" b="1" i="0">
+                <a:solidFill>
+                  <a:srgbClr val="1C1B19"/>
+                </a:solidFill>
+                <a:latin typeface="Source Serif 4"/>
+              </a:rPr>
+              <a:t>What the research says</a:t>
+            </a:r>
+          </a:p>
+        </p:txBody>
+      </p:sp>
+      <p:sp>
+        <p:nvSpPr>
+          <p:cNvPr id="5" name="TextBox 4"/>
+          <p:cNvSpPr txBox="1"/>
+          <p:nvPr/>
+        </p:nvSpPr>
+        <p:spPr>
+          <a:xfrm>
+            <a:off x="548640" y="1463040"/>
+            <a:ext cx="5394960" cy="4937760"/>
+          </a:xfrm>
+          <a:prstGeom prst="rect">
+            <a:avLst/>
+          </a:prstGeom>
+          <a:noFill/>
+        </p:spPr>
+        <p:txBody>
+          <a:bodyPr wrap="square" anchor="t" lIns="0" rIns="0" tIns="0" bIns="0">
+            <a:spAutoFit/>
+          </a:bodyPr>
+          <a:lstStyle/>
+          <a:p>
+            <a:pPr algn="l">
+              <a:spcAft>
+                <a:spcPts val="585"/>
+              </a:spcAft>
+            </a:pPr>
+            <a:r>
+              <a:rPr sz="1300" b="0" i="0">
+                <a:solidFill>
+                  <a:srgbClr val="1C1B19"/>
+                </a:solidFill>
+                <a:latin typeface="Source Serif 4"/>
+              </a:rPr>
+              <a:t>Cobb and Krownapple argue that belonging, built through a culture of dignity (the inherent worth of every person), is the foundation of equity work in schools, and that dignity differs from respect, which is earned.</a:t>
+            </a:r>
+          </a:p>
+          <a:p>
+            <a:pPr algn="l">
+              <a:spcAft>
+                <a:spcPts val="585"/>
+              </a:spcAft>
+            </a:pPr>
+            <a:r>
+              <a:rPr sz="1050" b="0" i="0">
+                <a:solidFill>
+                  <a:srgbClr val="5D5A54"/>
+                </a:solidFill>
+                <a:latin typeface="Inter Tight"/>
+              </a:rPr>
+              <a:t>Cobb &amp; Krownapple, Belonging Through a Culture of Dignity, 2019</a:t>
+            </a:r>
+          </a:p>
+          <a:p>
+            <a:pPr algn="l">
+              <a:spcAft>
+                <a:spcPts val="585"/>
+              </a:spcAft>
+            </a:pPr>
+            <a:r>
+              <a:rPr sz="1300" b="0" i="0">
+                <a:solidFill>
+                  <a:srgbClr val="1C1B19"/>
+                </a:solidFill>
+                <a:latin typeface="Source Serif 4"/>
+              </a:rPr>
+              <a:t>Hicks describes ten essential elements of dignity, including acceptance of identity, inclusion, fairness, benefit of the doubt and accountability, drawn from her work in international conflict resolution.</a:t>
+            </a:r>
+          </a:p>
+          <a:p>
+            <a:pPr algn="l">
+              <a:spcAft>
+                <a:spcPts val="585"/>
+              </a:spcAft>
+            </a:pPr>
+            <a:r>
+              <a:rPr sz="1050" b="0" i="0">
+                <a:solidFill>
+                  <a:srgbClr val="5D5A54"/>
+                </a:solidFill>
+                <a:latin typeface="Inter Tight"/>
+              </a:rPr>
+              <a:t>Hicks, Dignity, Yale University Press, 2011</a:t>
+            </a:r>
+          </a:p>
+          <a:p>
+            <a:pPr algn="l">
+              <a:spcAft>
+                <a:spcPts val="585"/>
+              </a:spcAft>
+            </a:pPr>
+            <a:r>
+              <a:rPr sz="1300" b="0" i="0">
+                <a:solidFill>
+                  <a:srgbClr val="1C1B19"/>
+                </a:solidFill>
+                <a:latin typeface="Source Serif 4"/>
+              </a:rPr>
+              <a:t>First-year college students who spent about an hour learning that worries about belonging are common and fade with time showed lasting benefits: over three years, the intervention halved the achievement gap for Black students and improved their self-reported health.</a:t>
+            </a:r>
+          </a:p>
+          <a:p>
+            <a:pPr algn="l">
+              <a:spcAft>
+                <a:spcPts val="585"/>
+              </a:spcAft>
+            </a:pPr>
+            <a:r>
+              <a:rPr sz="1050" b="0" i="0">
+                <a:solidFill>
+                  <a:srgbClr val="5D5A54"/>
+                </a:solidFill>
+                <a:latin typeface="Inter Tight"/>
+              </a:rPr>
+              <a:t>Walton &amp; Cohen, Science, 2011</a:t>
+            </a:r>
+          </a:p>
+        </p:txBody>
+      </p:sp>
+      <p:sp>
+        <p:nvSpPr>
+          <p:cNvPr id="6" name="TextBox 5"/>
+          <p:cNvSpPr txBox="1"/>
+          <p:nvPr/>
+        </p:nvSpPr>
+        <p:spPr>
+          <a:xfrm>
+            <a:off x="6217920" y="1463040"/>
+            <a:ext cx="5394960" cy="4937760"/>
+          </a:xfrm>
+          <a:prstGeom prst="rect">
+            <a:avLst/>
+          </a:prstGeom>
+          <a:noFill/>
+        </p:spPr>
+        <p:txBody>
+          <a:bodyPr wrap="square" anchor="t" lIns="0" rIns="0" tIns="0" bIns="0">
+            <a:spAutoFit/>
+          </a:bodyPr>
+          <a:lstStyle/>
+          <a:p>
+            <a:pPr algn="l">
+              <a:spcAft>
+                <a:spcPts val="585"/>
+              </a:spcAft>
+            </a:pPr>
+            <a:r>
+              <a:rPr sz="1300" b="0" i="0">
+                <a:solidFill>
+                  <a:srgbClr val="1C1B19"/>
+                </a:solidFill>
+                <a:latin typeface="Source Serif 4"/>
+              </a:rPr>
+              <a:t>A meta-analysis of 51 studies found that teacher support and students' own positive traits were the strongest predictors of school belonging.</a:t>
+            </a:r>
+          </a:p>
+          <a:p>
+            <a:pPr algn="l">
+              <a:spcAft>
+                <a:spcPts val="585"/>
+              </a:spcAft>
+            </a:pPr>
+            <a:r>
+              <a:rPr sz="1050" b="0" i="0">
+                <a:solidFill>
+                  <a:srgbClr val="5D5A54"/>
+                </a:solidFill>
+                <a:latin typeface="Inter Tight"/>
+              </a:rPr>
+              <a:t>Allen et al., Educational Psychology Review, 2018</a:t>
+            </a:r>
+          </a:p>
+          <a:p>
+            <a:pPr algn="l">
+              <a:spcAft>
+                <a:spcPts val="585"/>
+              </a:spcAft>
+            </a:pPr>
+            <a:r>
+              <a:rPr sz="1300" b="0" i="0">
+                <a:solidFill>
+                  <a:srgbClr val="1C1B19"/>
+                </a:solidFill>
+                <a:latin typeface="Source Serif 4"/>
+              </a:rPr>
+              <a:t>The need to belong is a fundamental human motivation; lacking belonging is linked to a wide range of harms to health and well-being.</a:t>
+            </a:r>
+          </a:p>
+          <a:p>
+            <a:pPr algn="l">
+              <a:spcAft>
+                <a:spcPts val="585"/>
+              </a:spcAft>
+            </a:pPr>
+            <a:r>
+              <a:rPr sz="1050" b="0" i="0">
+                <a:solidFill>
+                  <a:srgbClr val="5D5A54"/>
+                </a:solidFill>
+                <a:latin typeface="Inter Tight"/>
+              </a:rPr>
+              <a:t>Baumeister &amp; Leary, Psychological Bulletin, 1995</a:t>
+            </a:r>
+          </a:p>
+        </p:txBody>
+      </p:sp>
+    </p:spTree>
+  </p:cSld>
+  <p:clrMapOvr>
+    <a:masterClrMapping/>
+  </p:clrMapOvr>
+</p:sld>
+</file>
+
+<file path=ppt/slides/slide2.xml><?xml version="1.0" encoding="utf-8"?>
+<p:sld xmlns:a="http://schemas.openxmlformats.org/drawingml/2006/main" xmlns:p="http://schemas.openxmlformats.org/presentationml/2006/main" xmlns:r="http://schemas.openxmlformats.org/officeDocument/2006/relationships">
+  <p:cSld>
+    <p:bg>
+      <p:bgPr>
+        <a:solidFill>
+          <a:srgbClr val="0B2D5B"/>
+        </a:solidFill>
+        <a:effectLst/>
+      </p:bgPr>
+    </p:bg>
+    <p:spTree>
+      <p:nvGrpSpPr>
+        <p:cNvPr id="1" name=""/>
+        <p:cNvGrpSpPr/>
+        <p:nvPr/>
+      </p:nvGrpSpPr>
+      <p:grpSpPr/>
+      <p:sp>
+        <p:nvSpPr>
+          <p:cNvPr id="2" name="Rectangle 1"/>
+          <p:cNvSpPr/>
+          <p:nvPr/>
+        </p:nvSpPr>
+        <p:spPr>
+          <a:xfrm>
+            <a:off x="548640" y="502920"/>
+            <a:ext cx="457200" cy="54864"/>
+          </a:xfrm>
+          <a:prstGeom prst="rect">
+            <a:avLst/>
+          </a:prstGeom>
+          <a:solidFill>
+            <a:srgbClr val="F47B20"/>
+          </a:solidFill>
+          <a:ln>
+            <a:noFill/>
+          </a:ln>
+          <a:effectLst/>
+        </p:spPr>
+        <p:style>
+          <a:lnRef idx="1">
+            <a:schemeClr val="accent1"/>
+          </a:lnRef>
+          <a:fillRef idx="3">
+            <a:schemeClr val="accent1"/>
+          </a:fillRef>
+          <a:effectRef idx="2">
+            <a:schemeClr val="accent1"/>
+          </a:effectRef>
+          <a:fontRef idx="minor">
+            <a:schemeClr val="lt1"/>
+          </a:fontRef>
+        </p:style>
+        <p:txBody>
+          <a:bodyPr rtlCol="0" anchor="ctr"/>
+          <a:lstStyle/>
+          <a:p>
+            <a:pPr algn="ctr"/>
+          </a:p>
+        </p:txBody>
+      </p:sp>
+      <p:sp>
+        <p:nvSpPr>
+          <p:cNvPr id="3" name="TextBox 2"/>
+          <p:cNvSpPr txBox="1"/>
+          <p:nvPr/>
+        </p:nvSpPr>
+        <p:spPr>
+          <a:xfrm>
+            <a:off x="1143000" y="393192"/>
+            <a:ext cx="8229600" cy="274320"/>
+          </a:xfrm>
+          <a:prstGeom prst="rect">
+            <a:avLst/>
+          </a:prstGeom>
+          <a:noFill/>
+        </p:spPr>
+        <p:txBody>
+          <a:bodyPr wrap="square" anchor="t" lIns="0" rIns="0" tIns="0" bIns="0">
+            <a:spAutoFit/>
+          </a:bodyPr>
+          <a:lstStyle/>
+          <a:p>
+            <a:pPr algn="l">
+              <a:spcAft>
+                <a:spcPts val="540"/>
+              </a:spcAft>
+            </a:pPr>
+            <a:r>
+              <a:rPr sz="1200" b="1" i="0">
+                <a:solidFill>
+                  <a:srgbClr val="5D5A54"/>
+                </a:solidFill>
+                <a:latin typeface="Inter Tight"/>
+              </a:rPr>
+              <a:t>DIGNITY AND BELONGING</a:t>
+            </a:r>
+          </a:p>
+        </p:txBody>
+      </p:sp>
+      <p:sp>
+        <p:nvSpPr>
+          <p:cNvPr id="4" name="TextBox 3"/>
+          <p:cNvSpPr txBox="1"/>
+          <p:nvPr/>
+        </p:nvSpPr>
+        <p:spPr>
+          <a:xfrm>
+            <a:off x="8229600" y="6400800"/>
+            <a:ext cx="3410712" cy="274320"/>
+          </a:xfrm>
+          <a:prstGeom prst="rect">
+            <a:avLst/>
+          </a:prstGeom>
+          <a:noFill/>
+        </p:spPr>
+        <p:txBody>
+          <a:bodyPr wrap="square" anchor="t" lIns="0" rIns="0" tIns="0" bIns="0">
+            <a:spAutoFit/>
+          </a:bodyPr>
+          <a:lstStyle/>
+          <a:p>
+            <a:pPr algn="r">
+              <a:spcAft>
+                <a:spcPts val="450"/>
+              </a:spcAft>
+            </a:pPr>
+            <a:r>
+              <a:rPr sz="1000" b="0" i="0">
+                <a:solidFill>
+                  <a:srgbClr val="5D5A54"/>
+                </a:solidFill>
+                <a:latin typeface="Inter Tight"/>
+              </a:rPr>
+              <a:t>Beaver Counseling</a:t>
+            </a:r>
+          </a:p>
+        </p:txBody>
+      </p:sp>
+      <p:sp>
+        <p:nvSpPr>
+          <p:cNvPr id="5" name="TextBox 4"/>
+          <p:cNvSpPr txBox="1"/>
+          <p:nvPr/>
+        </p:nvSpPr>
+        <p:spPr>
+          <a:xfrm>
+            <a:off x="822960" y="2011680"/>
+            <a:ext cx="10515600" cy="1463040"/>
+          </a:xfrm>
+          <a:prstGeom prst="rect">
+            <a:avLst/>
+          </a:prstGeom>
+          <a:noFill/>
+        </p:spPr>
+        <p:txBody>
+          <a:bodyPr wrap="square" anchor="b" lIns="0" rIns="0" tIns="0" bIns="0">
+            <a:spAutoFit/>
+          </a:bodyPr>
+          <a:lstStyle/>
+          <a:p>
+            <a:pPr algn="l">
+              <a:spcAft>
+                <a:spcPts val="2700"/>
+              </a:spcAft>
+            </a:pPr>
+            <a:r>
+              <a:rPr sz="6000" b="1" i="0">
+                <a:solidFill>
+                  <a:srgbClr val="FFFFFF"/>
+                </a:solidFill>
+                <a:latin typeface="Source Serif 4"/>
+              </a:rPr>
+              <a:t>Dignity and Belonging</a:t>
+            </a:r>
+          </a:p>
+        </p:txBody>
+      </p:sp>
+      <p:sp>
+        <p:nvSpPr>
+          <p:cNvPr id="6" name="TextBox 5"/>
+          <p:cNvSpPr txBox="1"/>
+          <p:nvPr/>
+        </p:nvSpPr>
+        <p:spPr>
+          <a:xfrm>
+            <a:off x="822960" y="3611880"/>
+            <a:ext cx="10515600" cy="914400"/>
+          </a:xfrm>
+          <a:prstGeom prst="rect">
+            <a:avLst/>
+          </a:prstGeom>
+          <a:noFill/>
+        </p:spPr>
+        <p:txBody>
+          <a:bodyPr wrap="square" anchor="t" lIns="0" rIns="0" tIns="0" bIns="0">
+            <a:spAutoFit/>
+          </a:bodyPr>
+          <a:lstStyle/>
+          <a:p>
+            <a:pPr algn="l">
+              <a:spcAft>
+                <a:spcPts val="1080"/>
+              </a:spcAft>
+            </a:pPr>
+            <a:r>
+              <a:rPr sz="2400" b="0" i="1">
+                <a:solidFill>
+                  <a:srgbClr val="E8E4DA"/>
+                </a:solidFill>
+                <a:latin typeface="Source Serif 4"/>
+              </a:rPr>
+              <a:t>Everyone walks in with worth they didn't have to earn.</a:t>
+            </a:r>
+          </a:p>
+        </p:txBody>
+      </p:sp>
+      <p:sp>
+        <p:nvSpPr>
+          <p:cNvPr id="7" name="TextBox 6"/>
+          <p:cNvSpPr txBox="1"/>
+          <p:nvPr/>
+        </p:nvSpPr>
+        <p:spPr>
+          <a:xfrm>
+            <a:off x="822960" y="6035040"/>
+            <a:ext cx="7315200" cy="365760"/>
+          </a:xfrm>
+          <a:prstGeom prst="rect">
+            <a:avLst/>
+          </a:prstGeom>
+          <a:noFill/>
+        </p:spPr>
+        <p:txBody>
+          <a:bodyPr wrap="square" anchor="t" lIns="0" rIns="0" tIns="0" bIns="0">
+            <a:spAutoFit/>
+          </a:bodyPr>
+          <a:lstStyle/>
+          <a:p>
+            <a:pPr algn="l">
+              <a:spcAft>
+                <a:spcPts val="585"/>
+              </a:spcAft>
+            </a:pPr>
+            <a:r>
+              <a:rPr sz="1300" b="0" i="0">
+                <a:solidFill>
+                  <a:srgbClr val="E8E4DA"/>
+                </a:solidFill>
+                <a:latin typeface="Inter Tight"/>
+              </a:rPr>
+              <a:t>Beaver Upper School · Counseling</a:t>
+            </a:r>
+          </a:p>
+        </p:txBody>
+      </p:sp>
+    </p:spTree>
+  </p:cSld>
+  <p:clrMapOvr>
+    <a:masterClrMapping/>
+  </p:clrMapOvr>
+</p:sld>
+</file>
+
+<file path=ppt/slides/slide3.xml><?xml version="1.0" encoding="utf-8"?>
 <p:sld xmlns:a="http://schemas.openxmlformats.org/drawingml/2006/main" xmlns:p="http://schemas.openxmlformats.org/presentationml/2006/main" xmlns:r="http://schemas.openxmlformats.org/officeDocument/2006/relationships">
   <p:cSld>
     <p:bg>
@@ -4628,7 +6077,7 @@
                 </a:solidFill>
                 <a:latin typeface="Inter Tight"/>
               </a:rPr>
-              <a:t>WHY IT MATTERS</a:t>
+              <a:t>TO START</a:t>
             </a:r>
           </a:p>
         </p:txBody>
@@ -4674,179 +6123,14 @@
       </p:sp>
       <p:sp>
         <p:nvSpPr>
-          <p:cNvPr id="5" name="TextBox 4"/>
-          <p:cNvSpPr txBox="1"/>
-          <p:nvPr/>
-        </p:nvSpPr>
-        <p:spPr>
-          <a:xfrm>
-            <a:off x="822960" y="914400"/>
-            <a:ext cx="10515600" cy="365760"/>
-          </a:xfrm>
-          <a:prstGeom prst="rect">
-            <a:avLst/>
-          </a:prstGeom>
-          <a:noFill/>
-        </p:spPr>
-        <p:txBody>
-          <a:bodyPr wrap="square" anchor="t" lIns="0" rIns="0" tIns="0" bIns="0">
-            <a:spAutoFit/>
-          </a:bodyPr>
-          <a:lstStyle/>
-          <a:p>
-            <a:pPr algn="l">
-              <a:spcAft>
-                <a:spcPts val="630"/>
-              </a:spcAft>
-            </a:pPr>
-            <a:r>
-              <a:rPr sz="1400" b="1" i="0">
-                <a:solidFill>
-                  <a:srgbClr val="0B2D5B"/>
-                </a:solidFill>
-                <a:latin typeface="Inter Tight"/>
-              </a:rPr>
-              <a:t>Walton &amp; Cohen, 2011  ·  Allen et al., 2018</a:t>
-            </a:r>
-          </a:p>
-        </p:txBody>
-      </p:sp>
-      <p:sp>
-        <p:nvSpPr>
-          <p:cNvPr id="6" name="TextBox 5"/>
-          <p:cNvSpPr txBox="1"/>
-          <p:nvPr/>
-        </p:nvSpPr>
-        <p:spPr>
-          <a:xfrm>
-            <a:off x="822960" y="1325880"/>
-            <a:ext cx="10515600" cy="1097280"/>
-          </a:xfrm>
-          <a:prstGeom prst="rect">
-            <a:avLst/>
-          </a:prstGeom>
-          <a:noFill/>
-        </p:spPr>
-        <p:txBody>
-          <a:bodyPr wrap="square" anchor="t" lIns="0" rIns="0" tIns="0" bIns="0">
-            <a:spAutoFit/>
-          </a:bodyPr>
-          <a:lstStyle/>
-          <a:p>
-            <a:pPr algn="l">
-              <a:spcAft>
-                <a:spcPts val="1440"/>
-              </a:spcAft>
-            </a:pPr>
-            <a:r>
-              <a:rPr sz="3200" b="1" i="0">
-                <a:solidFill>
-                  <a:srgbClr val="1C1B19"/>
-                </a:solidFill>
-                <a:latin typeface="Source Serif 4"/>
-              </a:rPr>
-              <a:t>Belonging changes how students do.</a:t>
-            </a:r>
-          </a:p>
-        </p:txBody>
-      </p:sp>
-      <p:sp>
-        <p:nvSpPr>
-          <p:cNvPr id="7" name="TextBox 6"/>
-          <p:cNvSpPr txBox="1"/>
-          <p:nvPr/>
-        </p:nvSpPr>
-        <p:spPr>
-          <a:xfrm>
-            <a:off x="822960" y="2514600"/>
-            <a:ext cx="10515600" cy="2194560"/>
-          </a:xfrm>
-          <a:prstGeom prst="rect">
-            <a:avLst/>
-          </a:prstGeom>
-          <a:noFill/>
-        </p:spPr>
-        <p:txBody>
-          <a:bodyPr wrap="square" anchor="t" lIns="0" rIns="0" tIns="0" bIns="0">
-            <a:spAutoFit/>
-          </a:bodyPr>
-          <a:lstStyle/>
-          <a:p>
-            <a:pPr algn="l">
-              <a:spcAft>
-                <a:spcPts val="855"/>
-              </a:spcAft>
-            </a:pPr>
-            <a:r>
-              <a:rPr sz="1900" b="0" i="0">
-                <a:solidFill>
-                  <a:srgbClr val="1C1B19"/>
-                </a:solidFill>
-                <a:latin typeface="Source Serif 4"/>
-              </a:rPr>
-              <a:t>•  One hour on belonging for first-year college students.</a:t>
-            </a:r>
-          </a:p>
-          <a:p>
-            <a:pPr algn="l">
-              <a:spcAft>
-                <a:spcPts val="855"/>
-              </a:spcAft>
-            </a:pPr>
-            <a:r>
-              <a:rPr sz="1900" b="0" i="0">
-                <a:solidFill>
-                  <a:srgbClr val="1C1B19"/>
-                </a:solidFill>
-                <a:latin typeface="Source Serif 4"/>
-              </a:rPr>
-              <a:t>•  Three years later: higher grades for Black students, and better health.</a:t>
-            </a:r>
-          </a:p>
-          <a:p>
-            <a:pPr algn="l">
-              <a:spcAft>
-                <a:spcPts val="855"/>
-              </a:spcAft>
-            </a:pPr>
-            <a:r>
-              <a:rPr sz="1900" b="0" i="0">
-                <a:solidFill>
-                  <a:srgbClr val="1C1B19"/>
-                </a:solidFill>
-                <a:latin typeface="Source Serif 4"/>
-              </a:rPr>
-              <a:t>•  The achievement gap was cut in half.</a:t>
-            </a:r>
-          </a:p>
-          <a:p>
-            <a:pPr algn="l">
-              <a:spcAft>
-                <a:spcPts val="855"/>
-              </a:spcAft>
-            </a:pPr>
-            <a:r>
-              <a:rPr sz="1900" b="0" i="0">
-                <a:solidFill>
-                  <a:srgbClr val="1C1B19"/>
-                </a:solidFill>
-                <a:latin typeface="Source Serif 4"/>
-              </a:rPr>
-              <a:t>•  Teacher support is one of the biggest builders of belonging.</a:t>
-            </a:r>
-          </a:p>
-        </p:txBody>
-      </p:sp>
-      <p:sp>
-        <p:nvSpPr>
-          <p:cNvPr id="8" name="Rectangle 7"/>
+          <p:cNvPr id="5" name="Rectangle 4"/>
           <p:cNvSpPr/>
           <p:nvPr/>
         </p:nvSpPr>
         <p:spPr>
           <a:xfrm>
-            <a:off x="822960" y="4892040"/>
-            <a:ext cx="73152" cy="1097280"/>
+            <a:off x="822960" y="1371600"/>
+            <a:ext cx="73152" cy="3566160"/>
           </a:xfrm>
           <a:prstGeom prst="rect">
             <a:avLst/>
@@ -4883,14 +6167,14 @@
       </p:sp>
       <p:sp>
         <p:nvSpPr>
-          <p:cNvPr id="9" name="TextBox 8"/>
+          <p:cNvPr id="6" name="TextBox 5"/>
           <p:cNvSpPr txBox="1"/>
           <p:nvPr/>
         </p:nvSpPr>
         <p:spPr>
           <a:xfrm>
-            <a:off x="1097280" y="4892040"/>
-            <a:ext cx="10241280" cy="1188720"/>
+            <a:off x="1188720" y="1371600"/>
+            <a:ext cx="10058400" cy="3566160"/>
           </a:xfrm>
           <a:prstGeom prst="rect">
             <a:avLst/>
@@ -4898,6 +6182,45 @@
           <a:noFill/>
         </p:spPr>
         <p:txBody>
+          <a:bodyPr wrap="square" anchor="ctr" lIns="0" rIns="0" tIns="0" bIns="0">
+            <a:spAutoFit/>
+          </a:bodyPr>
+          <a:lstStyle/>
+          <a:p>
+            <a:pPr algn="l">
+              <a:spcAft>
+                <a:spcPts val="1800"/>
+              </a:spcAft>
+            </a:pPr>
+            <a:r>
+              <a:rPr sz="4000" b="0" i="1">
+                <a:solidFill>
+                  <a:srgbClr val="1C1B19"/>
+                </a:solidFill>
+                <a:latin typeface="Source Serif 4"/>
+              </a:rPr>
+              <a:t>Think of a place where you feel like you belong. What makes it that way?</a:t>
+            </a:r>
+          </a:p>
+        </p:txBody>
+      </p:sp>
+      <p:sp>
+        <p:nvSpPr>
+          <p:cNvPr id="7" name="TextBox 6"/>
+          <p:cNvSpPr txBox="1"/>
+          <p:nvPr/>
+        </p:nvSpPr>
+        <p:spPr>
+          <a:xfrm>
+            <a:off x="1188720" y="5120640"/>
+            <a:ext cx="10058400" cy="914400"/>
+          </a:xfrm>
+          <a:prstGeom prst="rect">
+            <a:avLst/>
+          </a:prstGeom>
+          <a:noFill/>
+        </p:spPr>
+        <p:txBody>
           <a:bodyPr wrap="square" anchor="t" lIns="0" rIns="0" tIns="0" bIns="0">
             <a:spAutoFit/>
           </a:bodyPr>
@@ -4905,33 +6228,17 @@
           <a:p>
             <a:pPr algn="l">
               <a:spcAft>
-                <a:spcPts val="855"/>
-              </a:spcAft>
-            </a:pPr>
-            <a:r>
-              <a:rPr sz="1200" b="1" i="0">
-                <a:solidFill>
-                  <a:srgbClr val="F47B20"/>
+                <a:spcPts val="810"/>
+              </a:spcAft>
+            </a:pPr>
+            <a:r>
+              <a:rPr sz="1800" b="0" i="0">
+                <a:solidFill>
+                  <a:srgbClr val="5D5A54"/>
                 </a:solidFill>
                 <a:latin typeface="Inter Tight"/>
               </a:rPr>
-              <a:t>IN CLASS</a:t>
-            </a:r>
-          </a:p>
-          <a:p>
-            <a:pPr algn="l">
-              <a:spcAft>
-                <a:spcPts val="855"/>
-              </a:spcAft>
-            </a:pPr>
-            <a:r>
-              <a:rPr sz="1900" b="0" i="0">
-                <a:solidFill>
-                  <a:srgbClr val="1C1B19"/>
-                </a:solidFill>
-                <a:latin typeface="Source Serif 4"/>
-              </a:rPr>
-              <a:t>Belonging isn't extra. It's part of how people learn.</a:t>
+              <a:t>A team, a family table, a group chat, a job, a corner of the library. Share the why, not the where.</a:t>
             </a:r>
           </a:p>
         </p:txBody>
@@ -4944,7 +6251,7 @@
 </p:sld>
 </file>
 
-<file path=ppt/slides/slide11.xml><?xml version="1.0" encoding="utf-8"?>
+<file path=ppt/slides/slide4.xml><?xml version="1.0" encoding="utf-8"?>
 <p:sld xmlns:a="http://schemas.openxmlformats.org/drawingml/2006/main" xmlns:p="http://schemas.openxmlformats.org/presentationml/2006/main" xmlns:r="http://schemas.openxmlformats.org/officeDocument/2006/relationships">
   <p:cSld>
     <p:bg>
@@ -5040,7 +6347,7 @@
                 </a:solidFill>
                 <a:latin typeface="Inter Tight"/>
               </a:rPr>
-              <a:t>BEFORE YOU GO</a:t>
+              <a:t>TWO WORDS</a:t>
             </a:r>
           </a:p>
         </p:txBody>
@@ -5092,7 +6399,7 @@
         </p:nvSpPr>
         <p:spPr>
           <a:xfrm>
-            <a:off x="822960" y="1188720"/>
+            <a:off x="822960" y="1005840"/>
             <a:ext cx="10515600" cy="914400"/>
           </a:xfrm>
           <a:prstGeom prst="rect">
@@ -5108,70 +6415,31 @@
           <a:p>
             <a:pPr algn="l">
               <a:spcAft>
-                <a:spcPts val="1620"/>
-              </a:spcAft>
-            </a:pPr>
-            <a:r>
-              <a:rPr sz="3600" b="1" i="0">
+                <a:spcPts val="1530"/>
+              </a:spcAft>
+            </a:pPr>
+            <a:r>
+              <a:rPr sz="3400" b="1" i="0">
                 <a:solidFill>
                   <a:srgbClr val="1C1B19"/>
                 </a:solidFill>
                 <a:latin typeface="Source Serif 4"/>
               </a:rPr>
-              <a:t>Widen the circle once this week.</a:t>
-            </a:r>
-          </a:p>
-        </p:txBody>
-      </p:sp>
-      <p:sp>
-        <p:nvSpPr>
-          <p:cNvPr id="6" name="TextBox 5"/>
-          <p:cNvSpPr txBox="1"/>
-          <p:nvPr/>
-        </p:nvSpPr>
-        <p:spPr>
-          <a:xfrm>
-            <a:off x="822960" y="2286000"/>
-            <a:ext cx="10515600" cy="1463040"/>
-          </a:xfrm>
-          <a:prstGeom prst="rect">
-            <a:avLst/>
-          </a:prstGeom>
-          <a:noFill/>
-        </p:spPr>
-        <p:txBody>
-          <a:bodyPr wrap="square" anchor="t" lIns="0" rIns="0" tIns="0" bIns="0">
-            <a:spAutoFit/>
-          </a:bodyPr>
-          <a:lstStyle/>
-          <a:p>
-            <a:pPr algn="l">
-              <a:spcAft>
-                <a:spcPts val="1080"/>
-              </a:spcAft>
-            </a:pPr>
-            <a:r>
-              <a:rPr sz="2400" b="0" i="0">
-                <a:solidFill>
-                  <a:srgbClr val="1C1B19"/>
-                </a:solidFill>
-                <a:latin typeface="Source Serif 4"/>
-              </a:rPr>
-              <a:t>One person, one time. Write it on your card and keep it.</a:t>
-            </a:r>
-          </a:p>
-        </p:txBody>
-      </p:sp>
-      <p:sp>
-        <p:nvSpPr>
-          <p:cNvPr id="7" name="Rectangle 6"/>
+              <a:t>Dignity and respect aren't the same.</a:t>
+            </a:r>
+          </a:p>
+        </p:txBody>
+      </p:sp>
+      <p:sp>
+        <p:nvSpPr>
+          <p:cNvPr id="6" name="Rectangle 5"/>
           <p:cNvSpPr/>
           <p:nvPr/>
         </p:nvSpPr>
         <p:spPr>
           <a:xfrm>
-            <a:off x="822960" y="4023360"/>
-            <a:ext cx="10515600" cy="1371600"/>
+            <a:off x="822960" y="2103120"/>
+            <a:ext cx="5120640" cy="3931920"/>
           </a:xfrm>
           <a:prstGeom prst="rect">
             <a:avLst/>
@@ -5181,7 +6449,7 @@
           </a:solidFill>
           <a:ln w="15875">
             <a:solidFill>
-              <a:srgbClr val="1C1B19"/>
+              <a:srgbClr val="D8D2C6"/>
             </a:solidFill>
           </a:ln>
           <a:effectLst/>
@@ -5210,14 +6478,14 @@
       </p:sp>
       <p:sp>
         <p:nvSpPr>
-          <p:cNvPr id="8" name="TextBox 7"/>
+          <p:cNvPr id="7" name="TextBox 6"/>
           <p:cNvSpPr txBox="1"/>
           <p:nvPr/>
         </p:nvSpPr>
         <p:spPr>
           <a:xfrm>
-            <a:off x="1097280" y="4206240"/>
-            <a:ext cx="10058400" cy="365760"/>
+            <a:off x="1097280" y="2286000"/>
+            <a:ext cx="4572000" cy="457200"/>
           </a:xfrm>
           <a:prstGeom prst="rect">
             <a:avLst/>
@@ -5232,31 +6500,31 @@
           <a:p>
             <a:pPr algn="l">
               <a:spcAft>
-                <a:spcPts val="540"/>
-              </a:spcAft>
-            </a:pPr>
-            <a:r>
-              <a:rPr sz="1200" b="1" i="0">
+                <a:spcPts val="585"/>
+              </a:spcAft>
+            </a:pPr>
+            <a:r>
+              <a:rPr sz="1300" b="1" i="0">
                 <a:solidFill>
                   <a:srgbClr val="0B2D5B"/>
                 </a:solidFill>
                 <a:latin typeface="Inter Tight"/>
               </a:rPr>
-              <a:t>STUDENT PAGE</a:t>
-            </a:r>
-          </a:p>
-        </p:txBody>
-      </p:sp>
-      <p:sp>
-        <p:nvSpPr>
-          <p:cNvPr id="9" name="TextBox 8"/>
+              <a:t>DIGNITY</a:t>
+            </a:r>
+          </a:p>
+        </p:txBody>
+      </p:sp>
+      <p:sp>
+        <p:nvSpPr>
+          <p:cNvPr id="8" name="TextBox 7"/>
           <p:cNvSpPr txBox="1"/>
           <p:nvPr/>
         </p:nvSpPr>
         <p:spPr>
           <a:xfrm>
-            <a:off x="1097280" y="4617720"/>
-            <a:ext cx="10058400" cy="640080"/>
+            <a:off x="1097280" y="2788920"/>
+            <a:ext cx="4572000" cy="3108960"/>
           </a:xfrm>
           <a:prstGeom prst="rect">
             <a:avLst/>
@@ -5271,66 +6539,90 @@
           <a:p>
             <a:pPr algn="l">
               <a:spcAft>
-                <a:spcPts val="900"/>
-              </a:spcAft>
-            </a:pPr>
-            <a:r>
-              <a:rPr sz="2000" b="0" i="0">
+                <a:spcPts val="855"/>
+              </a:spcAft>
+            </a:pPr>
+            <a:r>
+              <a:rPr sz="1900" b="0" i="0">
                 <a:solidFill>
                   <a:srgbClr val="1C1B19"/>
                 </a:solidFill>
-                <a:latin typeface="Inter Tight"/>
-              </a:rPr>
-              <a:t>https://rmwtoolkit.github.io/bcds-toolkit/dignity-and-belonging-high-school.html</a:t>
-            </a:r>
-          </a:p>
-        </p:txBody>
-      </p:sp>
-    </p:spTree>
-  </p:cSld>
-  <p:clrMapOvr>
-    <a:masterClrMapping/>
-  </p:clrMapOvr>
-</p:sld>
-</file>
-
-<file path=ppt/slides/slide2.xml><?xml version="1.0" encoding="utf-8"?>
-<p:sld xmlns:a="http://schemas.openxmlformats.org/drawingml/2006/main" xmlns:p="http://schemas.openxmlformats.org/presentationml/2006/main" xmlns:r="http://schemas.openxmlformats.org/officeDocument/2006/relationships" show="0">
-  <p:cSld>
-    <p:bg>
-      <p:bgPr>
-        <a:solidFill>
-          <a:srgbClr val="EEEBE4"/>
-        </a:solidFill>
-        <a:effectLst/>
-      </p:bgPr>
-    </p:bg>
-    <p:spTree>
-      <p:nvGrpSpPr>
-        <p:cNvPr id="1" name=""/>
-        <p:cNvGrpSpPr/>
-        <p:nvPr/>
-      </p:nvGrpSpPr>
-      <p:grpSpPr/>
-      <p:sp>
-        <p:nvSpPr>
-          <p:cNvPr id="2" name="Rectangle 1"/>
+                <a:latin typeface="Source Serif 4"/>
+              </a:rPr>
+              <a:t>Everyone has it</a:t>
+            </a:r>
+          </a:p>
+          <a:p>
+            <a:pPr algn="l">
+              <a:spcAft>
+                <a:spcPts val="855"/>
+              </a:spcAft>
+            </a:pPr>
+            <a:r>
+              <a:rPr sz="1900" b="0" i="0">
+                <a:solidFill>
+                  <a:srgbClr val="1C1B19"/>
+                </a:solidFill>
+                <a:latin typeface="Source Serif 4"/>
+              </a:rPr>
+              <a:t>You don't earn it</a:t>
+            </a:r>
+          </a:p>
+          <a:p>
+            <a:pPr algn="l">
+              <a:spcAft>
+                <a:spcPts val="855"/>
+              </a:spcAft>
+            </a:pPr>
+            <a:r>
+              <a:rPr sz="1900" b="0" i="0">
+                <a:solidFill>
+                  <a:srgbClr val="1C1B19"/>
+                </a:solidFill>
+                <a:latin typeface="Source Serif 4"/>
+              </a:rPr>
+              <a:t>Nobody can take it away</a:t>
+            </a:r>
+          </a:p>
+          <a:p>
+            <a:pPr algn="l">
+              <a:spcAft>
+                <a:spcPts val="855"/>
+              </a:spcAft>
+            </a:pPr>
+            <a:r>
+              <a:rPr sz="1900" b="0" i="0">
+                <a:solidFill>
+                  <a:srgbClr val="1C1B19"/>
+                </a:solidFill>
+                <a:latin typeface="Source Serif 4"/>
+              </a:rPr>
+              <a:t>"You matter because you're a person"</a:t>
+            </a:r>
+          </a:p>
+        </p:txBody>
+      </p:sp>
+      <p:sp>
+        <p:nvSpPr>
+          <p:cNvPr id="9" name="Rectangle 8"/>
           <p:cNvSpPr/>
           <p:nvPr/>
         </p:nvSpPr>
         <p:spPr>
           <a:xfrm>
-            <a:off x="0" y="0"/>
-            <a:ext cx="12191695" cy="384048"/>
+            <a:off x="6309360" y="2103120"/>
+            <a:ext cx="5120640" cy="3931920"/>
           </a:xfrm>
           <a:prstGeom prst="rect">
             <a:avLst/>
           </a:prstGeom>
           <a:solidFill>
-            <a:srgbClr val="0B2D5B"/>
+            <a:srgbClr val="FFFFFF"/>
           </a:solidFill>
-          <a:ln>
-            <a:noFill/>
+          <a:ln w="15875">
+            <a:solidFill>
+              <a:srgbClr val="D8D2C6"/>
+            </a:solidFill>
           </a:ln>
           <a:effectLst/>
         </p:spPr>
@@ -5358,14 +6650,14 @@
       </p:sp>
       <p:sp>
         <p:nvSpPr>
-          <p:cNvPr id="3" name="TextBox 2"/>
+          <p:cNvPr id="10" name="TextBox 9"/>
           <p:cNvSpPr txBox="1"/>
           <p:nvPr/>
         </p:nvSpPr>
         <p:spPr>
           <a:xfrm>
-            <a:off x="548640" y="100584"/>
-            <a:ext cx="10972800" cy="274320"/>
+            <a:off x="6583680" y="2286000"/>
+            <a:ext cx="4572000" cy="457200"/>
           </a:xfrm>
           <a:prstGeom prst="rect">
             <a:avLst/>
@@ -5380,31 +6672,31 @@
           <a:p>
             <a:pPr algn="l">
               <a:spcAft>
-                <a:spcPts val="495"/>
-              </a:spcAft>
-            </a:pPr>
-            <a:r>
-              <a:rPr sz="1100" b="1" i="0">
-                <a:solidFill>
-                  <a:srgbClr val="FFFFFF"/>
+                <a:spcPts val="585"/>
+              </a:spcAft>
+            </a:pPr>
+            <a:r>
+              <a:rPr sz="1300" b="1" i="0">
+                <a:solidFill>
+                  <a:srgbClr val="0B2D5B"/>
                 </a:solidFill>
                 <a:latin typeface="Inter Tight"/>
               </a:rPr>
-              <a:t>TEACHER PAGE  ·  skipped when you present  ·  Before you teach</a:t>
-            </a:r>
-          </a:p>
-        </p:txBody>
-      </p:sp>
-      <p:sp>
-        <p:nvSpPr>
-          <p:cNvPr id="4" name="TextBox 3"/>
+              <a:t>RESPECT</a:t>
+            </a:r>
+          </a:p>
+        </p:txBody>
+      </p:sp>
+      <p:sp>
+        <p:nvSpPr>
+          <p:cNvPr id="11" name="TextBox 10"/>
           <p:cNvSpPr txBox="1"/>
           <p:nvPr/>
         </p:nvSpPr>
         <p:spPr>
           <a:xfrm>
-            <a:off x="548640" y="685800"/>
-            <a:ext cx="10972800" cy="640080"/>
+            <a:off x="6583680" y="2788920"/>
+            <a:ext cx="4572000" cy="3108960"/>
           </a:xfrm>
           <a:prstGeom prst="rect">
             <a:avLst/>
@@ -5419,351 +6711,65 @@
           <a:p>
             <a:pPr algn="l">
               <a:spcAft>
-                <a:spcPts val="1350"/>
-              </a:spcAft>
-            </a:pPr>
-            <a:r>
-              <a:rPr sz="3000" b="1" i="0">
+                <a:spcPts val="855"/>
+              </a:spcAft>
+            </a:pPr>
+            <a:r>
+              <a:rPr sz="1900" b="0" i="0">
                 <a:solidFill>
                   <a:srgbClr val="1C1B19"/>
                 </a:solidFill>
                 <a:latin typeface="Source Serif 4"/>
               </a:rPr>
-              <a:t>Before you teach</a:t>
-            </a:r>
-          </a:p>
-        </p:txBody>
-      </p:sp>
-      <p:sp>
-        <p:nvSpPr>
-          <p:cNvPr id="5" name="TextBox 4"/>
-          <p:cNvSpPr txBox="1"/>
-          <p:nvPr/>
-        </p:nvSpPr>
-        <p:spPr>
-          <a:xfrm>
-            <a:off x="548640" y="1463040"/>
-            <a:ext cx="5394960" cy="4937760"/>
-          </a:xfrm>
-          <a:prstGeom prst="rect">
-            <a:avLst/>
-          </a:prstGeom>
-          <a:noFill/>
-        </p:spPr>
-        <p:txBody>
-          <a:bodyPr wrap="square" anchor="t" lIns="0" rIns="0" tIns="0" bIns="0">
-            <a:spAutoFit/>
-          </a:bodyPr>
-          <a:lstStyle/>
-          <a:p>
-            <a:pPr algn="l">
-              <a:spcAft>
-                <a:spcPts val="585"/>
-              </a:spcAft>
-            </a:pPr>
-            <a:r>
-              <a:rPr sz="1500" b="1" i="0">
+              <a:t>Earned by what you do</a:t>
+            </a:r>
+          </a:p>
+          <a:p>
+            <a:pPr algn="l">
+              <a:spcAft>
+                <a:spcPts val="855"/>
+              </a:spcAft>
+            </a:pPr>
+            <a:r>
+              <a:rPr sz="1900" b="0" i="0">
                 <a:solidFill>
                   <a:srgbClr val="1C1B19"/>
                 </a:solidFill>
                 <a:latin typeface="Source Serif 4"/>
               </a:rPr>
-              <a:t>This is about everyone in the room, including you.</a:t>
-            </a:r>
-          </a:p>
-          <a:p>
-            <a:pPr algn="l">
-              <a:spcAft>
-                <a:spcPts val="585"/>
-              </a:spcAft>
-            </a:pPr>
-            <a:r>
-              <a:rPr sz="1300" b="0" i="0">
+              <a:t>Can grow or shrink</a:t>
+            </a:r>
+          </a:p>
+          <a:p>
+            <a:pPr algn="l">
+              <a:spcAft>
+                <a:spcPts val="855"/>
+              </a:spcAft>
+            </a:pPr>
+            <a:r>
+              <a:rPr sz="1900" b="0" i="0">
                 <a:solidFill>
                   <a:srgbClr val="1C1B19"/>
                 </a:solidFill>
                 <a:latin typeface="Source Serif 4"/>
               </a:rPr>
-              <a:t>Dignity applies to the students who are hard to like, too. Model it in how you run the conversation: names said right, every answer taken seriously, no sarcasm.</a:t>
-            </a:r>
-          </a:p>
-          <a:p>
-            <a:pPr algn="l">
-              <a:spcAft>
-                <a:spcPts val="585"/>
-              </a:spcAft>
-            </a:pPr>
-            <a:r>
-              <a:rPr sz="1300" b="0" i="0">
+              <a:t>You choose who gets it</a:t>
+            </a:r>
+          </a:p>
+          <a:p>
+            <a:pPr algn="l">
+              <a:spcAft>
+                <a:spcPts val="855"/>
+              </a:spcAft>
+            </a:pPr>
+            <a:r>
+              <a:rPr sz="1900" b="0" i="0">
                 <a:solidFill>
                   <a:srgbClr val="1C1B19"/>
                 </a:solidFill>
                 <a:latin typeface="Source Serif 4"/>
               </a:rPr>
-              <a:t/>
-            </a:r>
-          </a:p>
-          <a:p>
-            <a:pPr algn="l">
-              <a:spcAft>
-                <a:spcPts val="585"/>
-              </a:spcAft>
-            </a:pPr>
-            <a:r>
-              <a:rPr sz="1500" b="1" i="0">
-                <a:solidFill>
-                  <a:srgbClr val="1C1B19"/>
-                </a:solidFill>
-                <a:latin typeface="Source Serif 4"/>
-              </a:rPr>
-              <a:t>Don't ask for stories of exclusion.</a:t>
-            </a:r>
-          </a:p>
-          <a:p>
-            <a:pPr algn="l">
-              <a:spcAft>
-                <a:spcPts val="585"/>
-              </a:spcAft>
-            </a:pPr>
-            <a:r>
-              <a:rPr sz="1300" b="0" i="0">
-                <a:solidFill>
-                  <a:srgbClr val="1C1B19"/>
-                </a:solidFill>
-                <a:latin typeface="Source Serif 4"/>
-              </a:rPr>
-              <a:t>Being left out is painful, and retelling it in front of the people who did it can make it worse. Keep examples invented. Students can think of their own privately.</a:t>
-            </a:r>
-          </a:p>
-          <a:p>
-            <a:pPr algn="l">
-              <a:spcAft>
-                <a:spcPts val="585"/>
-              </a:spcAft>
-            </a:pPr>
-            <a:r>
-              <a:rPr sz="1300" b="0" i="0">
-                <a:solidFill>
-                  <a:srgbClr val="1C1B19"/>
-                </a:solidFill>
-                <a:latin typeface="Source Serif 4"/>
-              </a:rPr>
-              <a:t/>
-            </a:r>
-          </a:p>
-          <a:p>
-            <a:pPr algn="l">
-              <a:spcAft>
-                <a:spcPts val="585"/>
-              </a:spcAft>
-            </a:pPr>
-            <a:r>
-              <a:rPr sz="1500" b="1" i="0">
-                <a:solidFill>
-                  <a:srgbClr val="1C1B19"/>
-                </a:solidFill>
-                <a:latin typeface="Source Serif 4"/>
-              </a:rPr>
-              <a:t>Dignity isn't agreement.</a:t>
-            </a:r>
-          </a:p>
-          <a:p>
-            <a:pPr algn="l">
-              <a:spcAft>
-                <a:spcPts val="585"/>
-              </a:spcAft>
-            </a:pPr>
-            <a:r>
-              <a:rPr sz="1300" b="0" i="0">
-                <a:solidFill>
-                  <a:srgbClr val="1C1B19"/>
-                </a:solidFill>
-                <a:latin typeface="Source Serif 4"/>
-              </a:rPr>
-              <a:t>Some students will push back: "So I have to respect everyone?" Good question. The answer is the heart of the lesson: you don't have to respect what someone does, and you still treat them as a person with worth.</a:t>
-            </a:r>
-          </a:p>
-          <a:p>
-            <a:pPr algn="l">
-              <a:spcAft>
-                <a:spcPts val="585"/>
-              </a:spcAft>
-            </a:pPr>
-            <a:r>
-              <a:rPr sz="1300" b="0" i="0">
-                <a:solidFill>
-                  <a:srgbClr val="1C1B19"/>
-                </a:solidFill>
-                <a:latin typeface="Source Serif 4"/>
-              </a:rPr>
-              <a:t/>
-            </a:r>
-          </a:p>
-        </p:txBody>
-      </p:sp>
-      <p:sp>
-        <p:nvSpPr>
-          <p:cNvPr id="6" name="TextBox 5"/>
-          <p:cNvSpPr txBox="1"/>
-          <p:nvPr/>
-        </p:nvSpPr>
-        <p:spPr>
-          <a:xfrm>
-            <a:off x="6217920" y="1463040"/>
-            <a:ext cx="5394960" cy="4937760"/>
-          </a:xfrm>
-          <a:prstGeom prst="rect">
-            <a:avLst/>
-          </a:prstGeom>
-          <a:noFill/>
-        </p:spPr>
-        <p:txBody>
-          <a:bodyPr wrap="square" anchor="t" lIns="0" rIns="0" tIns="0" bIns="0">
-            <a:spAutoFit/>
-          </a:bodyPr>
-          <a:lstStyle/>
-          <a:p>
-            <a:pPr algn="l">
-              <a:spcAft>
-                <a:spcPts val="585"/>
-              </a:spcAft>
-            </a:pPr>
-            <a:r>
-              <a:rPr sz="1500" b="1" i="0">
-                <a:solidFill>
-                  <a:srgbClr val="1C1B19"/>
-                </a:solidFill>
-                <a:latin typeface="Source Serif 4"/>
-              </a:rPr>
-              <a:t>Watch for targeting in the room.</a:t>
-            </a:r>
-          </a:p>
-          <a:p>
-            <a:pPr algn="l">
-              <a:spcAft>
-                <a:spcPts val="585"/>
-              </a:spcAft>
-            </a:pPr>
-            <a:r>
-              <a:rPr sz="1300" b="0" i="0">
-                <a:solidFill>
-                  <a:srgbClr val="1C1B19"/>
-                </a:solidFill>
-                <a:latin typeface="Source Serif 4"/>
-              </a:rPr>
-              <a:t>If a student laughs or looks at a classmate during the "breaks it" examples, the lesson may be landing on something real. Move on calmly, then check in privately and let a counselor know that day.</a:t>
-            </a:r>
-          </a:p>
-          <a:p>
-            <a:pPr algn="l">
-              <a:spcAft>
-                <a:spcPts val="585"/>
-              </a:spcAft>
-            </a:pPr>
-            <a:r>
-              <a:rPr sz="1300" b="0" i="0">
-                <a:solidFill>
-                  <a:srgbClr val="1C1B19"/>
-                </a:solidFill>
-                <a:latin typeface="Source Serif 4"/>
-              </a:rPr>
-              <a:t/>
-            </a:r>
-          </a:p>
-          <a:p>
-            <a:pPr algn="l">
-              <a:spcAft>
-                <a:spcPts val="585"/>
-              </a:spcAft>
-            </a:pPr>
-            <a:r>
-              <a:rPr sz="1500" b="1" i="0">
-                <a:solidFill>
-                  <a:srgbClr val="1C1B19"/>
-                </a:solidFill>
-                <a:latin typeface="Source Serif 4"/>
-              </a:rPr>
-              <a:t>Name the adults' part too.</a:t>
-            </a:r>
-          </a:p>
-          <a:p>
-            <a:pPr algn="l">
-              <a:spcAft>
-                <a:spcPts val="585"/>
-              </a:spcAft>
-            </a:pPr>
-            <a:r>
-              <a:rPr sz="1300" b="0" i="0">
-                <a:solidFill>
-                  <a:srgbClr val="1C1B19"/>
-                </a:solidFill>
-                <a:latin typeface="Source Serif 4"/>
-              </a:rPr>
-              <a:t>Belonging at school isn't only students' job. Adults set much of the culture. It's fine to say, "We're working on this too."</a:t>
-            </a:r>
-          </a:p>
-          <a:p>
-            <a:pPr algn="l">
-              <a:spcAft>
-                <a:spcPts val="585"/>
-              </a:spcAft>
-            </a:pPr>
-            <a:r>
-              <a:rPr sz="1300" b="0" i="0">
-                <a:solidFill>
-                  <a:srgbClr val="1C1B19"/>
-                </a:solidFill>
-                <a:latin typeface="Source Serif 4"/>
-              </a:rPr>
-              <a:t/>
-            </a:r>
-          </a:p>
-          <a:p>
-            <a:pPr algn="l">
-              <a:spcAft>
-                <a:spcPts val="585"/>
-              </a:spcAft>
-            </a:pPr>
-            <a:r>
-              <a:rPr sz="1500" b="1" i="0">
-                <a:solidFill>
-                  <a:srgbClr val="1C1B19"/>
-                </a:solidFill>
-                <a:latin typeface="Source Serif 4"/>
-              </a:rPr>
-              <a:t>Where this comes from.</a:t>
-            </a:r>
-          </a:p>
-          <a:p>
-            <a:pPr algn="l">
-              <a:spcAft>
-                <a:spcPts val="585"/>
-              </a:spcAft>
-            </a:pPr>
-            <a:r>
-              <a:rPr sz="1300" b="0" i="0">
-                <a:solidFill>
-                  <a:srgbClr val="1C1B19"/>
-                </a:solidFill>
-                <a:latin typeface="Source Serif 4"/>
-              </a:rPr>
-              <a:t>Floyd Cobb and John Krownapple's Belonging Through a Culture of Dignity argues that equity work rests on recognizing everyone's inherent worth. Donna Hicks's elements of dignity give the everyday moves on the student page.</a:t>
-            </a:r>
-          </a:p>
-          <a:p>
-            <a:pPr algn="l">
-              <a:spcAft>
-                <a:spcPts val="585"/>
-              </a:spcAft>
-            </a:pPr>
-            <a:r>
-              <a:rPr sz="1300" b="0" i="0">
-                <a:solidFill>
-                  <a:srgbClr val="1C1B19"/>
-                </a:solidFill>
-                <a:latin typeface="Source Serif 4"/>
-              </a:rPr>
-              <a:t/>
+              <a:t>"I respect how you handled that"</a:t>
             </a:r>
           </a:p>
         </p:txBody>
@@ -5776,13 +6782,13 @@
 </p:sld>
 </file>
 
-<file path=ppt/slides/slide3.xml><?xml version="1.0" encoding="utf-8"?>
-<p:sld xmlns:a="http://schemas.openxmlformats.org/drawingml/2006/main" xmlns:p="http://schemas.openxmlformats.org/presentationml/2006/main" xmlns:r="http://schemas.openxmlformats.org/officeDocument/2006/relationships" show="0">
+<file path=ppt/slides/slide5.xml><?xml version="1.0" encoding="utf-8"?>
+<p:sld xmlns:a="http://schemas.openxmlformats.org/drawingml/2006/main" xmlns:p="http://schemas.openxmlformats.org/presentationml/2006/main" xmlns:r="http://schemas.openxmlformats.org/officeDocument/2006/relationships">
   <p:cSld>
     <p:bg>
       <p:bgPr>
         <a:solidFill>
-          <a:srgbClr val="EEEBE4"/>
+          <a:srgbClr val="F7F4EE"/>
         </a:solidFill>
         <a:effectLst/>
       </p:bgPr>
@@ -5802,14 +6808,14 @@
         </p:nvSpPr>
         <p:spPr>
           <a:xfrm>
-            <a:off x="0" y="0"/>
-            <a:ext cx="12191695" cy="384048"/>
+            <a:off x="548640" y="502920"/>
+            <a:ext cx="457200" cy="54864"/>
           </a:xfrm>
           <a:prstGeom prst="rect">
             <a:avLst/>
           </a:prstGeom>
           <a:solidFill>
-            <a:srgbClr val="0B2D5B"/>
+            <a:srgbClr val="F47B20"/>
           </a:solidFill>
           <a:ln>
             <a:noFill/>
@@ -5846,8 +6852,8 @@
         </p:nvSpPr>
         <p:spPr>
           <a:xfrm>
-            <a:off x="548640" y="100584"/>
-            <a:ext cx="10972800" cy="274320"/>
+            <a:off x="1143000" y="393192"/>
+            <a:ext cx="8229600" cy="274320"/>
           </a:xfrm>
           <a:prstGeom prst="rect">
             <a:avLst/>
@@ -5862,17 +6868,17 @@
           <a:p>
             <a:pPr algn="l">
               <a:spcAft>
-                <a:spcPts val="495"/>
-              </a:spcAft>
-            </a:pPr>
-            <a:r>
-              <a:rPr sz="1100" b="1" i="0">
-                <a:solidFill>
-                  <a:srgbClr val="FFFFFF"/>
+                <a:spcPts val="540"/>
+              </a:spcAft>
+            </a:pPr>
+            <a:r>
+              <a:rPr sz="1200" b="1" i="0">
+                <a:solidFill>
+                  <a:srgbClr val="5D5A54"/>
                 </a:solidFill>
                 <a:latin typeface="Inter Tight"/>
               </a:rPr>
-              <a:t>TEACHER PAGE  ·  skipped when you present  ·  Every student in the room</a:t>
+              <a:t>FITTING IN</a:t>
             </a:r>
           </a:p>
         </p:txBody>
@@ -5885,8 +6891,8 @@
         </p:nvSpPr>
         <p:spPr>
           <a:xfrm>
-            <a:off x="548640" y="685800"/>
-            <a:ext cx="10972800" cy="640080"/>
+            <a:off x="8229600" y="6400800"/>
+            <a:ext cx="3410712" cy="274320"/>
           </a:xfrm>
           <a:prstGeom prst="rect">
             <a:avLst/>
@@ -5899,19 +6905,19 @@
           </a:bodyPr>
           <a:lstStyle/>
           <a:p>
-            <a:pPr algn="l">
-              <a:spcAft>
-                <a:spcPts val="1350"/>
-              </a:spcAft>
-            </a:pPr>
-            <a:r>
-              <a:rPr sz="3000" b="1" i="0">
-                <a:solidFill>
-                  <a:srgbClr val="1C1B19"/>
-                </a:solidFill>
-                <a:latin typeface="Source Serif 4"/>
-              </a:rPr>
-              <a:t>Every student in the room</a:t>
+            <a:pPr algn="r">
+              <a:spcAft>
+                <a:spcPts val="450"/>
+              </a:spcAft>
+            </a:pPr>
+            <a:r>
+              <a:rPr sz="1000" b="0" i="0">
+                <a:solidFill>
+                  <a:srgbClr val="5D5A54"/>
+                </a:solidFill>
+                <a:latin typeface="Inter Tight"/>
+              </a:rPr>
+              <a:t>Beaver Counseling</a:t>
             </a:r>
           </a:p>
         </p:txBody>
@@ -5924,8 +6930,8 @@
         </p:nvSpPr>
         <p:spPr>
           <a:xfrm>
-            <a:off x="548640" y="1325880"/>
-            <a:ext cx="10972800" cy="365760"/>
+            <a:off x="822960" y="1463040"/>
+            <a:ext cx="10515600" cy="3291840"/>
           </a:xfrm>
           <a:prstGeom prst="rect">
             <a:avLst/>
@@ -5933,24 +6939,24 @@
           <a:noFill/>
         </p:spPr>
         <p:txBody>
-          <a:bodyPr wrap="square" anchor="t" lIns="0" rIns="0" tIns="0" bIns="0">
+          <a:bodyPr wrap="square" anchor="ctr" lIns="0" rIns="0" tIns="0" bIns="0">
             <a:spAutoFit/>
           </a:bodyPr>
           <a:lstStyle/>
           <a:p>
             <a:pPr algn="l">
               <a:spcAft>
-                <a:spcPts val="630"/>
-              </a:spcAft>
-            </a:pPr>
-            <a:r>
-              <a:rPr sz="1400" b="0" i="0">
-                <a:solidFill>
-                  <a:srgbClr val="5D5A54"/>
-                </a:solidFill>
-                <a:latin typeface="Inter Tight"/>
-              </a:rPr>
-              <a:t>Culture, family, identity, ability and money: what to keep in mind for this topic.</a:t>
+                <a:spcPts val="2070"/>
+              </a:spcAft>
+            </a:pPr>
+            <a:r>
+              <a:rPr sz="4600" b="1" i="0">
+                <a:solidFill>
+                  <a:srgbClr val="1C1B19"/>
+                </a:solidFill>
+                <a:latin typeface="Source Serif 4"/>
+              </a:rPr>
+              <a:t>Fitting in: changing yourself so they'll accept you. Belonging: being accepted as you are.</a:t>
             </a:r>
           </a:p>
         </p:txBody>
@@ -5963,8 +6969,8 @@
         </p:nvSpPr>
         <p:spPr>
           <a:xfrm>
-            <a:off x="548640" y="1828800"/>
-            <a:ext cx="5394960" cy="4572000"/>
+            <a:off x="822960" y="4846320"/>
+            <a:ext cx="10515600" cy="1097280"/>
           </a:xfrm>
           <a:prstGeom prst="rect">
             <a:avLst/>
@@ -5979,931 +6985,17 @@
           <a:p>
             <a:pPr algn="l">
               <a:spcAft>
-                <a:spcPts val="585"/>
-              </a:spcAft>
-            </a:pPr>
-            <a:r>
-              <a:rPr sz="1500" b="1" i="0">
-                <a:solidFill>
-                  <a:srgbClr val="1C1B19"/>
+                <a:spcPts val="990"/>
+              </a:spcAft>
+            </a:pPr>
+            <a:r>
+              <a:rPr sz="2200" b="0" i="1">
+                <a:solidFill>
+                  <a:srgbClr val="5D5A54"/>
                 </a:solidFill>
                 <a:latin typeface="Source Serif 4"/>
               </a:rPr>
-              <a:t>Who already belongs?</a:t>
-            </a:r>
-          </a:p>
-          <a:p>
-            <a:pPr algn="l">
-              <a:spcAft>
-                <a:spcPts val="585"/>
-              </a:spcAft>
-            </a:pPr>
-            <a:r>
-              <a:rPr sz="1300" b="0" i="0">
-                <a:solidFill>
-                  <a:srgbClr val="1C1B19"/>
-                </a:solidFill>
-                <a:latin typeface="Source Serif 4"/>
-              </a:rPr>
-              <a:t>Students who match the school's majority culture may not notice belonging, because they've always had it. Students of color, students new to the school, LGBTQ+ students, students with disabilities and students on financial aid often notice it every day.</a:t>
-            </a:r>
-          </a:p>
-          <a:p>
-            <a:pPr algn="l">
-              <a:spcAft>
-                <a:spcPts val="585"/>
-              </a:spcAft>
-            </a:pPr>
-            <a:r>
-              <a:rPr sz="1300" b="0" i="0">
-                <a:solidFill>
-                  <a:srgbClr val="1C1B19"/>
-                </a:solidFill>
-                <a:latin typeface="Source Serif 4"/>
-              </a:rPr>
-              <a:t/>
-            </a:r>
-          </a:p>
-          <a:p>
-            <a:pPr algn="l">
-              <a:spcAft>
-                <a:spcPts val="585"/>
-              </a:spcAft>
-            </a:pPr>
-            <a:r>
-              <a:rPr sz="1500" b="1" i="0">
-                <a:solidFill>
-                  <a:srgbClr val="1C1B19"/>
-                </a:solidFill>
-                <a:latin typeface="Source Serif 4"/>
-              </a:rPr>
-              <a:t>Names.</a:t>
-            </a:r>
-          </a:p>
-          <a:p>
-            <a:pPr algn="l">
-              <a:spcAft>
-                <a:spcPts val="585"/>
-              </a:spcAft>
-            </a:pPr>
-            <a:r>
-              <a:rPr sz="1300" b="0" i="0">
-                <a:solidFill>
-                  <a:srgbClr val="1C1B19"/>
-                </a:solidFill>
-                <a:latin typeface="Source Serif 4"/>
-              </a:rPr>
-              <a:t>Mispronouncing or shortening a name, especially a non-Anglo one, is one of the most common dignity hits in schools. Ask, practice, and get it right.</a:t>
-            </a:r>
-          </a:p>
-          <a:p>
-            <a:pPr algn="l">
-              <a:spcAft>
-                <a:spcPts val="585"/>
-              </a:spcAft>
-            </a:pPr>
-            <a:r>
-              <a:rPr sz="1300" b="0" i="0">
-                <a:solidFill>
-                  <a:srgbClr val="1C1B19"/>
-                </a:solidFill>
-                <a:latin typeface="Source Serif 4"/>
-              </a:rPr>
-              <a:t/>
-            </a:r>
-          </a:p>
-          <a:p>
-            <a:pPr algn="l">
-              <a:spcAft>
-                <a:spcPts val="585"/>
-              </a:spcAft>
-            </a:pPr>
-            <a:r>
-              <a:rPr sz="1500" b="1" i="0">
-                <a:solidFill>
-                  <a:srgbClr val="1C1B19"/>
-                </a:solidFill>
-                <a:latin typeface="Source Serif 4"/>
-              </a:rPr>
-              <a:t>Money.</a:t>
-            </a:r>
-          </a:p>
-          <a:p>
-            <a:pPr algn="l">
-              <a:spcAft>
-                <a:spcPts val="585"/>
-              </a:spcAft>
-            </a:pPr>
-            <a:r>
-              <a:rPr sz="1300" b="0" i="0">
-                <a:solidFill>
-                  <a:srgbClr val="1C1B19"/>
-                </a:solidFill>
-                <a:latin typeface="Source Serif 4"/>
-              </a:rPr>
-              <a:t>Inclusion often costs money at school: trips, gear, eating out, the right clothes. Students may be left out for reasons they can't fix. Keep examples free.</a:t>
-            </a:r>
-          </a:p>
-          <a:p>
-            <a:pPr algn="l">
-              <a:spcAft>
-                <a:spcPts val="585"/>
-              </a:spcAft>
-            </a:pPr>
-            <a:r>
-              <a:rPr sz="1300" b="0" i="0">
-                <a:solidFill>
-                  <a:srgbClr val="1C1B19"/>
-                </a:solidFill>
-                <a:latin typeface="Source Serif 4"/>
-              </a:rPr>
-              <a:t/>
-            </a:r>
-          </a:p>
-        </p:txBody>
-      </p:sp>
-      <p:sp>
-        <p:nvSpPr>
-          <p:cNvPr id="7" name="TextBox 6"/>
-          <p:cNvSpPr txBox="1"/>
-          <p:nvPr/>
-        </p:nvSpPr>
-        <p:spPr>
-          <a:xfrm>
-            <a:off x="6217920" y="1828800"/>
-            <a:ext cx="5394960" cy="4572000"/>
-          </a:xfrm>
-          <a:prstGeom prst="rect">
-            <a:avLst/>
-          </a:prstGeom>
-          <a:noFill/>
-        </p:spPr>
-        <p:txBody>
-          <a:bodyPr wrap="square" anchor="t" lIns="0" rIns="0" tIns="0" bIns="0">
-            <a:spAutoFit/>
-          </a:bodyPr>
-          <a:lstStyle/>
-          <a:p>
-            <a:pPr algn="l">
-              <a:spcAft>
-                <a:spcPts val="585"/>
-              </a:spcAft>
-            </a:pPr>
-            <a:r>
-              <a:rPr sz="1500" b="1" i="0">
-                <a:solidFill>
-                  <a:srgbClr val="1C1B19"/>
-                </a:solidFill>
-                <a:latin typeface="Source Serif 4"/>
-              </a:rPr>
-              <a:t>Faith and values.</a:t>
-            </a:r>
-          </a:p>
-          <a:p>
-            <a:pPr algn="l">
-              <a:spcAft>
-                <a:spcPts val="585"/>
-              </a:spcAft>
-            </a:pPr>
-            <a:r>
-              <a:rPr sz="1300" b="0" i="0">
-                <a:solidFill>
-                  <a:srgbClr val="1C1B19"/>
-                </a:solidFill>
-                <a:latin typeface="Source Serif 4"/>
-              </a:rPr>
-              <a:t>Some students hold beliefs others disagree with, strongly. Dignity applies across those lines too. You can disagree with a belief and still treat a person with dignity.</a:t>
-            </a:r>
-          </a:p>
-          <a:p>
-            <a:pPr algn="l">
-              <a:spcAft>
-                <a:spcPts val="585"/>
-              </a:spcAft>
-            </a:pPr>
-            <a:r>
-              <a:rPr sz="1300" b="0" i="0">
-                <a:solidFill>
-                  <a:srgbClr val="1C1B19"/>
-                </a:solidFill>
-                <a:latin typeface="Source Serif 4"/>
-              </a:rPr>
-              <a:t/>
-            </a:r>
-          </a:p>
-          <a:p>
-            <a:pPr algn="l">
-              <a:spcAft>
-                <a:spcPts val="585"/>
-              </a:spcAft>
-            </a:pPr>
-            <a:r>
-              <a:rPr sz="1500" b="1" i="0">
-                <a:solidFill>
-                  <a:srgbClr val="1C1B19"/>
-                </a:solidFill>
-                <a:latin typeface="Source Serif 4"/>
-              </a:rPr>
-              <a:t>Disability and neurodivergence.</a:t>
-            </a:r>
-          </a:p>
-          <a:p>
-            <a:pPr algn="l">
-              <a:spcAft>
-                <a:spcPts val="585"/>
-              </a:spcAft>
-            </a:pPr>
-            <a:r>
-              <a:rPr sz="1300" b="0" i="0">
-                <a:solidFill>
-                  <a:srgbClr val="1C1B19"/>
-                </a:solidFill>
-                <a:latin typeface="Source Serif 4"/>
-              </a:rPr>
-              <a:t>Students who process social cues differently may be left out without anyone meaning harm. "Widen the circle" includes them.</a:t>
-            </a:r>
-          </a:p>
-          <a:p>
-            <a:pPr algn="l">
-              <a:spcAft>
-                <a:spcPts val="585"/>
-              </a:spcAft>
-            </a:pPr>
-            <a:r>
-              <a:rPr sz="1300" b="0" i="0">
-                <a:solidFill>
-                  <a:srgbClr val="1C1B19"/>
-                </a:solidFill>
-                <a:latin typeface="Source Serif 4"/>
-              </a:rPr>
-              <a:t/>
-            </a:r>
-          </a:p>
-          <a:p>
-            <a:pPr algn="l">
-              <a:spcAft>
-                <a:spcPts val="585"/>
-              </a:spcAft>
-            </a:pPr>
-            <a:r>
-              <a:rPr sz="1500" b="1" i="0">
-                <a:solidFill>
-                  <a:srgbClr val="1C1B19"/>
-                </a:solidFill>
-                <a:latin typeface="Source Serif 4"/>
-              </a:rPr>
-              <a:t>Culture shapes how belonging looks.</a:t>
-            </a:r>
-          </a:p>
-          <a:p>
-            <a:pPr algn="l">
-              <a:spcAft>
-                <a:spcPts val="585"/>
-              </a:spcAft>
-            </a:pPr>
-            <a:r>
-              <a:rPr sz="1300" b="0" i="0">
-                <a:solidFill>
-                  <a:srgbClr val="1C1B19"/>
-                </a:solidFill>
-                <a:latin typeface="Source Serif 4"/>
-              </a:rPr>
-              <a:t>In some families, belonging is about family and community first, and school belonging matters less. Respect that; the lesson is about how we treat people, not ranking where students belong.</a:t>
-            </a:r>
-          </a:p>
-          <a:p>
-            <a:pPr algn="l">
-              <a:spcAft>
-                <a:spcPts val="585"/>
-              </a:spcAft>
-            </a:pPr>
-            <a:r>
-              <a:rPr sz="1300" b="0" i="0">
-                <a:solidFill>
-                  <a:srgbClr val="1C1B19"/>
-                </a:solidFill>
-                <a:latin typeface="Source Serif 4"/>
-              </a:rPr>
-              <a:t/>
-            </a:r>
-          </a:p>
-        </p:txBody>
-      </p:sp>
-    </p:spTree>
-  </p:cSld>
-  <p:clrMapOvr>
-    <a:masterClrMapping/>
-  </p:clrMapOvr>
-</p:sld>
-</file>
-
-<file path=ppt/slides/slide4.xml><?xml version="1.0" encoding="utf-8"?>
-<p:sld xmlns:a="http://schemas.openxmlformats.org/drawingml/2006/main" xmlns:p="http://schemas.openxmlformats.org/presentationml/2006/main" xmlns:r="http://schemas.openxmlformats.org/officeDocument/2006/relationships" show="0">
-  <p:cSld>
-    <p:bg>
-      <p:bgPr>
-        <a:solidFill>
-          <a:srgbClr val="EEEBE4"/>
-        </a:solidFill>
-        <a:effectLst/>
-      </p:bgPr>
-    </p:bg>
-    <p:spTree>
-      <p:nvGrpSpPr>
-        <p:cNvPr id="1" name=""/>
-        <p:cNvGrpSpPr/>
-        <p:nvPr/>
-      </p:nvGrpSpPr>
-      <p:grpSpPr/>
-      <p:sp>
-        <p:nvSpPr>
-          <p:cNvPr id="2" name="Rectangle 1"/>
-          <p:cNvSpPr/>
-          <p:nvPr/>
-        </p:nvSpPr>
-        <p:spPr>
-          <a:xfrm>
-            <a:off x="0" y="0"/>
-            <a:ext cx="12191695" cy="384048"/>
-          </a:xfrm>
-          <a:prstGeom prst="rect">
-            <a:avLst/>
-          </a:prstGeom>
-          <a:solidFill>
-            <a:srgbClr val="0B2D5B"/>
-          </a:solidFill>
-          <a:ln>
-            <a:noFill/>
-          </a:ln>
-          <a:effectLst/>
-        </p:spPr>
-        <p:style>
-          <a:lnRef idx="1">
-            <a:schemeClr val="accent1"/>
-          </a:lnRef>
-          <a:fillRef idx="3">
-            <a:schemeClr val="accent1"/>
-          </a:fillRef>
-          <a:effectRef idx="2">
-            <a:schemeClr val="accent1"/>
-          </a:effectRef>
-          <a:fontRef idx="minor">
-            <a:schemeClr val="lt1"/>
-          </a:fontRef>
-        </p:style>
-        <p:txBody>
-          <a:bodyPr rtlCol="0" anchor="ctr"/>
-          <a:lstStyle/>
-          <a:p>
-            <a:pPr algn="ctr"/>
-          </a:p>
-        </p:txBody>
-      </p:sp>
-      <p:sp>
-        <p:nvSpPr>
-          <p:cNvPr id="3" name="TextBox 2"/>
-          <p:cNvSpPr txBox="1"/>
-          <p:nvPr/>
-        </p:nvSpPr>
-        <p:spPr>
-          <a:xfrm>
-            <a:off x="548640" y="100584"/>
-            <a:ext cx="10972800" cy="274320"/>
-          </a:xfrm>
-          <a:prstGeom prst="rect">
-            <a:avLst/>
-          </a:prstGeom>
-          <a:noFill/>
-        </p:spPr>
-        <p:txBody>
-          <a:bodyPr wrap="square" anchor="t" lIns="0" rIns="0" tIns="0" bIns="0">
-            <a:spAutoFit/>
-          </a:bodyPr>
-          <a:lstStyle/>
-          <a:p>
-            <a:pPr algn="l">
-              <a:spcAft>
-                <a:spcPts val="495"/>
-              </a:spcAft>
-            </a:pPr>
-            <a:r>
-              <a:rPr sz="1100" b="1" i="0">
-                <a:solidFill>
-                  <a:srgbClr val="FFFFFF"/>
-                </a:solidFill>
-                <a:latin typeface="Inter Tight"/>
-              </a:rPr>
-              <a:t>TEACHER PAGE  ·  skipped when you present  ·  Background</a:t>
-            </a:r>
-          </a:p>
-        </p:txBody>
-      </p:sp>
-      <p:sp>
-        <p:nvSpPr>
-          <p:cNvPr id="4" name="TextBox 3"/>
-          <p:cNvSpPr txBox="1"/>
-          <p:nvPr/>
-        </p:nvSpPr>
-        <p:spPr>
-          <a:xfrm>
-            <a:off x="548640" y="685800"/>
-            <a:ext cx="10972800" cy="640080"/>
-          </a:xfrm>
-          <a:prstGeom prst="rect">
-            <a:avLst/>
-          </a:prstGeom>
-          <a:noFill/>
-        </p:spPr>
-        <p:txBody>
-          <a:bodyPr wrap="square" anchor="t" lIns="0" rIns="0" tIns="0" bIns="0">
-            <a:spAutoFit/>
-          </a:bodyPr>
-          <a:lstStyle/>
-          <a:p>
-            <a:pPr algn="l">
-              <a:spcAft>
-                <a:spcPts val="1350"/>
-              </a:spcAft>
-            </a:pPr>
-            <a:r>
-              <a:rPr sz="3000" b="1" i="0">
-                <a:solidFill>
-                  <a:srgbClr val="1C1B19"/>
-                </a:solidFill>
-                <a:latin typeface="Source Serif 4"/>
-              </a:rPr>
-              <a:t>What the research says</a:t>
-            </a:r>
-          </a:p>
-        </p:txBody>
-      </p:sp>
-      <p:sp>
-        <p:nvSpPr>
-          <p:cNvPr id="5" name="TextBox 4"/>
-          <p:cNvSpPr txBox="1"/>
-          <p:nvPr/>
-        </p:nvSpPr>
-        <p:spPr>
-          <a:xfrm>
-            <a:off x="548640" y="1463040"/>
-            <a:ext cx="5394960" cy="4937760"/>
-          </a:xfrm>
-          <a:prstGeom prst="rect">
-            <a:avLst/>
-          </a:prstGeom>
-          <a:noFill/>
-        </p:spPr>
-        <p:txBody>
-          <a:bodyPr wrap="square" anchor="t" lIns="0" rIns="0" tIns="0" bIns="0">
-            <a:spAutoFit/>
-          </a:bodyPr>
-          <a:lstStyle/>
-          <a:p>
-            <a:pPr algn="l">
-              <a:spcAft>
-                <a:spcPts val="585"/>
-              </a:spcAft>
-            </a:pPr>
-            <a:r>
-              <a:rPr sz="1300" b="0" i="0">
-                <a:solidFill>
-                  <a:srgbClr val="1C1B19"/>
-                </a:solidFill>
-                <a:latin typeface="Source Serif 4"/>
-              </a:rPr>
-              <a:t>Cobb and Krownapple argue that belonging, built through a culture of dignity (the inherent worth of every person), is the foundation of equity work in schools, and that dignity differs from respect, which is earned.</a:t>
-            </a:r>
-          </a:p>
-          <a:p>
-            <a:pPr algn="l">
-              <a:spcAft>
-                <a:spcPts val="585"/>
-              </a:spcAft>
-            </a:pPr>
-            <a:r>
-              <a:rPr sz="1050" b="0" i="0">
-                <a:solidFill>
-                  <a:srgbClr val="5D5A54"/>
-                </a:solidFill>
-                <a:latin typeface="Inter Tight"/>
-              </a:rPr>
-              <a:t>Cobb &amp; Krownapple, Belonging Through a Culture of Dignity, 2019</a:t>
-            </a:r>
-          </a:p>
-          <a:p>
-            <a:pPr algn="l">
-              <a:spcAft>
-                <a:spcPts val="585"/>
-              </a:spcAft>
-            </a:pPr>
-            <a:r>
-              <a:rPr sz="1300" b="0" i="0">
-                <a:solidFill>
-                  <a:srgbClr val="1C1B19"/>
-                </a:solidFill>
-                <a:latin typeface="Source Serif 4"/>
-              </a:rPr>
-              <a:t>Hicks describes ten essential elements of dignity, including acceptance of identity, inclusion, fairness, benefit of the doubt and accountability, drawn from her work in international conflict resolution.</a:t>
-            </a:r>
-          </a:p>
-          <a:p>
-            <a:pPr algn="l">
-              <a:spcAft>
-                <a:spcPts val="585"/>
-              </a:spcAft>
-            </a:pPr>
-            <a:r>
-              <a:rPr sz="1050" b="0" i="0">
-                <a:solidFill>
-                  <a:srgbClr val="5D5A54"/>
-                </a:solidFill>
-                <a:latin typeface="Inter Tight"/>
-              </a:rPr>
-              <a:t>Hicks, Dignity, Yale University Press, 2011</a:t>
-            </a:r>
-          </a:p>
-          <a:p>
-            <a:pPr algn="l">
-              <a:spcAft>
-                <a:spcPts val="585"/>
-              </a:spcAft>
-            </a:pPr>
-            <a:r>
-              <a:rPr sz="1300" b="0" i="0">
-                <a:solidFill>
-                  <a:srgbClr val="1C1B19"/>
-                </a:solidFill>
-                <a:latin typeface="Source Serif 4"/>
-              </a:rPr>
-              <a:t>First-year college students who spent about an hour learning that worries about belonging are common and fade with time showed lasting benefits: over three years, the intervention halved the achievement gap for Black students and improved their self-reported health.</a:t>
-            </a:r>
-          </a:p>
-          <a:p>
-            <a:pPr algn="l">
-              <a:spcAft>
-                <a:spcPts val="585"/>
-              </a:spcAft>
-            </a:pPr>
-            <a:r>
-              <a:rPr sz="1050" b="0" i="0">
-                <a:solidFill>
-                  <a:srgbClr val="5D5A54"/>
-                </a:solidFill>
-                <a:latin typeface="Inter Tight"/>
-              </a:rPr>
-              <a:t>Walton &amp; Cohen, Science, 2011</a:t>
-            </a:r>
-          </a:p>
-        </p:txBody>
-      </p:sp>
-      <p:sp>
-        <p:nvSpPr>
-          <p:cNvPr id="6" name="TextBox 5"/>
-          <p:cNvSpPr txBox="1"/>
-          <p:nvPr/>
-        </p:nvSpPr>
-        <p:spPr>
-          <a:xfrm>
-            <a:off x="6217920" y="1463040"/>
-            <a:ext cx="5394960" cy="4937760"/>
-          </a:xfrm>
-          <a:prstGeom prst="rect">
-            <a:avLst/>
-          </a:prstGeom>
-          <a:noFill/>
-        </p:spPr>
-        <p:txBody>
-          <a:bodyPr wrap="square" anchor="t" lIns="0" rIns="0" tIns="0" bIns="0">
-            <a:spAutoFit/>
-          </a:bodyPr>
-          <a:lstStyle/>
-          <a:p>
-            <a:pPr algn="l">
-              <a:spcAft>
-                <a:spcPts val="585"/>
-              </a:spcAft>
-            </a:pPr>
-            <a:r>
-              <a:rPr sz="1300" b="0" i="0">
-                <a:solidFill>
-                  <a:srgbClr val="1C1B19"/>
-                </a:solidFill>
-                <a:latin typeface="Source Serif 4"/>
-              </a:rPr>
-              <a:t>A meta-analysis of 51 studies found that teacher support and students' own positive traits were the strongest predictors of school belonging.</a:t>
-            </a:r>
-          </a:p>
-          <a:p>
-            <a:pPr algn="l">
-              <a:spcAft>
-                <a:spcPts val="585"/>
-              </a:spcAft>
-            </a:pPr>
-            <a:r>
-              <a:rPr sz="1050" b="0" i="0">
-                <a:solidFill>
-                  <a:srgbClr val="5D5A54"/>
-                </a:solidFill>
-                <a:latin typeface="Inter Tight"/>
-              </a:rPr>
-              <a:t>Allen et al., Educational Psychology Review, 2018</a:t>
-            </a:r>
-          </a:p>
-          <a:p>
-            <a:pPr algn="l">
-              <a:spcAft>
-                <a:spcPts val="585"/>
-              </a:spcAft>
-            </a:pPr>
-            <a:r>
-              <a:rPr sz="1300" b="0" i="0">
-                <a:solidFill>
-                  <a:srgbClr val="1C1B19"/>
-                </a:solidFill>
-                <a:latin typeface="Source Serif 4"/>
-              </a:rPr>
-              <a:t>The need to belong is a fundamental human motivation; lacking belonging is linked to a wide range of harms to health and well-being.</a:t>
-            </a:r>
-          </a:p>
-          <a:p>
-            <a:pPr algn="l">
-              <a:spcAft>
-                <a:spcPts val="585"/>
-              </a:spcAft>
-            </a:pPr>
-            <a:r>
-              <a:rPr sz="1050" b="0" i="0">
-                <a:solidFill>
-                  <a:srgbClr val="5D5A54"/>
-                </a:solidFill>
-                <a:latin typeface="Inter Tight"/>
-              </a:rPr>
-              <a:t>Baumeister &amp; Leary, Psychological Bulletin, 1995</a:t>
-            </a:r>
-          </a:p>
-        </p:txBody>
-      </p:sp>
-    </p:spTree>
-  </p:cSld>
-  <p:clrMapOvr>
-    <a:masterClrMapping/>
-  </p:clrMapOvr>
-</p:sld>
-</file>
-
-<file path=ppt/slides/slide5.xml><?xml version="1.0" encoding="utf-8"?>
-<p:sld xmlns:a="http://schemas.openxmlformats.org/drawingml/2006/main" xmlns:p="http://schemas.openxmlformats.org/presentationml/2006/main" xmlns:r="http://schemas.openxmlformats.org/officeDocument/2006/relationships">
-  <p:cSld>
-    <p:bg>
-      <p:bgPr>
-        <a:solidFill>
-          <a:srgbClr val="0B2D5B"/>
-        </a:solidFill>
-        <a:effectLst/>
-      </p:bgPr>
-    </p:bg>
-    <p:spTree>
-      <p:nvGrpSpPr>
-        <p:cNvPr id="1" name=""/>
-        <p:cNvGrpSpPr/>
-        <p:nvPr/>
-      </p:nvGrpSpPr>
-      <p:grpSpPr/>
-      <p:sp>
-        <p:nvSpPr>
-          <p:cNvPr id="2" name="Rectangle 1"/>
-          <p:cNvSpPr/>
-          <p:nvPr/>
-        </p:nvSpPr>
-        <p:spPr>
-          <a:xfrm>
-            <a:off x="548640" y="502920"/>
-            <a:ext cx="457200" cy="54864"/>
-          </a:xfrm>
-          <a:prstGeom prst="rect">
-            <a:avLst/>
-          </a:prstGeom>
-          <a:solidFill>
-            <a:srgbClr val="F47B20"/>
-          </a:solidFill>
-          <a:ln>
-            <a:noFill/>
-          </a:ln>
-          <a:effectLst/>
-        </p:spPr>
-        <p:style>
-          <a:lnRef idx="1">
-            <a:schemeClr val="accent1"/>
-          </a:lnRef>
-          <a:fillRef idx="3">
-            <a:schemeClr val="accent1"/>
-          </a:fillRef>
-          <a:effectRef idx="2">
-            <a:schemeClr val="accent1"/>
-          </a:effectRef>
-          <a:fontRef idx="minor">
-            <a:schemeClr val="lt1"/>
-          </a:fontRef>
-        </p:style>
-        <p:txBody>
-          <a:bodyPr rtlCol="0" anchor="ctr"/>
-          <a:lstStyle/>
-          <a:p>
-            <a:pPr algn="ctr"/>
-          </a:p>
-        </p:txBody>
-      </p:sp>
-      <p:sp>
-        <p:nvSpPr>
-          <p:cNvPr id="3" name="TextBox 2"/>
-          <p:cNvSpPr txBox="1"/>
-          <p:nvPr/>
-        </p:nvSpPr>
-        <p:spPr>
-          <a:xfrm>
-            <a:off x="1143000" y="393192"/>
-            <a:ext cx="8229600" cy="274320"/>
-          </a:xfrm>
-          <a:prstGeom prst="rect">
-            <a:avLst/>
-          </a:prstGeom>
-          <a:noFill/>
-        </p:spPr>
-        <p:txBody>
-          <a:bodyPr wrap="square" anchor="t" lIns="0" rIns="0" tIns="0" bIns="0">
-            <a:spAutoFit/>
-          </a:bodyPr>
-          <a:lstStyle/>
-          <a:p>
-            <a:pPr algn="l">
-              <a:spcAft>
-                <a:spcPts val="540"/>
-              </a:spcAft>
-            </a:pPr>
-            <a:r>
-              <a:rPr sz="1200" b="1" i="0">
-                <a:solidFill>
-                  <a:srgbClr val="5D5A54"/>
-                </a:solidFill>
-                <a:latin typeface="Inter Tight"/>
-              </a:rPr>
-              <a:t>DIGNITY AND BELONGING</a:t>
-            </a:r>
-          </a:p>
-        </p:txBody>
-      </p:sp>
-      <p:sp>
-        <p:nvSpPr>
-          <p:cNvPr id="4" name="TextBox 3"/>
-          <p:cNvSpPr txBox="1"/>
-          <p:nvPr/>
-        </p:nvSpPr>
-        <p:spPr>
-          <a:xfrm>
-            <a:off x="8229600" y="6400800"/>
-            <a:ext cx="3410712" cy="274320"/>
-          </a:xfrm>
-          <a:prstGeom prst="rect">
-            <a:avLst/>
-          </a:prstGeom>
-          <a:noFill/>
-        </p:spPr>
-        <p:txBody>
-          <a:bodyPr wrap="square" anchor="t" lIns="0" rIns="0" tIns="0" bIns="0">
-            <a:spAutoFit/>
-          </a:bodyPr>
-          <a:lstStyle/>
-          <a:p>
-            <a:pPr algn="r">
-              <a:spcAft>
-                <a:spcPts val="450"/>
-              </a:spcAft>
-            </a:pPr>
-            <a:r>
-              <a:rPr sz="1000" b="0" i="0">
-                <a:solidFill>
-                  <a:srgbClr val="5D5A54"/>
-                </a:solidFill>
-                <a:latin typeface="Inter Tight"/>
-              </a:rPr>
-              <a:t>Beaver Counseling</a:t>
-            </a:r>
-          </a:p>
-        </p:txBody>
-      </p:sp>
-      <p:sp>
-        <p:nvSpPr>
-          <p:cNvPr id="5" name="TextBox 4"/>
-          <p:cNvSpPr txBox="1"/>
-          <p:nvPr/>
-        </p:nvSpPr>
-        <p:spPr>
-          <a:xfrm>
-            <a:off x="822960" y="2011680"/>
-            <a:ext cx="10515600" cy="1463040"/>
-          </a:xfrm>
-          <a:prstGeom prst="rect">
-            <a:avLst/>
-          </a:prstGeom>
-          <a:noFill/>
-        </p:spPr>
-        <p:txBody>
-          <a:bodyPr wrap="square" anchor="b" lIns="0" rIns="0" tIns="0" bIns="0">
-            <a:spAutoFit/>
-          </a:bodyPr>
-          <a:lstStyle/>
-          <a:p>
-            <a:pPr algn="l">
-              <a:spcAft>
-                <a:spcPts val="2700"/>
-              </a:spcAft>
-            </a:pPr>
-            <a:r>
-              <a:rPr sz="6000" b="1" i="0">
-                <a:solidFill>
-                  <a:srgbClr val="FFFFFF"/>
-                </a:solidFill>
-                <a:latin typeface="Source Serif 4"/>
-              </a:rPr>
-              <a:t>Dignity and Belonging</a:t>
-            </a:r>
-          </a:p>
-        </p:txBody>
-      </p:sp>
-      <p:sp>
-        <p:nvSpPr>
-          <p:cNvPr id="6" name="TextBox 5"/>
-          <p:cNvSpPr txBox="1"/>
-          <p:nvPr/>
-        </p:nvSpPr>
-        <p:spPr>
-          <a:xfrm>
-            <a:off x="822960" y="3611880"/>
-            <a:ext cx="10515600" cy="914400"/>
-          </a:xfrm>
-          <a:prstGeom prst="rect">
-            <a:avLst/>
-          </a:prstGeom>
-          <a:noFill/>
-        </p:spPr>
-        <p:txBody>
-          <a:bodyPr wrap="square" anchor="t" lIns="0" rIns="0" tIns="0" bIns="0">
-            <a:spAutoFit/>
-          </a:bodyPr>
-          <a:lstStyle/>
-          <a:p>
-            <a:pPr algn="l">
-              <a:spcAft>
-                <a:spcPts val="1080"/>
-              </a:spcAft>
-            </a:pPr>
-            <a:r>
-              <a:rPr sz="2400" b="0" i="1">
-                <a:solidFill>
-                  <a:srgbClr val="E8E4DA"/>
-                </a:solidFill>
-                <a:latin typeface="Source Serif 4"/>
-              </a:rPr>
-              <a:t>Everyone walks in with worth they didn't have to earn.</a:t>
-            </a:r>
-          </a:p>
-        </p:txBody>
-      </p:sp>
-      <p:sp>
-        <p:nvSpPr>
-          <p:cNvPr id="7" name="TextBox 6"/>
-          <p:cNvSpPr txBox="1"/>
-          <p:nvPr/>
-        </p:nvSpPr>
-        <p:spPr>
-          <a:xfrm>
-            <a:off x="822960" y="6035040"/>
-            <a:ext cx="7315200" cy="365760"/>
-          </a:xfrm>
-          <a:prstGeom prst="rect">
-            <a:avLst/>
-          </a:prstGeom>
-          <a:noFill/>
-        </p:spPr>
-        <p:txBody>
-          <a:bodyPr wrap="square" anchor="t" lIns="0" rIns="0" tIns="0" bIns="0">
-            <a:spAutoFit/>
-          </a:bodyPr>
-          <a:lstStyle/>
-          <a:p>
-            <a:pPr algn="l">
-              <a:spcAft>
-                <a:spcPts val="585"/>
-              </a:spcAft>
-            </a:pPr>
-            <a:r>
-              <a:rPr sz="1300" b="0" i="0">
-                <a:solidFill>
-                  <a:srgbClr val="E8E4DA"/>
-                </a:solidFill>
-                <a:latin typeface="Inter Tight"/>
-              </a:rPr>
-              <a:t>Beaver Upper School · Counseling</a:t>
+              <a:t>Eighth graders told researcher Brené Brown: belonging is being somewhere you want to be, where they want you.</a:t>
             </a:r>
           </a:p>
         </p:txBody>
@@ -7012,7 +7104,7 @@
                 </a:solidFill>
                 <a:latin typeface="Inter Tight"/>
               </a:rPr>
-              <a:t>TO START</a:t>
+              <a:t>SMALL MOMENTS</a:t>
             </a:r>
           </a:p>
         </p:txBody>
@@ -7058,58 +7150,14 @@
       </p:sp>
       <p:sp>
         <p:nvSpPr>
-          <p:cNvPr id="5" name="Rectangle 4"/>
-          <p:cNvSpPr/>
-          <p:nvPr/>
-        </p:nvSpPr>
-        <p:spPr>
-          <a:xfrm>
-            <a:off x="822960" y="1371600"/>
-            <a:ext cx="73152" cy="3566160"/>
-          </a:xfrm>
-          <a:prstGeom prst="rect">
-            <a:avLst/>
-          </a:prstGeom>
-          <a:solidFill>
-            <a:srgbClr val="F47B20"/>
-          </a:solidFill>
-          <a:ln>
-            <a:noFill/>
-          </a:ln>
-          <a:effectLst/>
-        </p:spPr>
-        <p:style>
-          <a:lnRef idx="1">
-            <a:schemeClr val="accent1"/>
-          </a:lnRef>
-          <a:fillRef idx="3">
-            <a:schemeClr val="accent1"/>
-          </a:fillRef>
-          <a:effectRef idx="2">
-            <a:schemeClr val="accent1"/>
-          </a:effectRef>
-          <a:fontRef idx="minor">
-            <a:schemeClr val="lt1"/>
-          </a:fontRef>
-        </p:style>
-        <p:txBody>
-          <a:bodyPr rtlCol="0" anchor="ctr"/>
-          <a:lstStyle/>
-          <a:p>
-            <a:pPr algn="ctr"/>
-          </a:p>
-        </p:txBody>
-      </p:sp>
-      <p:sp>
-        <p:nvSpPr>
-          <p:cNvPr id="6" name="TextBox 5"/>
+          <p:cNvPr id="5" name="TextBox 4"/>
           <p:cNvSpPr txBox="1"/>
           <p:nvPr/>
         </p:nvSpPr>
         <p:spPr>
           <a:xfrm>
-            <a:off x="1188720" y="1371600"/>
-            <a:ext cx="10058400" cy="3566160"/>
+            <a:off x="822960" y="1005840"/>
+            <a:ext cx="10515600" cy="1097280"/>
           </a:xfrm>
           <a:prstGeom prst="rect">
             <a:avLst/>
@@ -7117,38 +7165,38 @@
           <a:noFill/>
         </p:spPr>
         <p:txBody>
-          <a:bodyPr wrap="square" anchor="ctr" lIns="0" rIns="0" tIns="0" bIns="0">
+          <a:bodyPr wrap="square" anchor="t" lIns="0" rIns="0" tIns="0" bIns="0">
             <a:spAutoFit/>
           </a:bodyPr>
           <a:lstStyle/>
           <a:p>
             <a:pPr algn="l">
               <a:spcAft>
-                <a:spcPts val="1800"/>
-              </a:spcAft>
-            </a:pPr>
-            <a:r>
-              <a:rPr sz="4000" b="0" i="1">
+                <a:spcPts val="1620"/>
+              </a:spcAft>
+            </a:pPr>
+            <a:r>
+              <a:rPr sz="3600" b="1" i="0">
                 <a:solidFill>
                   <a:srgbClr val="1C1B19"/>
                 </a:solidFill>
                 <a:latin typeface="Source Serif 4"/>
               </a:rPr>
-              <a:t>Think of a place where you feel like you belong. What makes it that way?</a:t>
-            </a:r>
-          </a:p>
-        </p:txBody>
-      </p:sp>
-      <p:sp>
-        <p:nvSpPr>
-          <p:cNvPr id="7" name="TextBox 6"/>
+              <a:t>Builds it or breaks it?</a:t>
+            </a:r>
+          </a:p>
+        </p:txBody>
+      </p:sp>
+      <p:sp>
+        <p:nvSpPr>
+          <p:cNvPr id="6" name="TextBox 5"/>
           <p:cNvSpPr txBox="1"/>
           <p:nvPr/>
         </p:nvSpPr>
         <p:spPr>
           <a:xfrm>
-            <a:off x="1188720" y="5120640"/>
-            <a:ext cx="10058400" cy="914400"/>
+            <a:off x="822960" y="2057400"/>
+            <a:ext cx="548640" cy="804672"/>
           </a:xfrm>
           <a:prstGeom prst="rect">
             <a:avLst/>
@@ -7163,17 +7211,368 @@
           <a:p>
             <a:pPr algn="l">
               <a:spcAft>
-                <a:spcPts val="810"/>
-              </a:spcAft>
-            </a:pPr>
-            <a:r>
-              <a:rPr sz="1800" b="0" i="0">
-                <a:solidFill>
-                  <a:srgbClr val="5D5A54"/>
-                </a:solidFill>
-                <a:latin typeface="Inter Tight"/>
-              </a:rPr>
-              <a:t>A team, a family table, a group chat, a job, a corner of the library. Share the why, not the where.</a:t>
+                <a:spcPts val="1170"/>
+              </a:spcAft>
+            </a:pPr>
+            <a:r>
+              <a:rPr sz="2600" b="1" i="0">
+                <a:solidFill>
+                  <a:srgbClr val="F47B20"/>
+                </a:solidFill>
+                <a:latin typeface="Source Serif 4"/>
+              </a:rPr>
+              <a:t>1</a:t>
+            </a:r>
+          </a:p>
+        </p:txBody>
+      </p:sp>
+      <p:sp>
+        <p:nvSpPr>
+          <p:cNvPr id="7" name="TextBox 6"/>
+          <p:cNvSpPr txBox="1"/>
+          <p:nvPr/>
+        </p:nvSpPr>
+        <p:spPr>
+          <a:xfrm>
+            <a:off x="1463040" y="2093976"/>
+            <a:ext cx="9875520" cy="804672"/>
+          </a:xfrm>
+          <a:prstGeom prst="rect">
+            <a:avLst/>
+          </a:prstGeom>
+          <a:noFill/>
+        </p:spPr>
+        <p:txBody>
+          <a:bodyPr wrap="square" anchor="t" lIns="0" rIns="0" tIns="0" bIns="0">
+            <a:spAutoFit/>
+          </a:bodyPr>
+          <a:lstStyle/>
+          <a:p>
+            <a:pPr algn="l">
+              <a:spcAft>
+                <a:spcPts val="945"/>
+              </a:spcAft>
+            </a:pPr>
+            <a:r>
+              <a:rPr sz="2100" b="1" i="0">
+                <a:solidFill>
+                  <a:srgbClr val="1C1B19"/>
+                </a:solidFill>
+                <a:latin typeface="Source Serif 4"/>
+              </a:rPr>
+              <a:t>A name said right, or mangled and laughed off</a:t>
+            </a:r>
+          </a:p>
+        </p:txBody>
+      </p:sp>
+      <p:sp>
+        <p:nvSpPr>
+          <p:cNvPr id="8" name="TextBox 7"/>
+          <p:cNvSpPr txBox="1"/>
+          <p:nvPr/>
+        </p:nvSpPr>
+        <p:spPr>
+          <a:xfrm>
+            <a:off x="822960" y="2862072"/>
+            <a:ext cx="548640" cy="804672"/>
+          </a:xfrm>
+          <a:prstGeom prst="rect">
+            <a:avLst/>
+          </a:prstGeom>
+          <a:noFill/>
+        </p:spPr>
+        <p:txBody>
+          <a:bodyPr wrap="square" anchor="t" lIns="0" rIns="0" tIns="0" bIns="0">
+            <a:spAutoFit/>
+          </a:bodyPr>
+          <a:lstStyle/>
+          <a:p>
+            <a:pPr algn="l">
+              <a:spcAft>
+                <a:spcPts val="1170"/>
+              </a:spcAft>
+            </a:pPr>
+            <a:r>
+              <a:rPr sz="2600" b="1" i="0">
+                <a:solidFill>
+                  <a:srgbClr val="F47B20"/>
+                </a:solidFill>
+                <a:latin typeface="Source Serif 4"/>
+              </a:rPr>
+              <a:t>2</a:t>
+            </a:r>
+          </a:p>
+        </p:txBody>
+      </p:sp>
+      <p:sp>
+        <p:nvSpPr>
+          <p:cNvPr id="9" name="TextBox 8"/>
+          <p:cNvSpPr txBox="1"/>
+          <p:nvPr/>
+        </p:nvSpPr>
+        <p:spPr>
+          <a:xfrm>
+            <a:off x="1463040" y="2898648"/>
+            <a:ext cx="9875520" cy="804672"/>
+          </a:xfrm>
+          <a:prstGeom prst="rect">
+            <a:avLst/>
+          </a:prstGeom>
+          <a:noFill/>
+        </p:spPr>
+        <p:txBody>
+          <a:bodyPr wrap="square" anchor="t" lIns="0" rIns="0" tIns="0" bIns="0">
+            <a:spAutoFit/>
+          </a:bodyPr>
+          <a:lstStyle/>
+          <a:p>
+            <a:pPr algn="l">
+              <a:spcAft>
+                <a:spcPts val="945"/>
+              </a:spcAft>
+            </a:pPr>
+            <a:r>
+              <a:rPr sz="2100" b="1" i="0">
+                <a:solidFill>
+                  <a:srgbClr val="1C1B19"/>
+                </a:solidFill>
+                <a:latin typeface="Source Serif 4"/>
+              </a:rPr>
+              <a:t>Saving a seat, or a back turned</a:t>
+            </a:r>
+          </a:p>
+        </p:txBody>
+      </p:sp>
+      <p:sp>
+        <p:nvSpPr>
+          <p:cNvPr id="10" name="TextBox 9"/>
+          <p:cNvSpPr txBox="1"/>
+          <p:nvPr/>
+        </p:nvSpPr>
+        <p:spPr>
+          <a:xfrm>
+            <a:off x="822960" y="3666744"/>
+            <a:ext cx="548640" cy="804672"/>
+          </a:xfrm>
+          <a:prstGeom prst="rect">
+            <a:avLst/>
+          </a:prstGeom>
+          <a:noFill/>
+        </p:spPr>
+        <p:txBody>
+          <a:bodyPr wrap="square" anchor="t" lIns="0" rIns="0" tIns="0" bIns="0">
+            <a:spAutoFit/>
+          </a:bodyPr>
+          <a:lstStyle/>
+          <a:p>
+            <a:pPr algn="l">
+              <a:spcAft>
+                <a:spcPts val="1170"/>
+              </a:spcAft>
+            </a:pPr>
+            <a:r>
+              <a:rPr sz="2600" b="1" i="0">
+                <a:solidFill>
+                  <a:srgbClr val="F47B20"/>
+                </a:solidFill>
+                <a:latin typeface="Source Serif 4"/>
+              </a:rPr>
+              <a:t>3</a:t>
+            </a:r>
+          </a:p>
+        </p:txBody>
+      </p:sp>
+      <p:sp>
+        <p:nvSpPr>
+          <p:cNvPr id="11" name="TextBox 10"/>
+          <p:cNvSpPr txBox="1"/>
+          <p:nvPr/>
+        </p:nvSpPr>
+        <p:spPr>
+          <a:xfrm>
+            <a:off x="1463040" y="3703320"/>
+            <a:ext cx="9875520" cy="804672"/>
+          </a:xfrm>
+          <a:prstGeom prst="rect">
+            <a:avLst/>
+          </a:prstGeom>
+          <a:noFill/>
+        </p:spPr>
+        <p:txBody>
+          <a:bodyPr wrap="square" anchor="t" lIns="0" rIns="0" tIns="0" bIns="0">
+            <a:spAutoFit/>
+          </a:bodyPr>
+          <a:lstStyle/>
+          <a:p>
+            <a:pPr algn="l">
+              <a:spcAft>
+                <a:spcPts val="945"/>
+              </a:spcAft>
+            </a:pPr>
+            <a:r>
+              <a:rPr sz="2100" b="1" i="0">
+                <a:solidFill>
+                  <a:srgbClr val="1C1B19"/>
+                </a:solidFill>
+                <a:latin typeface="Source Serif 4"/>
+              </a:rPr>
+              <a:t>"Want to join?", or a group chat nobody mentions</a:t>
+            </a:r>
+          </a:p>
+        </p:txBody>
+      </p:sp>
+      <p:sp>
+        <p:nvSpPr>
+          <p:cNvPr id="12" name="TextBox 11"/>
+          <p:cNvSpPr txBox="1"/>
+          <p:nvPr/>
+        </p:nvSpPr>
+        <p:spPr>
+          <a:xfrm>
+            <a:off x="822960" y="4471416"/>
+            <a:ext cx="548640" cy="804672"/>
+          </a:xfrm>
+          <a:prstGeom prst="rect">
+            <a:avLst/>
+          </a:prstGeom>
+          <a:noFill/>
+        </p:spPr>
+        <p:txBody>
+          <a:bodyPr wrap="square" anchor="t" lIns="0" rIns="0" tIns="0" bIns="0">
+            <a:spAutoFit/>
+          </a:bodyPr>
+          <a:lstStyle/>
+          <a:p>
+            <a:pPr algn="l">
+              <a:spcAft>
+                <a:spcPts val="1170"/>
+              </a:spcAft>
+            </a:pPr>
+            <a:r>
+              <a:rPr sz="2600" b="1" i="0">
+                <a:solidFill>
+                  <a:srgbClr val="F47B20"/>
+                </a:solidFill>
+                <a:latin typeface="Source Serif 4"/>
+              </a:rPr>
+              <a:t>4</a:t>
+            </a:r>
+          </a:p>
+        </p:txBody>
+      </p:sp>
+      <p:sp>
+        <p:nvSpPr>
+          <p:cNvPr id="13" name="TextBox 12"/>
+          <p:cNvSpPr txBox="1"/>
+          <p:nvPr/>
+        </p:nvSpPr>
+        <p:spPr>
+          <a:xfrm>
+            <a:off x="1463040" y="4507992"/>
+            <a:ext cx="9875520" cy="804672"/>
+          </a:xfrm>
+          <a:prstGeom prst="rect">
+            <a:avLst/>
+          </a:prstGeom>
+          <a:noFill/>
+        </p:spPr>
+        <p:txBody>
+          <a:bodyPr wrap="square" anchor="t" lIns="0" rIns="0" tIns="0" bIns="0">
+            <a:spAutoFit/>
+          </a:bodyPr>
+          <a:lstStyle/>
+          <a:p>
+            <a:pPr algn="l">
+              <a:spcAft>
+                <a:spcPts val="945"/>
+              </a:spcAft>
+            </a:pPr>
+            <a:r>
+              <a:rPr sz="2100" b="1" i="0">
+                <a:solidFill>
+                  <a:srgbClr val="1C1B19"/>
+                </a:solidFill>
+                <a:latin typeface="Source Serif 4"/>
+              </a:rPr>
+              <a:t>A joke about someone's identity</a:t>
+            </a:r>
+          </a:p>
+        </p:txBody>
+      </p:sp>
+      <p:sp>
+        <p:nvSpPr>
+          <p:cNvPr id="14" name="TextBox 13"/>
+          <p:cNvSpPr txBox="1"/>
+          <p:nvPr/>
+        </p:nvSpPr>
+        <p:spPr>
+          <a:xfrm>
+            <a:off x="822960" y="5276088"/>
+            <a:ext cx="548640" cy="804672"/>
+          </a:xfrm>
+          <a:prstGeom prst="rect">
+            <a:avLst/>
+          </a:prstGeom>
+          <a:noFill/>
+        </p:spPr>
+        <p:txBody>
+          <a:bodyPr wrap="square" anchor="t" lIns="0" rIns="0" tIns="0" bIns="0">
+            <a:spAutoFit/>
+          </a:bodyPr>
+          <a:lstStyle/>
+          <a:p>
+            <a:pPr algn="l">
+              <a:spcAft>
+                <a:spcPts val="1170"/>
+              </a:spcAft>
+            </a:pPr>
+            <a:r>
+              <a:rPr sz="2600" b="1" i="0">
+                <a:solidFill>
+                  <a:srgbClr val="F47B20"/>
+                </a:solidFill>
+                <a:latin typeface="Source Serif 4"/>
+              </a:rPr>
+              <a:t>5</a:t>
+            </a:r>
+          </a:p>
+        </p:txBody>
+      </p:sp>
+      <p:sp>
+        <p:nvSpPr>
+          <p:cNvPr id="15" name="TextBox 14"/>
+          <p:cNvSpPr txBox="1"/>
+          <p:nvPr/>
+        </p:nvSpPr>
+        <p:spPr>
+          <a:xfrm>
+            <a:off x="1463040" y="5312664"/>
+            <a:ext cx="9875520" cy="804672"/>
+          </a:xfrm>
+          <a:prstGeom prst="rect">
+            <a:avLst/>
+          </a:prstGeom>
+          <a:noFill/>
+        </p:spPr>
+        <p:txBody>
+          <a:bodyPr wrap="square" anchor="t" lIns="0" rIns="0" tIns="0" bIns="0">
+            <a:spAutoFit/>
+          </a:bodyPr>
+          <a:lstStyle/>
+          <a:p>
+            <a:pPr algn="l">
+              <a:spcAft>
+                <a:spcPts val="945"/>
+              </a:spcAft>
+            </a:pPr>
+            <a:r>
+              <a:rPr sz="2100" b="1" i="0">
+                <a:solidFill>
+                  <a:srgbClr val="1C1B19"/>
+                </a:solidFill>
+                <a:latin typeface="Source Serif 4"/>
+              </a:rPr>
+              <a:t>"I got that wrong. I'm sorry."</a:t>
             </a:r>
           </a:p>
         </p:txBody>
@@ -7282,7 +7681,7 @@
                 </a:solidFill>
                 <a:latin typeface="Inter Tight"/>
               </a:rPr>
-              <a:t>TWO WORDS</a:t>
+              <a:t>WHY IT MATTERS</a:t>
             </a:r>
           </a:p>
         </p:txBody>
@@ -7334,8 +7733,8 @@
         </p:nvSpPr>
         <p:spPr>
           <a:xfrm>
-            <a:off x="822960" y="1005840"/>
-            <a:ext cx="10515600" cy="914400"/>
+            <a:off x="822960" y="914400"/>
+            <a:ext cx="10515600" cy="365760"/>
           </a:xfrm>
           <a:prstGeom prst="rect">
             <a:avLst/>
@@ -7350,42 +7749,166 @@
           <a:p>
             <a:pPr algn="l">
               <a:spcAft>
-                <a:spcPts val="1530"/>
-              </a:spcAft>
-            </a:pPr>
-            <a:r>
-              <a:rPr sz="3400" b="1" i="0">
+                <a:spcPts val="630"/>
+              </a:spcAft>
+            </a:pPr>
+            <a:r>
+              <a:rPr sz="1400" b="1" i="0">
+                <a:solidFill>
+                  <a:srgbClr val="0B2D5B"/>
+                </a:solidFill>
+                <a:latin typeface="Inter Tight"/>
+              </a:rPr>
+              <a:t>Walton &amp; Cohen, 2011  ·  Allen et al., 2018</a:t>
+            </a:r>
+          </a:p>
+        </p:txBody>
+      </p:sp>
+      <p:sp>
+        <p:nvSpPr>
+          <p:cNvPr id="6" name="TextBox 5"/>
+          <p:cNvSpPr txBox="1"/>
+          <p:nvPr/>
+        </p:nvSpPr>
+        <p:spPr>
+          <a:xfrm>
+            <a:off x="822960" y="1325880"/>
+            <a:ext cx="10515600" cy="1097280"/>
+          </a:xfrm>
+          <a:prstGeom prst="rect">
+            <a:avLst/>
+          </a:prstGeom>
+          <a:noFill/>
+        </p:spPr>
+        <p:txBody>
+          <a:bodyPr wrap="square" anchor="t" lIns="0" rIns="0" tIns="0" bIns="0">
+            <a:spAutoFit/>
+          </a:bodyPr>
+          <a:lstStyle/>
+          <a:p>
+            <a:pPr algn="l">
+              <a:spcAft>
+                <a:spcPts val="1440"/>
+              </a:spcAft>
+            </a:pPr>
+            <a:r>
+              <a:rPr sz="3200" b="1" i="0">
                 <a:solidFill>
                   <a:srgbClr val="1C1B19"/>
                 </a:solidFill>
                 <a:latin typeface="Source Serif 4"/>
               </a:rPr>
-              <a:t>Dignity and respect aren't the same.</a:t>
-            </a:r>
-          </a:p>
-        </p:txBody>
-      </p:sp>
-      <p:sp>
-        <p:nvSpPr>
-          <p:cNvPr id="6" name="Rectangle 5"/>
+              <a:t>Belonging changes how students do.</a:t>
+            </a:r>
+          </a:p>
+        </p:txBody>
+      </p:sp>
+      <p:sp>
+        <p:nvSpPr>
+          <p:cNvPr id="7" name="TextBox 6"/>
+          <p:cNvSpPr txBox="1"/>
+          <p:nvPr/>
+        </p:nvSpPr>
+        <p:spPr>
+          <a:xfrm>
+            <a:off x="822960" y="2514600"/>
+            <a:ext cx="10515600" cy="2194560"/>
+          </a:xfrm>
+          <a:prstGeom prst="rect">
+            <a:avLst/>
+          </a:prstGeom>
+          <a:noFill/>
+        </p:spPr>
+        <p:txBody>
+          <a:bodyPr wrap="square" anchor="t" lIns="0" rIns="0" tIns="0" bIns="0">
+            <a:spAutoFit/>
+          </a:bodyPr>
+          <a:lstStyle/>
+          <a:p>
+            <a:pPr algn="l">
+              <a:spcAft>
+                <a:spcPts val="855"/>
+              </a:spcAft>
+            </a:pPr>
+            <a:r>
+              <a:rPr sz="1900" b="0" i="0">
+                <a:solidFill>
+                  <a:srgbClr val="1C1B19"/>
+                </a:solidFill>
+                <a:latin typeface="Source Serif 4"/>
+              </a:rPr>
+              <a:t>•  One hour on belonging for first-year college students.</a:t>
+            </a:r>
+          </a:p>
+          <a:p>
+            <a:pPr algn="l">
+              <a:spcAft>
+                <a:spcPts val="855"/>
+              </a:spcAft>
+            </a:pPr>
+            <a:r>
+              <a:rPr sz="1900" b="0" i="0">
+                <a:solidFill>
+                  <a:srgbClr val="1C1B19"/>
+                </a:solidFill>
+                <a:latin typeface="Source Serif 4"/>
+              </a:rPr>
+              <a:t>•  Three years later: higher grades for Black students, and better health.</a:t>
+            </a:r>
+          </a:p>
+          <a:p>
+            <a:pPr algn="l">
+              <a:spcAft>
+                <a:spcPts val="855"/>
+              </a:spcAft>
+            </a:pPr>
+            <a:r>
+              <a:rPr sz="1900" b="0" i="0">
+                <a:solidFill>
+                  <a:srgbClr val="1C1B19"/>
+                </a:solidFill>
+                <a:latin typeface="Source Serif 4"/>
+              </a:rPr>
+              <a:t>•  The achievement gap was cut in half.</a:t>
+            </a:r>
+          </a:p>
+          <a:p>
+            <a:pPr algn="l">
+              <a:spcAft>
+                <a:spcPts val="855"/>
+              </a:spcAft>
+            </a:pPr>
+            <a:r>
+              <a:rPr sz="1900" b="0" i="0">
+                <a:solidFill>
+                  <a:srgbClr val="1C1B19"/>
+                </a:solidFill>
+                <a:latin typeface="Source Serif 4"/>
+              </a:rPr>
+              <a:t>•  Teacher support is one of the biggest builders of belonging.</a:t>
+            </a:r>
+          </a:p>
+        </p:txBody>
+      </p:sp>
+      <p:sp>
+        <p:nvSpPr>
+          <p:cNvPr id="8" name="Rectangle 7"/>
           <p:cNvSpPr/>
           <p:nvPr/>
         </p:nvSpPr>
         <p:spPr>
           <a:xfrm>
-            <a:off x="822960" y="2103120"/>
-            <a:ext cx="5120640" cy="3931920"/>
+            <a:off x="822960" y="4892040"/>
+            <a:ext cx="73152" cy="1097280"/>
           </a:xfrm>
           <a:prstGeom prst="rect">
             <a:avLst/>
           </a:prstGeom>
           <a:solidFill>
-            <a:srgbClr val="FFFFFF"/>
+            <a:srgbClr val="F47B20"/>
           </a:solidFill>
-          <a:ln w="15875">
-            <a:solidFill>
-              <a:srgbClr val="D8D2C6"/>
-            </a:solidFill>
+          <a:ln>
+            <a:noFill/>
           </a:ln>
           <a:effectLst/>
         </p:spPr>
@@ -7413,14 +7936,14 @@
       </p:sp>
       <p:sp>
         <p:nvSpPr>
-          <p:cNvPr id="7" name="TextBox 6"/>
+          <p:cNvPr id="9" name="TextBox 8"/>
           <p:cNvSpPr txBox="1"/>
           <p:nvPr/>
         </p:nvSpPr>
         <p:spPr>
           <a:xfrm>
-            <a:off x="1097280" y="2286000"/>
-            <a:ext cx="4572000" cy="457200"/>
+            <a:off x="1097280" y="4892040"/>
+            <a:ext cx="10241280" cy="1188720"/>
           </a:xfrm>
           <a:prstGeom prst="rect">
             <a:avLst/>
@@ -7435,42 +7958,19 @@
           <a:p>
             <a:pPr algn="l">
               <a:spcAft>
-                <a:spcPts val="585"/>
-              </a:spcAft>
-            </a:pPr>
-            <a:r>
-              <a:rPr sz="1300" b="1" i="0">
-                <a:solidFill>
-                  <a:srgbClr val="0B2D5B"/>
+                <a:spcPts val="855"/>
+              </a:spcAft>
+            </a:pPr>
+            <a:r>
+              <a:rPr sz="1200" b="1" i="0">
+                <a:solidFill>
+                  <a:srgbClr val="F47B20"/>
                 </a:solidFill>
                 <a:latin typeface="Inter Tight"/>
               </a:rPr>
-              <a:t>DIGNITY</a:t>
-            </a:r>
-          </a:p>
-        </p:txBody>
-      </p:sp>
-      <p:sp>
-        <p:nvSpPr>
-          <p:cNvPr id="8" name="TextBox 7"/>
-          <p:cNvSpPr txBox="1"/>
-          <p:nvPr/>
-        </p:nvSpPr>
-        <p:spPr>
-          <a:xfrm>
-            <a:off x="1097280" y="2788920"/>
-            <a:ext cx="4572000" cy="3108960"/>
-          </a:xfrm>
-          <a:prstGeom prst="rect">
-            <a:avLst/>
-          </a:prstGeom>
-          <a:noFill/>
-        </p:spPr>
-        <p:txBody>
-          <a:bodyPr wrap="square" anchor="t" lIns="0" rIns="0" tIns="0" bIns="0">
-            <a:spAutoFit/>
-          </a:bodyPr>
-          <a:lstStyle/>
+              <a:t>IN CLASS</a:t>
+            </a:r>
+          </a:p>
           <a:p>
             <a:pPr algn="l">
               <a:spcAft>
@@ -7484,227 +7984,7 @@
                 </a:solidFill>
                 <a:latin typeface="Source Serif 4"/>
               </a:rPr>
-              <a:t>Everyone has it</a:t>
-            </a:r>
-          </a:p>
-          <a:p>
-            <a:pPr algn="l">
-              <a:spcAft>
-                <a:spcPts val="855"/>
-              </a:spcAft>
-            </a:pPr>
-            <a:r>
-              <a:rPr sz="1900" b="0" i="0">
-                <a:solidFill>
-                  <a:srgbClr val="1C1B19"/>
-                </a:solidFill>
-                <a:latin typeface="Source Serif 4"/>
-              </a:rPr>
-              <a:t>You don't earn it</a:t>
-            </a:r>
-          </a:p>
-          <a:p>
-            <a:pPr algn="l">
-              <a:spcAft>
-                <a:spcPts val="855"/>
-              </a:spcAft>
-            </a:pPr>
-            <a:r>
-              <a:rPr sz="1900" b="0" i="0">
-                <a:solidFill>
-                  <a:srgbClr val="1C1B19"/>
-                </a:solidFill>
-                <a:latin typeface="Source Serif 4"/>
-              </a:rPr>
-              <a:t>Nobody can take it away</a:t>
-            </a:r>
-          </a:p>
-          <a:p>
-            <a:pPr algn="l">
-              <a:spcAft>
-                <a:spcPts val="855"/>
-              </a:spcAft>
-            </a:pPr>
-            <a:r>
-              <a:rPr sz="1900" b="0" i="0">
-                <a:solidFill>
-                  <a:srgbClr val="1C1B19"/>
-                </a:solidFill>
-                <a:latin typeface="Source Serif 4"/>
-              </a:rPr>
-              <a:t>"You matter because you're a person"</a:t>
-            </a:r>
-          </a:p>
-        </p:txBody>
-      </p:sp>
-      <p:sp>
-        <p:nvSpPr>
-          <p:cNvPr id="9" name="Rectangle 8"/>
-          <p:cNvSpPr/>
-          <p:nvPr/>
-        </p:nvSpPr>
-        <p:spPr>
-          <a:xfrm>
-            <a:off x="6309360" y="2103120"/>
-            <a:ext cx="5120640" cy="3931920"/>
-          </a:xfrm>
-          <a:prstGeom prst="rect">
-            <a:avLst/>
-          </a:prstGeom>
-          <a:solidFill>
-            <a:srgbClr val="FFFFFF"/>
-          </a:solidFill>
-          <a:ln w="15875">
-            <a:solidFill>
-              <a:srgbClr val="D8D2C6"/>
-            </a:solidFill>
-          </a:ln>
-          <a:effectLst/>
-        </p:spPr>
-        <p:style>
-          <a:lnRef idx="1">
-            <a:schemeClr val="accent1"/>
-          </a:lnRef>
-          <a:fillRef idx="3">
-            <a:schemeClr val="accent1"/>
-          </a:fillRef>
-          <a:effectRef idx="2">
-            <a:schemeClr val="accent1"/>
-          </a:effectRef>
-          <a:fontRef idx="minor">
-            <a:schemeClr val="lt1"/>
-          </a:fontRef>
-        </p:style>
-        <p:txBody>
-          <a:bodyPr rtlCol="0" anchor="ctr"/>
-          <a:lstStyle/>
-          <a:p>
-            <a:pPr algn="ctr"/>
-          </a:p>
-        </p:txBody>
-      </p:sp>
-      <p:sp>
-        <p:nvSpPr>
-          <p:cNvPr id="10" name="TextBox 9"/>
-          <p:cNvSpPr txBox="1"/>
-          <p:nvPr/>
-        </p:nvSpPr>
-        <p:spPr>
-          <a:xfrm>
-            <a:off x="6583680" y="2286000"/>
-            <a:ext cx="4572000" cy="457200"/>
-          </a:xfrm>
-          <a:prstGeom prst="rect">
-            <a:avLst/>
-          </a:prstGeom>
-          <a:noFill/>
-        </p:spPr>
-        <p:txBody>
-          <a:bodyPr wrap="square" anchor="t" lIns="0" rIns="0" tIns="0" bIns="0">
-            <a:spAutoFit/>
-          </a:bodyPr>
-          <a:lstStyle/>
-          <a:p>
-            <a:pPr algn="l">
-              <a:spcAft>
-                <a:spcPts val="585"/>
-              </a:spcAft>
-            </a:pPr>
-            <a:r>
-              <a:rPr sz="1300" b="1" i="0">
-                <a:solidFill>
-                  <a:srgbClr val="0B2D5B"/>
-                </a:solidFill>
-                <a:latin typeface="Inter Tight"/>
-              </a:rPr>
-              <a:t>RESPECT</a:t>
-            </a:r>
-          </a:p>
-        </p:txBody>
-      </p:sp>
-      <p:sp>
-        <p:nvSpPr>
-          <p:cNvPr id="11" name="TextBox 10"/>
-          <p:cNvSpPr txBox="1"/>
-          <p:nvPr/>
-        </p:nvSpPr>
-        <p:spPr>
-          <a:xfrm>
-            <a:off x="6583680" y="2788920"/>
-            <a:ext cx="4572000" cy="3108960"/>
-          </a:xfrm>
-          <a:prstGeom prst="rect">
-            <a:avLst/>
-          </a:prstGeom>
-          <a:noFill/>
-        </p:spPr>
-        <p:txBody>
-          <a:bodyPr wrap="square" anchor="t" lIns="0" rIns="0" tIns="0" bIns="0">
-            <a:spAutoFit/>
-          </a:bodyPr>
-          <a:lstStyle/>
-          <a:p>
-            <a:pPr algn="l">
-              <a:spcAft>
-                <a:spcPts val="855"/>
-              </a:spcAft>
-            </a:pPr>
-            <a:r>
-              <a:rPr sz="1900" b="0" i="0">
-                <a:solidFill>
-                  <a:srgbClr val="1C1B19"/>
-                </a:solidFill>
-                <a:latin typeface="Source Serif 4"/>
-              </a:rPr>
-              <a:t>Earned by what you do</a:t>
-            </a:r>
-          </a:p>
-          <a:p>
-            <a:pPr algn="l">
-              <a:spcAft>
-                <a:spcPts val="855"/>
-              </a:spcAft>
-            </a:pPr>
-            <a:r>
-              <a:rPr sz="1900" b="0" i="0">
-                <a:solidFill>
-                  <a:srgbClr val="1C1B19"/>
-                </a:solidFill>
-                <a:latin typeface="Source Serif 4"/>
-              </a:rPr>
-              <a:t>Can grow or shrink</a:t>
-            </a:r>
-          </a:p>
-          <a:p>
-            <a:pPr algn="l">
-              <a:spcAft>
-                <a:spcPts val="855"/>
-              </a:spcAft>
-            </a:pPr>
-            <a:r>
-              <a:rPr sz="1900" b="0" i="0">
-                <a:solidFill>
-                  <a:srgbClr val="1C1B19"/>
-                </a:solidFill>
-                <a:latin typeface="Source Serif 4"/>
-              </a:rPr>
-              <a:t>You choose who gets it</a:t>
-            </a:r>
-          </a:p>
-          <a:p>
-            <a:pPr algn="l">
-              <a:spcAft>
-                <a:spcPts val="855"/>
-              </a:spcAft>
-            </a:pPr>
-            <a:r>
-              <a:rPr sz="1900" b="0" i="0">
-                <a:solidFill>
-                  <a:srgbClr val="1C1B19"/>
-                </a:solidFill>
-                <a:latin typeface="Source Serif 4"/>
-              </a:rPr>
-              <a:t>"I respect how you handled that"</a:t>
+              <a:t>Belonging isn't extra. It's part of how people learn.</a:t>
             </a:r>
           </a:p>
         </p:txBody>
@@ -7813,7 +8093,7 @@
                 </a:solidFill>
                 <a:latin typeface="Inter Tight"/>
               </a:rPr>
-              <a:t>FITTING IN</a:t>
+              <a:t>BEFORE YOU GO</a:t>
             </a:r>
           </a:p>
         </p:txBody>
@@ -7865,8 +8145,8 @@
         </p:nvSpPr>
         <p:spPr>
           <a:xfrm>
-            <a:off x="822960" y="1463040"/>
-            <a:ext cx="10515600" cy="3291840"/>
+            <a:off x="822960" y="1188720"/>
+            <a:ext cx="10515600" cy="914400"/>
           </a:xfrm>
           <a:prstGeom prst="rect">
             <a:avLst/>
@@ -7874,24 +8154,24 @@
           <a:noFill/>
         </p:spPr>
         <p:txBody>
-          <a:bodyPr wrap="square" anchor="ctr" lIns="0" rIns="0" tIns="0" bIns="0">
+          <a:bodyPr wrap="square" anchor="t" lIns="0" rIns="0" tIns="0" bIns="0">
             <a:spAutoFit/>
           </a:bodyPr>
           <a:lstStyle/>
           <a:p>
             <a:pPr algn="l">
               <a:spcAft>
-                <a:spcPts val="2070"/>
-              </a:spcAft>
-            </a:pPr>
-            <a:r>
-              <a:rPr sz="4600" b="1" i="0">
+                <a:spcPts val="1620"/>
+              </a:spcAft>
+            </a:pPr>
+            <a:r>
+              <a:rPr sz="3600" b="1" i="0">
                 <a:solidFill>
                   <a:srgbClr val="1C1B19"/>
                 </a:solidFill>
                 <a:latin typeface="Source Serif 4"/>
               </a:rPr>
-              <a:t>Fitting in: changing yourself so they'll accept you. Belonging: being accepted as you are.</a:t>
+              <a:t>Widen the circle once this week.</a:t>
             </a:r>
           </a:p>
         </p:txBody>
@@ -7904,8 +8184,8 @@
         </p:nvSpPr>
         <p:spPr>
           <a:xfrm>
-            <a:off x="822960" y="4846320"/>
-            <a:ext cx="10515600" cy="1097280"/>
+            <a:off x="822960" y="2286000"/>
+            <a:ext cx="10515600" cy="1463040"/>
           </a:xfrm>
           <a:prstGeom prst="rect">
             <a:avLst/>
@@ -7920,66 +8200,42 @@
           <a:p>
             <a:pPr algn="l">
               <a:spcAft>
-                <a:spcPts val="990"/>
-              </a:spcAft>
-            </a:pPr>
-            <a:r>
-              <a:rPr sz="2200" b="0" i="1">
-                <a:solidFill>
-                  <a:srgbClr val="5D5A54"/>
+                <a:spcPts val="1080"/>
+              </a:spcAft>
+            </a:pPr>
+            <a:r>
+              <a:rPr sz="2400" b="0" i="0">
+                <a:solidFill>
+                  <a:srgbClr val="1C1B19"/>
                 </a:solidFill>
                 <a:latin typeface="Source Serif 4"/>
               </a:rPr>
-              <a:t>Eighth graders told researcher Brené Brown: belonging is being somewhere you want to be, where they want you.</a:t>
-            </a:r>
-          </a:p>
-        </p:txBody>
-      </p:sp>
-    </p:spTree>
-  </p:cSld>
-  <p:clrMapOvr>
-    <a:masterClrMapping/>
-  </p:clrMapOvr>
-</p:sld>
-</file>
-
-<file path=ppt/slides/slide9.xml><?xml version="1.0" encoding="utf-8"?>
-<p:sld xmlns:a="http://schemas.openxmlformats.org/drawingml/2006/main" xmlns:p="http://schemas.openxmlformats.org/presentationml/2006/main" xmlns:r="http://schemas.openxmlformats.org/officeDocument/2006/relationships">
-  <p:cSld>
-    <p:bg>
-      <p:bgPr>
-        <a:solidFill>
-          <a:srgbClr val="F7F4EE"/>
-        </a:solidFill>
-        <a:effectLst/>
-      </p:bgPr>
-    </p:bg>
-    <p:spTree>
-      <p:nvGrpSpPr>
-        <p:cNvPr id="1" name=""/>
-        <p:cNvGrpSpPr/>
-        <p:nvPr/>
-      </p:nvGrpSpPr>
-      <p:grpSpPr/>
-      <p:sp>
-        <p:nvSpPr>
-          <p:cNvPr id="2" name="Rectangle 1"/>
+              <a:t>One person, one time. Write it on your card and keep it.</a:t>
+            </a:r>
+          </a:p>
+        </p:txBody>
+      </p:sp>
+      <p:sp>
+        <p:nvSpPr>
+          <p:cNvPr id="7" name="Rectangle 6"/>
           <p:cNvSpPr/>
           <p:nvPr/>
         </p:nvSpPr>
         <p:spPr>
           <a:xfrm>
-            <a:off x="548640" y="502920"/>
-            <a:ext cx="457200" cy="54864"/>
+            <a:off x="822960" y="4023360"/>
+            <a:ext cx="10515600" cy="1371600"/>
           </a:xfrm>
           <a:prstGeom prst="rect">
             <a:avLst/>
           </a:prstGeom>
           <a:solidFill>
-            <a:srgbClr val="F47B20"/>
+            <a:srgbClr val="FFFFFF"/>
           </a:solidFill>
-          <a:ln>
-            <a:noFill/>
+          <a:ln w="15875">
+            <a:solidFill>
+              <a:srgbClr val="1C1B19"/>
+            </a:solidFill>
           </a:ln>
           <a:effectLst/>
         </p:spPr>
@@ -8007,14 +8263,14 @@
       </p:sp>
       <p:sp>
         <p:nvSpPr>
-          <p:cNvPr id="3" name="TextBox 2"/>
+          <p:cNvPr id="8" name="TextBox 7"/>
           <p:cNvSpPr txBox="1"/>
           <p:nvPr/>
         </p:nvSpPr>
         <p:spPr>
           <a:xfrm>
-            <a:off x="1143000" y="393192"/>
-            <a:ext cx="8229600" cy="274320"/>
+            <a:off x="1097280" y="4206240"/>
+            <a:ext cx="10058400" cy="365760"/>
           </a:xfrm>
           <a:prstGeom prst="rect">
             <a:avLst/>
@@ -8035,25 +8291,25 @@
             <a:r>
               <a:rPr sz="1200" b="1" i="0">
                 <a:solidFill>
-                  <a:srgbClr val="5D5A54"/>
+                  <a:srgbClr val="0B2D5B"/>
                 </a:solidFill>
                 <a:latin typeface="Inter Tight"/>
               </a:rPr>
-              <a:t>SMALL MOMENTS</a:t>
-            </a:r>
-          </a:p>
-        </p:txBody>
-      </p:sp>
-      <p:sp>
-        <p:nvSpPr>
-          <p:cNvPr id="4" name="TextBox 3"/>
+              <a:t>STUDENT PAGE</a:t>
+            </a:r>
+          </a:p>
+        </p:txBody>
+      </p:sp>
+      <p:sp>
+        <p:nvSpPr>
+          <p:cNvPr id="9" name="TextBox 8"/>
           <p:cNvSpPr txBox="1"/>
           <p:nvPr/>
         </p:nvSpPr>
         <p:spPr>
           <a:xfrm>
-            <a:off x="8229600" y="6400800"/>
-            <a:ext cx="3410712" cy="274320"/>
+            <a:off x="1097280" y="4617720"/>
+            <a:ext cx="10058400" cy="640080"/>
           </a:xfrm>
           <a:prstGeom prst="rect">
             <a:avLst/>
@@ -8066,33 +8322,103 @@
           </a:bodyPr>
           <a:lstStyle/>
           <a:p>
-            <a:pPr algn="r">
-              <a:spcAft>
-                <a:spcPts val="450"/>
-              </a:spcAft>
-            </a:pPr>
-            <a:r>
-              <a:rPr sz="1000" b="0" i="0">
-                <a:solidFill>
-                  <a:srgbClr val="5D5A54"/>
+            <a:pPr algn="l">
+              <a:spcAft>
+                <a:spcPts val="900"/>
+              </a:spcAft>
+            </a:pPr>
+            <a:r>
+              <a:rPr sz="2000" b="0" i="0">
+                <a:solidFill>
+                  <a:srgbClr val="1C1B19"/>
                 </a:solidFill>
                 <a:latin typeface="Inter Tight"/>
               </a:rPr>
-              <a:t>Beaver Counseling</a:t>
-            </a:r>
-          </a:p>
-        </p:txBody>
-      </p:sp>
-      <p:sp>
-        <p:nvSpPr>
-          <p:cNvPr id="5" name="TextBox 4"/>
+              <a:t>https://rmwtoolkit.github.io/bcds-toolkit/dignity-and-belonging-high-school.html</a:t>
+            </a:r>
+          </a:p>
+        </p:txBody>
+      </p:sp>
+    </p:spTree>
+  </p:cSld>
+  <p:clrMapOvr>
+    <a:masterClrMapping/>
+  </p:clrMapOvr>
+</p:sld>
+</file>
+
+<file path=ppt/slides/slide9.xml><?xml version="1.0" encoding="utf-8"?>
+<p:sld xmlns:a="http://schemas.openxmlformats.org/drawingml/2006/main" xmlns:p="http://schemas.openxmlformats.org/presentationml/2006/main" xmlns:r="http://schemas.openxmlformats.org/officeDocument/2006/relationships" show="0">
+  <p:cSld>
+    <p:bg>
+      <p:bgPr>
+        <a:solidFill>
+          <a:srgbClr val="EEEBE4"/>
+        </a:solidFill>
+        <a:effectLst/>
+      </p:bgPr>
+    </p:bg>
+    <p:spTree>
+      <p:nvGrpSpPr>
+        <p:cNvPr id="1" name=""/>
+        <p:cNvGrpSpPr/>
+        <p:nvPr/>
+      </p:nvGrpSpPr>
+      <p:grpSpPr/>
+      <p:sp>
+        <p:nvSpPr>
+          <p:cNvPr id="2" name="Rectangle 1"/>
+          <p:cNvSpPr/>
+          <p:nvPr/>
+        </p:nvSpPr>
+        <p:spPr>
+          <a:xfrm>
+            <a:off x="0" y="0"/>
+            <a:ext cx="12191695" cy="384048"/>
+          </a:xfrm>
+          <a:prstGeom prst="rect">
+            <a:avLst/>
+          </a:prstGeom>
+          <a:solidFill>
+            <a:srgbClr val="0B2D5B"/>
+          </a:solidFill>
+          <a:ln>
+            <a:noFill/>
+          </a:ln>
+          <a:effectLst/>
+        </p:spPr>
+        <p:style>
+          <a:lnRef idx="1">
+            <a:schemeClr val="accent1"/>
+          </a:lnRef>
+          <a:fillRef idx="3">
+            <a:schemeClr val="accent1"/>
+          </a:fillRef>
+          <a:effectRef idx="2">
+            <a:schemeClr val="accent1"/>
+          </a:effectRef>
+          <a:fontRef idx="minor">
+            <a:schemeClr val="lt1"/>
+          </a:fontRef>
+        </p:style>
+        <p:txBody>
+          <a:bodyPr rtlCol="0" anchor="ctr"/>
+          <a:lstStyle/>
+          <a:p>
+            <a:pPr algn="ctr"/>
+          </a:p>
+        </p:txBody>
+      </p:sp>
+      <p:sp>
+        <p:nvSpPr>
+          <p:cNvPr id="3" name="TextBox 2"/>
           <p:cNvSpPr txBox="1"/>
           <p:nvPr/>
         </p:nvSpPr>
         <p:spPr>
           <a:xfrm>
-            <a:off x="822960" y="1005840"/>
-            <a:ext cx="10515600" cy="1097280"/>
+            <a:off x="548640" y="100584"/>
+            <a:ext cx="10972800" cy="274320"/>
           </a:xfrm>
           <a:prstGeom prst="rect">
             <a:avLst/>
@@ -8107,31 +8433,31 @@
           <a:p>
             <a:pPr algn="l">
               <a:spcAft>
-                <a:spcPts val="1620"/>
-              </a:spcAft>
-            </a:pPr>
-            <a:r>
-              <a:rPr sz="3600" b="1" i="0">
-                <a:solidFill>
-                  <a:srgbClr val="1C1B19"/>
-                </a:solidFill>
-                <a:latin typeface="Source Serif 4"/>
-              </a:rPr>
-              <a:t>Builds it or breaks it?</a:t>
-            </a:r>
-          </a:p>
-        </p:txBody>
-      </p:sp>
-      <p:sp>
-        <p:nvSpPr>
-          <p:cNvPr id="6" name="TextBox 5"/>
+                <a:spcPts val="495"/>
+              </a:spcAft>
+            </a:pPr>
+            <a:r>
+              <a:rPr sz="1100" b="1" i="0">
+                <a:solidFill>
+                  <a:srgbClr val="FFFFFF"/>
+                </a:solidFill>
+                <a:latin typeface="Inter Tight"/>
+              </a:rPr>
+              <a:t>TEACHER PAGE  ·  skipped when you present  ·  Lesson plan</a:t>
+            </a:r>
+          </a:p>
+        </p:txBody>
+      </p:sp>
+      <p:sp>
+        <p:nvSpPr>
+          <p:cNvPr id="4" name="TextBox 3"/>
           <p:cNvSpPr txBox="1"/>
           <p:nvPr/>
         </p:nvSpPr>
         <p:spPr>
           <a:xfrm>
-            <a:off x="822960" y="2057400"/>
-            <a:ext cx="548640" cy="804672"/>
+            <a:off x="548640" y="685800"/>
+            <a:ext cx="10972800" cy="731520"/>
           </a:xfrm>
           <a:prstGeom prst="rect">
             <a:avLst/>
@@ -8146,31 +8472,31 @@
           <a:p>
             <a:pPr algn="l">
               <a:spcAft>
-                <a:spcPts val="1170"/>
-              </a:spcAft>
-            </a:pPr>
-            <a:r>
-              <a:rPr sz="2600" b="1" i="0">
-                <a:solidFill>
-                  <a:srgbClr val="F47B20"/>
+                <a:spcPts val="1530"/>
+              </a:spcAft>
+            </a:pPr>
+            <a:r>
+              <a:rPr sz="3400" b="1" i="0">
+                <a:solidFill>
+                  <a:srgbClr val="1C1B19"/>
                 </a:solidFill>
                 <a:latin typeface="Source Serif 4"/>
               </a:rPr>
-              <a:t>1</a:t>
-            </a:r>
-          </a:p>
-        </p:txBody>
-      </p:sp>
-      <p:sp>
-        <p:nvSpPr>
-          <p:cNvPr id="7" name="TextBox 6"/>
+              <a:t>Dignity and Belonging</a:t>
+            </a:r>
+          </a:p>
+        </p:txBody>
+      </p:sp>
+      <p:sp>
+        <p:nvSpPr>
+          <p:cNvPr id="5" name="TextBox 4"/>
           <p:cNvSpPr txBox="1"/>
           <p:nvPr/>
         </p:nvSpPr>
         <p:spPr>
           <a:xfrm>
-            <a:off x="1463040" y="2093976"/>
-            <a:ext cx="9875520" cy="804672"/>
+            <a:off x="548640" y="1325880"/>
+            <a:ext cx="10972800" cy="365760"/>
           </a:xfrm>
           <a:prstGeom prst="rect">
             <a:avLst/>
@@ -8185,31 +8511,31 @@
           <a:p>
             <a:pPr algn="l">
               <a:spcAft>
-                <a:spcPts val="945"/>
-              </a:spcAft>
-            </a:pPr>
-            <a:r>
-              <a:rPr sz="2100" b="1" i="0">
-                <a:solidFill>
-                  <a:srgbClr val="1C1B19"/>
-                </a:solidFill>
-                <a:latin typeface="Source Serif 4"/>
-              </a:rPr>
-              <a:t>A name said right, or mangled and laughed off</a:t>
-            </a:r>
-          </a:p>
-        </p:txBody>
-      </p:sp>
-      <p:sp>
-        <p:nvSpPr>
-          <p:cNvPr id="8" name="TextBox 7"/>
+                <a:spcPts val="630"/>
+              </a:spcAft>
+            </a:pPr>
+            <a:r>
+              <a:rPr sz="1400" b="0" i="0">
+                <a:solidFill>
+                  <a:srgbClr val="5D5A54"/>
+                </a:solidFill>
+                <a:latin typeface="Inter Tight"/>
+              </a:rPr>
+              <a:t>Upper School  ·  20 minutes (fits a 30-minute advisory, with time for your opening check-in; 10-minute version below)  ·  Any grade</a:t>
+            </a:r>
+          </a:p>
+        </p:txBody>
+      </p:sp>
+      <p:sp>
+        <p:nvSpPr>
+          <p:cNvPr id="6" name="TextBox 5"/>
           <p:cNvSpPr txBox="1"/>
           <p:nvPr/>
         </p:nvSpPr>
         <p:spPr>
           <a:xfrm>
-            <a:off x="822960" y="2862072"/>
-            <a:ext cx="548640" cy="804672"/>
+            <a:off x="548640" y="1828800"/>
+            <a:ext cx="5120640" cy="4389120"/>
           </a:xfrm>
           <a:prstGeom prst="rect">
             <a:avLst/>
@@ -8224,31 +8550,127 @@
           <a:p>
             <a:pPr algn="l">
               <a:spcAft>
-                <a:spcPts val="1170"/>
-              </a:spcAft>
-            </a:pPr>
-            <a:r>
-              <a:rPr sz="2600" b="1" i="0">
-                <a:solidFill>
-                  <a:srgbClr val="F47B20"/>
+                <a:spcPts val="675"/>
+              </a:spcAft>
+            </a:pPr>
+            <a:r>
+              <a:rPr sz="1100" b="1" i="0">
+                <a:solidFill>
+                  <a:srgbClr val="0B2D5B"/>
+                </a:solidFill>
+                <a:latin typeface="Inter Tight"/>
+              </a:rPr>
+              <a:t>GOAL</a:t>
+            </a:r>
+          </a:p>
+          <a:p>
+            <a:pPr algn="l">
+              <a:spcAft>
+                <a:spcPts val="675"/>
+              </a:spcAft>
+            </a:pPr>
+            <a:r>
+              <a:rPr sz="1500" b="0" i="0">
+                <a:solidFill>
+                  <a:srgbClr val="1C1B19"/>
                 </a:solidFill>
                 <a:latin typeface="Source Serif 4"/>
               </a:rPr>
-              <a:t>2</a:t>
-            </a:r>
-          </a:p>
-        </p:txBody>
-      </p:sp>
-      <p:sp>
-        <p:nvSpPr>
-          <p:cNvPr id="9" name="TextBox 8"/>
+              <a:t>Students can tell the difference between dignity (worth everyone has) and respect (earned), and between belonging and fitting in; recognize small moments that build or break belonging; and choose one way to widen the circle this week. Nobody is asked to share a time they were left out or excluded someone.</a:t>
+            </a:r>
+          </a:p>
+          <a:p>
+            <a:pPr algn="l">
+              <a:spcAft>
+                <a:spcPts val="675"/>
+              </a:spcAft>
+            </a:pPr>
+            <a:r>
+              <a:rPr sz="1500" b="0" i="0">
+                <a:solidFill>
+                  <a:srgbClr val="1C1B19"/>
+                </a:solidFill>
+                <a:latin typeface="Source Serif 4"/>
+              </a:rPr>
+              <a:t/>
+            </a:r>
+          </a:p>
+          <a:p>
+            <a:pPr algn="l">
+              <a:spcAft>
+                <a:spcPts val="675"/>
+              </a:spcAft>
+            </a:pPr>
+            <a:r>
+              <a:rPr sz="1100" b="1" i="0">
+                <a:solidFill>
+                  <a:srgbClr val="0B2D5B"/>
+                </a:solidFill>
+                <a:latin typeface="Inter Tight"/>
+              </a:rPr>
+              <a:t>MATERIALS</a:t>
+            </a:r>
+          </a:p>
+          <a:p>
+            <a:pPr algn="l">
+              <a:spcAft>
+                <a:spcPts val="675"/>
+              </a:spcAft>
+            </a:pPr>
+            <a:r>
+              <a:rPr sz="1500" b="0" i="0">
+                <a:solidFill>
+                  <a:srgbClr val="1C1B19"/>
+                </a:solidFill>
+                <a:latin typeface="Source Serif 4"/>
+              </a:rPr>
+              <a:t>Index cards, one per student</a:t>
+            </a:r>
+          </a:p>
+          <a:p>
+            <a:pPr algn="l">
+              <a:spcAft>
+                <a:spcPts val="675"/>
+              </a:spcAft>
+            </a:pPr>
+            <a:r>
+              <a:rPr sz="1500" b="0" i="0">
+                <a:solidFill>
+                  <a:srgbClr val="1C1B19"/>
+                </a:solidFill>
+                <a:latin typeface="Source Serif 4"/>
+              </a:rPr>
+              <a:t>A board or chart paper with two columns: Builds belonging and Breaks it</a:t>
+            </a:r>
+          </a:p>
+          <a:p>
+            <a:pPr algn="l">
+              <a:spcAft>
+                <a:spcPts val="675"/>
+              </a:spcAft>
+            </a:pPr>
+            <a:r>
+              <a:rPr sz="1500" b="0" i="0">
+                <a:solidFill>
+                  <a:srgbClr val="1C1B19"/>
+                </a:solidFill>
+                <a:latin typeface="Source Serif 4"/>
+              </a:rPr>
+              <a:t>The student page link (last slide) to share after advisory</a:t>
+            </a:r>
+          </a:p>
+        </p:txBody>
+      </p:sp>
+      <p:sp>
+        <p:nvSpPr>
+          <p:cNvPr id="7" name="TextBox 6"/>
           <p:cNvSpPr txBox="1"/>
           <p:nvPr/>
         </p:nvSpPr>
         <p:spPr>
           <a:xfrm>
-            <a:off x="1463040" y="2898648"/>
-            <a:ext cx="9875520" cy="804672"/>
+            <a:off x="6126480" y="1828800"/>
+            <a:ext cx="5486400" cy="4389120"/>
           </a:xfrm>
           <a:prstGeom prst="rect">
             <a:avLst/>
@@ -8263,251 +8685,190 @@
           <a:p>
             <a:pPr algn="l">
               <a:spcAft>
-                <a:spcPts val="945"/>
-              </a:spcAft>
-            </a:pPr>
-            <a:r>
-              <a:rPr sz="2100" b="1" i="0">
+                <a:spcPts val="630"/>
+              </a:spcAft>
+            </a:pPr>
+            <a:r>
+              <a:rPr sz="1100" b="1" i="0">
+                <a:solidFill>
+                  <a:srgbClr val="0B2D5B"/>
+                </a:solidFill>
+                <a:latin typeface="Inter Tight"/>
+              </a:rPr>
+              <a:t>FLOW</a:t>
+            </a:r>
+          </a:p>
+          <a:p>
+            <a:pPr algn="l">
+              <a:spcAft>
+                <a:spcPts val="630"/>
+              </a:spcAft>
+            </a:pPr>
+            <a:r>
+              <a:rPr sz="1300" b="1" i="0">
+                <a:solidFill>
+                  <a:srgbClr val="F47B20"/>
+                </a:solidFill>
+                <a:latin typeface="Inter Tight"/>
+              </a:rPr>
+              <a:t>3 min   </a:t>
+            </a:r>
+            <a:r>
+              <a:rPr sz="1400" b="0" i="0">
                 <a:solidFill>
                   <a:srgbClr val="1C1B19"/>
                 </a:solidFill>
                 <a:latin typeface="Source Serif 4"/>
               </a:rPr>
-              <a:t>Saving a seat, or a back turned</a:t>
-            </a:r>
-          </a:p>
-        </p:txBody>
-      </p:sp>
-      <p:sp>
-        <p:nvSpPr>
-          <p:cNvPr id="10" name="TextBox 9"/>
-          <p:cNvSpPr txBox="1"/>
-          <p:nvPr/>
-        </p:nvSpPr>
-        <p:spPr>
-          <a:xfrm>
-            <a:off x="822960" y="3666744"/>
-            <a:ext cx="548640" cy="804672"/>
-          </a:xfrm>
-          <a:prstGeom prst="rect">
-            <a:avLst/>
-          </a:prstGeom>
-          <a:noFill/>
-        </p:spPr>
-        <p:txBody>
-          <a:bodyPr wrap="square" anchor="t" lIns="0" rIns="0" tIns="0" bIns="0">
-            <a:spAutoFit/>
-          </a:bodyPr>
-          <a:lstStyle/>
-          <a:p>
-            <a:pPr algn="l">
-              <a:spcAft>
-                <a:spcPts val="1170"/>
-              </a:spcAft>
-            </a:pPr>
-            <a:r>
-              <a:rPr sz="2600" b="1" i="0">
+              <a:t>A place you belong: what makes it that way?</a:t>
+            </a:r>
+          </a:p>
+          <a:p>
+            <a:pPr algn="l">
+              <a:spcAft>
+                <a:spcPts val="630"/>
+              </a:spcAft>
+            </a:pPr>
+            <a:r>
+              <a:rPr sz="1300" b="1" i="0">
                 <a:solidFill>
                   <a:srgbClr val="F47B20"/>
                 </a:solidFill>
+                <a:latin typeface="Inter Tight"/>
+              </a:rPr>
+              <a:t>4 min   </a:t>
+            </a:r>
+            <a:r>
+              <a:rPr sz="1400" b="0" i="0">
+                <a:solidFill>
+                  <a:srgbClr val="1C1B19"/>
+                </a:solidFill>
                 <a:latin typeface="Source Serif 4"/>
               </a:rPr>
-              <a:t>3</a:t>
-            </a:r>
-          </a:p>
-        </p:txBody>
-      </p:sp>
-      <p:sp>
-        <p:nvSpPr>
-          <p:cNvPr id="11" name="TextBox 10"/>
-          <p:cNvSpPr txBox="1"/>
-          <p:nvPr/>
-        </p:nvSpPr>
-        <p:spPr>
-          <a:xfrm>
-            <a:off x="1463040" y="3703320"/>
-            <a:ext cx="9875520" cy="804672"/>
-          </a:xfrm>
-          <a:prstGeom prst="rect">
-            <a:avLst/>
-          </a:prstGeom>
-          <a:noFill/>
-        </p:spPr>
-        <p:txBody>
-          <a:bodyPr wrap="square" anchor="t" lIns="0" rIns="0" tIns="0" bIns="0">
-            <a:spAutoFit/>
-          </a:bodyPr>
-          <a:lstStyle/>
-          <a:p>
-            <a:pPr algn="l">
-              <a:spcAft>
-                <a:spcPts val="945"/>
-              </a:spcAft>
-            </a:pPr>
-            <a:r>
-              <a:rPr sz="2100" b="1" i="0">
+              <a:t>Dignity and respect: what's the difference?</a:t>
+            </a:r>
+          </a:p>
+          <a:p>
+            <a:pPr algn="l">
+              <a:spcAft>
+                <a:spcPts val="630"/>
+              </a:spcAft>
+            </a:pPr>
+            <a:r>
+              <a:rPr sz="1300" b="1" i="0">
+                <a:solidFill>
+                  <a:srgbClr val="F47B20"/>
+                </a:solidFill>
+                <a:latin typeface="Inter Tight"/>
+              </a:rPr>
+              <a:t>4 min   </a:t>
+            </a:r>
+            <a:r>
+              <a:rPr sz="1400" b="0" i="0">
                 <a:solidFill>
                   <a:srgbClr val="1C1B19"/>
                 </a:solidFill>
                 <a:latin typeface="Source Serif 4"/>
               </a:rPr>
-              <a:t>"Want to join?", or a group chat nobody mentions</a:t>
-            </a:r>
-          </a:p>
-        </p:txBody>
-      </p:sp>
-      <p:sp>
-        <p:nvSpPr>
-          <p:cNvPr id="12" name="TextBox 11"/>
-          <p:cNvSpPr txBox="1"/>
-          <p:nvPr/>
-        </p:nvSpPr>
-        <p:spPr>
-          <a:xfrm>
-            <a:off x="822960" y="4471416"/>
-            <a:ext cx="548640" cy="804672"/>
-          </a:xfrm>
-          <a:prstGeom prst="rect">
-            <a:avLst/>
-          </a:prstGeom>
-          <a:noFill/>
-        </p:spPr>
-        <p:txBody>
-          <a:bodyPr wrap="square" anchor="t" lIns="0" rIns="0" tIns="0" bIns="0">
-            <a:spAutoFit/>
-          </a:bodyPr>
-          <a:lstStyle/>
-          <a:p>
-            <a:pPr algn="l">
-              <a:spcAft>
-                <a:spcPts val="1170"/>
-              </a:spcAft>
-            </a:pPr>
-            <a:r>
-              <a:rPr sz="2600" b="1" i="0">
+              <a:t>Belonging versus fitting in</a:t>
+            </a:r>
+          </a:p>
+          <a:p>
+            <a:pPr algn="l">
+              <a:spcAft>
+                <a:spcPts val="630"/>
+              </a:spcAft>
+            </a:pPr>
+            <a:r>
+              <a:rPr sz="1300" b="1" i="0">
                 <a:solidFill>
                   <a:srgbClr val="F47B20"/>
                 </a:solidFill>
+                <a:latin typeface="Inter Tight"/>
+              </a:rPr>
+              <a:t>6 min   </a:t>
+            </a:r>
+            <a:r>
+              <a:rPr sz="1400" b="0" i="0">
+                <a:solidFill>
+                  <a:srgbClr val="1C1B19"/>
+                </a:solidFill>
                 <a:latin typeface="Source Serif 4"/>
               </a:rPr>
-              <a:t>4</a:t>
-            </a:r>
-          </a:p>
-        </p:txBody>
-      </p:sp>
-      <p:sp>
-        <p:nvSpPr>
-          <p:cNvPr id="13" name="TextBox 12"/>
-          <p:cNvSpPr txBox="1"/>
-          <p:nvPr/>
-        </p:nvSpPr>
-        <p:spPr>
-          <a:xfrm>
-            <a:off x="1463040" y="4507992"/>
-            <a:ext cx="9875520" cy="804672"/>
-          </a:xfrm>
-          <a:prstGeom prst="rect">
-            <a:avLst/>
-          </a:prstGeom>
-          <a:noFill/>
-        </p:spPr>
-        <p:txBody>
-          <a:bodyPr wrap="square" anchor="t" lIns="0" rIns="0" tIns="0" bIns="0">
-            <a:spAutoFit/>
-          </a:bodyPr>
-          <a:lstStyle/>
-          <a:p>
-            <a:pPr algn="l">
-              <a:spcAft>
-                <a:spcPts val="945"/>
-              </a:spcAft>
-            </a:pPr>
-            <a:r>
-              <a:rPr sz="2100" b="1" i="0">
+              <a:t>Small moments: builds it or breaks it? (sort)</a:t>
+            </a:r>
+          </a:p>
+          <a:p>
+            <a:pPr algn="l">
+              <a:spcAft>
+                <a:spcPts val="630"/>
+              </a:spcAft>
+            </a:pPr>
+            <a:r>
+              <a:rPr sz="1300" b="1" i="0">
+                <a:solidFill>
+                  <a:srgbClr val="F47B20"/>
+                </a:solidFill>
+                <a:latin typeface="Inter Tight"/>
+              </a:rPr>
+              <a:t>3 min   </a:t>
+            </a:r>
+            <a:r>
+              <a:rPr sz="1400" b="0" i="0">
                 <a:solidFill>
                   <a:srgbClr val="1C1B19"/>
                 </a:solidFill>
                 <a:latin typeface="Source Serif 4"/>
               </a:rPr>
-              <a:t>A joke about someone's identity</a:t>
-            </a:r>
-          </a:p>
-        </p:txBody>
-      </p:sp>
-      <p:sp>
-        <p:nvSpPr>
-          <p:cNvPr id="14" name="TextBox 13"/>
-          <p:cNvSpPr txBox="1"/>
-          <p:nvPr/>
-        </p:nvSpPr>
-        <p:spPr>
-          <a:xfrm>
-            <a:off x="822960" y="5276088"/>
-            <a:ext cx="548640" cy="804672"/>
-          </a:xfrm>
-          <a:prstGeom prst="rect">
-            <a:avLst/>
-          </a:prstGeom>
-          <a:noFill/>
-        </p:spPr>
-        <p:txBody>
-          <a:bodyPr wrap="square" anchor="t" lIns="0" rIns="0" tIns="0" bIns="0">
-            <a:spAutoFit/>
-          </a:bodyPr>
-          <a:lstStyle/>
-          <a:p>
-            <a:pPr algn="l">
-              <a:spcAft>
-                <a:spcPts val="1170"/>
-              </a:spcAft>
-            </a:pPr>
-            <a:r>
-              <a:rPr sz="2600" b="1" i="0">
-                <a:solidFill>
-                  <a:srgbClr val="F47B20"/>
+              <a:t>One way to widen the circle, privately, and the student page link</a:t>
+            </a:r>
+          </a:p>
+          <a:p>
+            <a:pPr algn="l">
+              <a:spcAft>
+                <a:spcPts val="630"/>
+              </a:spcAft>
+            </a:pPr>
+            <a:r>
+              <a:rPr sz="1400" b="0" i="0">
+                <a:solidFill>
+                  <a:srgbClr val="1C1B19"/>
                 </a:solidFill>
                 <a:latin typeface="Source Serif 4"/>
               </a:rPr>
-              <a:t>5</a:t>
-            </a:r>
-          </a:p>
-        </p:txBody>
-      </p:sp>
-      <p:sp>
-        <p:nvSpPr>
-          <p:cNvPr id="15" name="TextBox 14"/>
-          <p:cNvSpPr txBox="1"/>
-          <p:nvPr/>
-        </p:nvSpPr>
-        <p:spPr>
-          <a:xfrm>
-            <a:off x="1463040" y="5312664"/>
-            <a:ext cx="9875520" cy="804672"/>
-          </a:xfrm>
-          <a:prstGeom prst="rect">
-            <a:avLst/>
-          </a:prstGeom>
-          <a:noFill/>
-        </p:spPr>
-        <p:txBody>
-          <a:bodyPr wrap="square" anchor="t" lIns="0" rIns="0" tIns="0" bIns="0">
-            <a:spAutoFit/>
-          </a:bodyPr>
-          <a:lstStyle/>
-          <a:p>
-            <a:pPr algn="l">
-              <a:spcAft>
-                <a:spcPts val="945"/>
-              </a:spcAft>
-            </a:pPr>
-            <a:r>
-              <a:rPr sz="2100" b="1" i="0">
+              <a:t/>
+            </a:r>
+          </a:p>
+          <a:p>
+            <a:pPr algn="l">
+              <a:spcAft>
+                <a:spcPts val="630"/>
+              </a:spcAft>
+            </a:pPr>
+            <a:r>
+              <a:rPr sz="1100" b="1" i="0">
+                <a:solidFill>
+                  <a:srgbClr val="0B2D5B"/>
+                </a:solidFill>
+                <a:latin typeface="Inter Tight"/>
+              </a:rPr>
+              <a:t>SHORT ON TIME (10-MINUTE CHECK-IN)</a:t>
+            </a:r>
+          </a:p>
+          <a:p>
+            <a:pPr algn="l">
+              <a:spcAft>
+                <a:spcPts val="630"/>
+              </a:spcAft>
+            </a:pPr>
+            <a:r>
+              <a:rPr sz="1400" b="0" i="0">
                 <a:solidFill>
                   <a:srgbClr val="1C1B19"/>
                 </a:solidFill>
                 <a:latin typeface="Source Serif 4"/>
               </a:rPr>
-              <a:t>"I got that wrong. I'm sorry."</a:t>
+              <a:t>Dignity versus respect (3), belonging versus fitting in (3), pick one way to widen the circle this week (3), share the link (1).</a:t>
             </a:r>
           </a:p>
         </p:txBody>

--- a/decks/dignity-and-belonging-lesson-v2.pptx
+++ b/decks/dignity-and-belonging-lesson-v2.pptx
@@ -5969,6 +5969,45 @@
                 <a:latin typeface="Inter Tight"/>
               </a:rPr>
               <a:t>Beaver Upper School · Counseling</a:t>
+            </a:r>
+          </a:p>
+        </p:txBody>
+      </p:sp>
+      <p:sp>
+        <p:nvSpPr>
+          <p:cNvPr id="8" name="TextBox 7"/>
+          <p:cNvSpPr txBox="1"/>
+          <p:nvPr/>
+        </p:nvSpPr>
+        <p:spPr>
+          <a:xfrm>
+            <a:off x="6766560" y="5897880"/>
+            <a:ext cx="4846320" cy="640080"/>
+          </a:xfrm>
+          <a:prstGeom prst="rect">
+            <a:avLst/>
+          </a:prstGeom>
+          <a:noFill/>
+        </p:spPr>
+        <p:txBody>
+          <a:bodyPr wrap="square" anchor="t" lIns="0" rIns="0" tIns="0" bIns="0">
+            <a:spAutoFit/>
+          </a:bodyPr>
+          <a:lstStyle/>
+          <a:p>
+            <a:pPr algn="r">
+              <a:spcAft>
+                <a:spcPts val="495"/>
+              </a:spcAft>
+            </a:pPr>
+            <a:r>
+              <a:rPr sz="1100" b="0" i="0">
+                <a:solidFill>
+                  <a:srgbClr val="E8E4DA"/>
+                </a:solidFill>
+                <a:latin typeface="Inter Tight"/>
+              </a:rPr>
+              <a:t>Written by Dr. Rick Wilson, with AI-assisted drafting. Every lesson is reviewed and edited by Dr. Wilson.</a:t>
             </a:r>
           </a:p>
         </p:txBody>
